--- a/ranking-nyata.pptx
+++ b/ranking-nyata.pptx
@@ -1016,85 +1016,58 @@
       </p:sp>
       <p:sp>
         <p:nvSpPr>
-          <p:cNvPr id="4" name="Text 2"/>
-          <p:cNvSpPr/>
-          <p:nvPr/>
-        </p:nvSpPr>
-        <p:spPr>
-          <a:xfrm>
-            <a:off x="320040" y="146304"/>
-            <a:ext cx="1828800" cy="274320"/>
-          </a:xfrm>
-          <a:prstGeom prst="rect">
-            <a:avLst/>
-          </a:prstGeom>
-          <a:noFill/>
-          <a:ln/>
-        </p:spPr>
-        <p:txBody>
-          <a:bodyPr wrap="square" rtlCol="0" anchor="ctr"/>
-          <a:lstStyle/>
-          <a:p>
-            <a:pPr indent="0" marL="0">
-              <a:buNone/>
-            </a:pPr>
-            <a:r>
-              <a:rPr lang="en-US" sz="1300" b="1" dirty="0">
-                <a:solidFill>
-                  <a:srgbClr val="FFFFFF"/>
-                </a:solidFill>
-                <a:latin typeface="Arial" pitchFamily="34" charset="0"/>
-                <a:ea typeface="Arial" pitchFamily="34" charset="-122"/>
-                <a:cs typeface="Arial" pitchFamily="34" charset="-120"/>
-              </a:rPr>
-              <a:t>Danantara</a:t>
-            </a:r>
-            <a:endParaRPr lang="en-US" sz="1300" dirty="0"/>
-          </a:p>
-        </p:txBody>
-      </p:sp>
-      <p:sp>
-        <p:nvSpPr>
-          <p:cNvPr id="5" name="Text 3"/>
-          <p:cNvSpPr/>
-          <p:nvPr/>
-        </p:nvSpPr>
-        <p:spPr>
-          <a:xfrm>
-            <a:off x="320040" y="384048"/>
-            <a:ext cx="1828800" cy="274320"/>
-          </a:xfrm>
-          <a:prstGeom prst="rect">
-            <a:avLst/>
-          </a:prstGeom>
-          <a:noFill/>
-          <a:ln/>
-        </p:spPr>
-        <p:txBody>
-          <a:bodyPr wrap="square" rtlCol="0" anchor="ctr"/>
-          <a:lstStyle/>
-          <a:p>
-            <a:pPr indent="0" marL="0">
-              <a:buNone/>
-            </a:pPr>
-            <a:r>
-              <a:rPr lang="en-US" sz="1300" b="1" dirty="0">
-                <a:solidFill>
-                  <a:srgbClr val="FFFFFF"/>
-                </a:solidFill>
-                <a:latin typeface="Arial" pitchFamily="34" charset="0"/>
-                <a:ea typeface="Arial" pitchFamily="34" charset="-122"/>
-                <a:cs typeface="Arial" pitchFamily="34" charset="-120"/>
-              </a:rPr>
-              <a:t>Indonesia</a:t>
-            </a:r>
-            <a:endParaRPr lang="en-US" sz="1300" dirty="0"/>
-          </a:p>
-        </p:txBody>
-      </p:sp>
-      <p:sp>
-        <p:nvSpPr>
-          <p:cNvPr id="6" name="Text 4"/>
+          <p:cNvPr id="4" name="Shape 2"/>
+          <p:cNvSpPr/>
+          <p:nvPr/>
+        </p:nvSpPr>
+        <p:spPr>
+          <a:xfrm>
+            <a:off x="274320" y="201168"/>
+            <a:ext cx="713232" cy="713232"/>
+          </a:xfrm>
+          <a:prstGeom prst="roundRect">
+            <a:avLst>
+              <a:gd name="adj" fmla="val 15385"/>
+            </a:avLst>
+          </a:prstGeom>
+          <a:solidFill>
+            <a:srgbClr val="FFFFFF"/>
+          </a:solidFill>
+          <a:ln w="12700">
+            <a:solidFill>
+              <a:srgbClr val="FFFFFF"/>
+            </a:solidFill>
+            <a:prstDash val="solid"/>
+          </a:ln>
+        </p:spPr>
+      </p:sp>
+      <p:pic>
+        <p:nvPicPr>
+          <p:cNvPr id="5" name="Image 0" descr="preencoded.png">    </p:cNvPr>
+          <p:cNvPicPr>
+            <a:picLocks noChangeAspect="1"/>
+          </p:cNvPicPr>
+          <p:nvPr/>
+        </p:nvPicPr>
+        <p:blipFill>
+          <a:blip r:embed="rId1"/>
+          <a:stretch>
+            <a:fillRect/>
+          </a:stretch>
+        </p:blipFill>
+        <p:spPr>
+          <a:xfrm>
+            <a:off x="310896" y="237744"/>
+            <a:ext cx="640080" cy="640080"/>
+          </a:xfrm>
+          <a:prstGeom prst="rect">
+            <a:avLst/>
+          </a:prstGeom>
+        </p:spPr>
+      </p:pic>
+      <p:sp>
+        <p:nvSpPr>
+          <p:cNvPr id="6" name="Text 3"/>
           <p:cNvSpPr/>
           <p:nvPr/>
         </p:nvSpPr>
@@ -1133,7 +1106,7 @@
       </p:sp>
       <p:sp>
         <p:nvSpPr>
-          <p:cNvPr id="7" name="Text 5"/>
+          <p:cNvPr id="7" name="Text 4"/>
           <p:cNvSpPr/>
           <p:nvPr/>
         </p:nvSpPr>
@@ -1172,7 +1145,7 @@
       </p:sp>
       <p:sp>
         <p:nvSpPr>
-          <p:cNvPr id="8" name="Text 6"/>
+          <p:cNvPr id="8" name="Text 5"/>
           <p:cNvSpPr/>
           <p:nvPr/>
         </p:nvSpPr>
@@ -1211,7 +1184,7 @@
       </p:sp>
       <p:sp>
         <p:nvSpPr>
-          <p:cNvPr id="9" name="Text 7"/>
+          <p:cNvPr id="9" name="Text 6"/>
           <p:cNvSpPr/>
           <p:nvPr/>
         </p:nvSpPr>
@@ -1250,7 +1223,7 @@
       </p:sp>
       <p:sp>
         <p:nvSpPr>
-          <p:cNvPr id="10" name="Text 8"/>
+          <p:cNvPr id="10" name="Text 7"/>
           <p:cNvSpPr/>
           <p:nvPr/>
         </p:nvSpPr>
@@ -1289,7 +1262,7 @@
       </p:sp>
       <p:sp>
         <p:nvSpPr>
-          <p:cNvPr id="11" name="Text 9"/>
+          <p:cNvPr id="11" name="Text 8"/>
           <p:cNvSpPr/>
           <p:nvPr/>
         </p:nvSpPr>
@@ -1328,7 +1301,7 @@
       </p:sp>
       <p:sp>
         <p:nvSpPr>
-          <p:cNvPr id="12" name="Text 10"/>
+          <p:cNvPr id="12" name="Text 9"/>
           <p:cNvSpPr/>
           <p:nvPr/>
         </p:nvSpPr>
@@ -1367,7 +1340,7 @@
       </p:sp>
       <p:sp>
         <p:nvSpPr>
-          <p:cNvPr id="13" name="Text 11"/>
+          <p:cNvPr id="13" name="Text 10"/>
           <p:cNvSpPr/>
           <p:nvPr/>
         </p:nvSpPr>
@@ -1406,7 +1379,7 @@
       </p:sp>
       <p:sp>
         <p:nvSpPr>
-          <p:cNvPr id="14" name="Text 12"/>
+          <p:cNvPr id="14" name="Text 11"/>
           <p:cNvSpPr/>
           <p:nvPr/>
         </p:nvSpPr>
@@ -1445,7 +1418,7 @@
       </p:sp>
       <p:sp>
         <p:nvSpPr>
-          <p:cNvPr id="15" name="Text 13"/>
+          <p:cNvPr id="15" name="Text 12"/>
           <p:cNvSpPr/>
           <p:nvPr/>
         </p:nvSpPr>
@@ -1484,7 +1457,7 @@
       </p:sp>
       <p:sp>
         <p:nvSpPr>
-          <p:cNvPr id="16" name="Text 14"/>
+          <p:cNvPr id="16" name="Text 13"/>
           <p:cNvSpPr/>
           <p:nvPr/>
         </p:nvSpPr>
@@ -1523,7 +1496,7 @@
       </p:sp>
       <p:sp>
         <p:nvSpPr>
-          <p:cNvPr id="17" name="Text 15"/>
+          <p:cNvPr id="17" name="Text 14"/>
           <p:cNvSpPr/>
           <p:nvPr/>
         </p:nvSpPr>
@@ -1562,7 +1535,7 @@
       </p:sp>
       <p:sp>
         <p:nvSpPr>
-          <p:cNvPr id="18" name="Text 16"/>
+          <p:cNvPr id="18" name="Text 15"/>
           <p:cNvSpPr/>
           <p:nvPr/>
         </p:nvSpPr>
@@ -1683,85 +1656,58 @@
       </p:sp>
       <p:sp>
         <p:nvSpPr>
-          <p:cNvPr id="4" name="Text 2"/>
-          <p:cNvSpPr/>
-          <p:nvPr/>
-        </p:nvSpPr>
-        <p:spPr>
-          <a:xfrm>
-            <a:off x="320040" y="146304"/>
-            <a:ext cx="1828800" cy="274320"/>
-          </a:xfrm>
-          <a:prstGeom prst="rect">
-            <a:avLst/>
-          </a:prstGeom>
-          <a:noFill/>
-          <a:ln/>
-        </p:spPr>
-        <p:txBody>
-          <a:bodyPr wrap="square" rtlCol="0" anchor="ctr"/>
-          <a:lstStyle/>
-          <a:p>
-            <a:pPr indent="0" marL="0">
-              <a:buNone/>
-            </a:pPr>
-            <a:r>
-              <a:rPr lang="en-US" sz="1300" b="1" dirty="0">
-                <a:solidFill>
-                  <a:srgbClr val="FFFFFF"/>
-                </a:solidFill>
-                <a:latin typeface="Arial" pitchFamily="34" charset="0"/>
-                <a:ea typeface="Arial" pitchFamily="34" charset="-122"/>
-                <a:cs typeface="Arial" pitchFamily="34" charset="-120"/>
-              </a:rPr>
-              <a:t>Danantara</a:t>
-            </a:r>
-            <a:endParaRPr lang="en-US" sz="1300" dirty="0"/>
-          </a:p>
-        </p:txBody>
-      </p:sp>
-      <p:sp>
-        <p:nvSpPr>
-          <p:cNvPr id="5" name="Text 3"/>
-          <p:cNvSpPr/>
-          <p:nvPr/>
-        </p:nvSpPr>
-        <p:spPr>
-          <a:xfrm>
-            <a:off x="320040" y="384048"/>
-            <a:ext cx="1828800" cy="274320"/>
-          </a:xfrm>
-          <a:prstGeom prst="rect">
-            <a:avLst/>
-          </a:prstGeom>
-          <a:noFill/>
-          <a:ln/>
-        </p:spPr>
-        <p:txBody>
-          <a:bodyPr wrap="square" rtlCol="0" anchor="ctr"/>
-          <a:lstStyle/>
-          <a:p>
-            <a:pPr indent="0" marL="0">
-              <a:buNone/>
-            </a:pPr>
-            <a:r>
-              <a:rPr lang="en-US" sz="1300" b="1" dirty="0">
-                <a:solidFill>
-                  <a:srgbClr val="FFFFFF"/>
-                </a:solidFill>
-                <a:latin typeface="Arial" pitchFamily="34" charset="0"/>
-                <a:ea typeface="Arial" pitchFamily="34" charset="-122"/>
-                <a:cs typeface="Arial" pitchFamily="34" charset="-120"/>
-              </a:rPr>
-              <a:t>Indonesia</a:t>
-            </a:r>
-            <a:endParaRPr lang="en-US" sz="1300" dirty="0"/>
-          </a:p>
-        </p:txBody>
-      </p:sp>
-      <p:sp>
-        <p:nvSpPr>
-          <p:cNvPr id="6" name="Text 4"/>
+          <p:cNvPr id="4" name="Shape 2"/>
+          <p:cNvSpPr/>
+          <p:nvPr/>
+        </p:nvSpPr>
+        <p:spPr>
+          <a:xfrm>
+            <a:off x="274320" y="201168"/>
+            <a:ext cx="713232" cy="713232"/>
+          </a:xfrm>
+          <a:prstGeom prst="roundRect">
+            <a:avLst>
+              <a:gd name="adj" fmla="val 15385"/>
+            </a:avLst>
+          </a:prstGeom>
+          <a:solidFill>
+            <a:srgbClr val="FFFFFF"/>
+          </a:solidFill>
+          <a:ln w="12700">
+            <a:solidFill>
+              <a:srgbClr val="FFFFFF"/>
+            </a:solidFill>
+            <a:prstDash val="solid"/>
+          </a:ln>
+        </p:spPr>
+      </p:sp>
+      <p:pic>
+        <p:nvPicPr>
+          <p:cNvPr id="5" name="Image 0" descr="preencoded.png">    </p:cNvPr>
+          <p:cNvPicPr>
+            <a:picLocks noChangeAspect="1"/>
+          </p:cNvPicPr>
+          <p:nvPr/>
+        </p:nvPicPr>
+        <p:blipFill>
+          <a:blip r:embed="rId1"/>
+          <a:stretch>
+            <a:fillRect/>
+          </a:stretch>
+        </p:blipFill>
+        <p:spPr>
+          <a:xfrm>
+            <a:off x="310896" y="237744"/>
+            <a:ext cx="640080" cy="640080"/>
+          </a:xfrm>
+          <a:prstGeom prst="rect">
+            <a:avLst/>
+          </a:prstGeom>
+        </p:spPr>
+      </p:pic>
+      <p:sp>
+        <p:nvSpPr>
+          <p:cNvPr id="6" name="Text 3"/>
           <p:cNvSpPr/>
           <p:nvPr/>
         </p:nvSpPr>
@@ -1800,7 +1746,7 @@
       </p:sp>
       <p:sp>
         <p:nvSpPr>
-          <p:cNvPr id="7" name="Text 5"/>
+          <p:cNvPr id="7" name="Text 4"/>
           <p:cNvSpPr/>
           <p:nvPr/>
         </p:nvSpPr>
@@ -1839,7 +1785,7 @@
       </p:sp>
       <p:sp>
         <p:nvSpPr>
-          <p:cNvPr id="8" name="Shape 6"/>
+          <p:cNvPr id="8" name="Shape 5"/>
           <p:cNvSpPr/>
           <p:nvPr/>
         </p:nvSpPr>
@@ -1866,7 +1812,7 @@
       </p:sp>
       <p:sp>
         <p:nvSpPr>
-          <p:cNvPr id="9" name="Text 7"/>
+          <p:cNvPr id="9" name="Text 6"/>
           <p:cNvSpPr/>
           <p:nvPr/>
         </p:nvSpPr>
@@ -1905,7 +1851,7 @@
       </p:sp>
       <p:sp>
         <p:nvSpPr>
-          <p:cNvPr id="10" name="Text 8"/>
+          <p:cNvPr id="10" name="Text 7"/>
           <p:cNvSpPr/>
           <p:nvPr/>
         </p:nvSpPr>
@@ -1944,7 +1890,7 @@
       </p:sp>
       <p:sp>
         <p:nvSpPr>
-          <p:cNvPr id="11" name="Shape 9"/>
+          <p:cNvPr id="11" name="Shape 8"/>
           <p:cNvSpPr/>
           <p:nvPr/>
         </p:nvSpPr>
@@ -1969,7 +1915,7 @@
       </p:sp>
       <p:sp>
         <p:nvSpPr>
-          <p:cNvPr id="12" name="Shape 10"/>
+          <p:cNvPr id="12" name="Shape 9"/>
           <p:cNvSpPr/>
           <p:nvPr/>
         </p:nvSpPr>
@@ -1996,14 +1942,14 @@
       </p:sp>
       <p:pic>
         <p:nvPicPr>
-          <p:cNvPr id="13" name="Image 0" descr="preencoded.png">    </p:cNvPr>
+          <p:cNvPr id="13" name="Image 1" descr="preencoded.png">    </p:cNvPr>
           <p:cNvPicPr>
             <a:picLocks noChangeAspect="1"/>
           </p:cNvPicPr>
           <p:nvPr/>
         </p:nvPicPr>
         <p:blipFill>
-          <a:blip r:embed="rId1"/>
+          <a:blip r:embed="rId2"/>
           <a:stretch>
             <a:fillRect/>
           </a:stretch>
@@ -2020,7 +1966,7 @@
       </p:pic>
       <p:sp>
         <p:nvSpPr>
-          <p:cNvPr id="14" name="Text 11"/>
+          <p:cNvPr id="14" name="Text 10"/>
           <p:cNvSpPr/>
           <p:nvPr/>
         </p:nvSpPr>
@@ -2061,7 +2007,7 @@
       </p:sp>
       <p:sp>
         <p:nvSpPr>
-          <p:cNvPr id="15" name="Shape 12"/>
+          <p:cNvPr id="15" name="Shape 11"/>
           <p:cNvSpPr/>
           <p:nvPr/>
         </p:nvSpPr>
@@ -2086,7 +2032,7 @@
       </p:sp>
       <p:sp>
         <p:nvSpPr>
-          <p:cNvPr id="16" name="Text 13"/>
+          <p:cNvPr id="16" name="Text 12"/>
           <p:cNvSpPr/>
           <p:nvPr/>
         </p:nvSpPr>
@@ -2125,7 +2071,7 @@
       </p:sp>
       <p:sp>
         <p:nvSpPr>
-          <p:cNvPr id="17" name="Shape 14"/>
+          <p:cNvPr id="17" name="Shape 13"/>
           <p:cNvSpPr/>
           <p:nvPr/>
         </p:nvSpPr>
@@ -2152,7 +2098,7 @@
       </p:sp>
       <p:sp>
         <p:nvSpPr>
-          <p:cNvPr id="18" name="Text 15"/>
+          <p:cNvPr id="18" name="Text 14"/>
           <p:cNvSpPr/>
           <p:nvPr/>
         </p:nvSpPr>
@@ -2191,7 +2137,7 @@
       </p:sp>
       <p:sp>
         <p:nvSpPr>
-          <p:cNvPr id="19" name="Shape 16"/>
+          <p:cNvPr id="19" name="Shape 15"/>
           <p:cNvSpPr/>
           <p:nvPr/>
         </p:nvSpPr>
@@ -2218,7 +2164,7 @@
       </p:sp>
       <p:sp>
         <p:nvSpPr>
-          <p:cNvPr id="20" name="Text 17"/>
+          <p:cNvPr id="20" name="Text 16"/>
           <p:cNvSpPr/>
           <p:nvPr/>
         </p:nvSpPr>
@@ -2257,7 +2203,7 @@
       </p:sp>
       <p:sp>
         <p:nvSpPr>
-          <p:cNvPr id="21" name="Shape 18"/>
+          <p:cNvPr id="21" name="Shape 17"/>
           <p:cNvSpPr/>
           <p:nvPr/>
         </p:nvSpPr>
@@ -2284,7 +2230,7 @@
       </p:sp>
       <p:sp>
         <p:nvSpPr>
-          <p:cNvPr id="22" name="Shape 19"/>
+          <p:cNvPr id="22" name="Shape 18"/>
           <p:cNvSpPr/>
           <p:nvPr/>
         </p:nvSpPr>
@@ -2309,7 +2255,7 @@
       </p:sp>
       <p:sp>
         <p:nvSpPr>
-          <p:cNvPr id="23" name="Text 20"/>
+          <p:cNvPr id="23" name="Text 19"/>
           <p:cNvSpPr/>
           <p:nvPr/>
         </p:nvSpPr>
@@ -2348,7 +2294,7 @@
       </p:sp>
       <p:sp>
         <p:nvSpPr>
-          <p:cNvPr id="24" name="Text 21"/>
+          <p:cNvPr id="24" name="Text 20"/>
           <p:cNvSpPr/>
           <p:nvPr/>
         </p:nvSpPr>
@@ -2387,7 +2333,7 @@
       </p:sp>
       <p:sp>
         <p:nvSpPr>
-          <p:cNvPr id="25" name="Shape 22"/>
+          <p:cNvPr id="25" name="Shape 21"/>
           <p:cNvSpPr/>
           <p:nvPr/>
         </p:nvSpPr>
@@ -2412,7 +2358,7 @@
       </p:sp>
       <p:sp>
         <p:nvSpPr>
-          <p:cNvPr id="26" name="Text 23"/>
+          <p:cNvPr id="26" name="Text 22"/>
           <p:cNvSpPr/>
           <p:nvPr/>
         </p:nvSpPr>
@@ -2451,7 +2397,7 @@
       </p:sp>
       <p:sp>
         <p:nvSpPr>
-          <p:cNvPr id="27" name="Text 24"/>
+          <p:cNvPr id="27" name="Text 23"/>
           <p:cNvSpPr/>
           <p:nvPr/>
         </p:nvSpPr>
@@ -2490,7 +2436,7 @@
       </p:sp>
       <p:sp>
         <p:nvSpPr>
-          <p:cNvPr id="28" name="Shape 25"/>
+          <p:cNvPr id="28" name="Shape 24"/>
           <p:cNvSpPr/>
           <p:nvPr/>
         </p:nvSpPr>
@@ -2515,7 +2461,7 @@
       </p:sp>
       <p:sp>
         <p:nvSpPr>
-          <p:cNvPr id="29" name="Text 26"/>
+          <p:cNvPr id="29" name="Text 25"/>
           <p:cNvSpPr/>
           <p:nvPr/>
         </p:nvSpPr>
@@ -2554,7 +2500,7 @@
       </p:sp>
       <p:sp>
         <p:nvSpPr>
-          <p:cNvPr id="30" name="Text 27"/>
+          <p:cNvPr id="30" name="Text 26"/>
           <p:cNvSpPr/>
           <p:nvPr/>
         </p:nvSpPr>
@@ -2593,7 +2539,7 @@
       </p:sp>
       <p:sp>
         <p:nvSpPr>
-          <p:cNvPr id="31" name="Shape 28"/>
+          <p:cNvPr id="31" name="Shape 27"/>
           <p:cNvSpPr/>
           <p:nvPr/>
         </p:nvSpPr>
@@ -2618,7 +2564,7 @@
       </p:sp>
       <p:sp>
         <p:nvSpPr>
-          <p:cNvPr id="32" name="Text 29"/>
+          <p:cNvPr id="32" name="Text 28"/>
           <p:cNvSpPr/>
           <p:nvPr/>
         </p:nvSpPr>
@@ -2657,7 +2603,7 @@
       </p:sp>
       <p:sp>
         <p:nvSpPr>
-          <p:cNvPr id="33" name="Text 30"/>
+          <p:cNvPr id="33" name="Text 29"/>
           <p:cNvSpPr/>
           <p:nvPr/>
         </p:nvSpPr>
@@ -2696,7 +2642,7 @@
       </p:sp>
       <p:sp>
         <p:nvSpPr>
-          <p:cNvPr id="34" name="Shape 31"/>
+          <p:cNvPr id="34" name="Shape 30"/>
           <p:cNvSpPr/>
           <p:nvPr/>
         </p:nvSpPr>
@@ -2721,7 +2667,7 @@
       </p:sp>
       <p:sp>
         <p:nvSpPr>
-          <p:cNvPr id="35" name="Text 32"/>
+          <p:cNvPr id="35" name="Text 31"/>
           <p:cNvSpPr/>
           <p:nvPr/>
         </p:nvSpPr>
@@ -2760,7 +2706,7 @@
       </p:sp>
       <p:sp>
         <p:nvSpPr>
-          <p:cNvPr id="36" name="Text 33"/>
+          <p:cNvPr id="36" name="Text 32"/>
           <p:cNvSpPr/>
           <p:nvPr/>
         </p:nvSpPr>

--- a/ranking-nyata.pptx
+++ b/ranking-nyata.pptx
@@ -11,8 +11,8 @@
   <p:notesMasterIdLst>
     <p:notesMasterId r:id="rId4"/>
   </p:notesMasterIdLst>
-  <p:sldSz cx="12191695" cy="6858000"/>
-  <p:notesSz cx="6858000" cy="12191695"/>
+  <p:sldSz cx="12191695" cy="7048287"/>
+  <p:notesSz cx="7048287" cy="12191695"/>
   <p:defaultTextStyle>
     <a:lvl1pPr marL="0" algn="l" defTabSz="914400" rtl="0" eaLnBrk="1" latinLnBrk="0" hangingPunct="1">
       <a:defRPr sz="1800" kern="1200">
@@ -964,86 +964,9 @@
           <a:chExt cx="0" cy="0"/>
         </a:xfrm>
       </p:grpSpPr>
-      <p:sp>
-        <p:nvSpPr>
-          <p:cNvPr id="2" name="Shape 0"/>
-          <p:cNvSpPr/>
-          <p:nvPr/>
-        </p:nvSpPr>
-        <p:spPr>
-          <a:xfrm>
-            <a:off x="0" y="6172200"/>
-            <a:ext cx="12191695" cy="685800"/>
-          </a:xfrm>
-          <a:prstGeom prst="rect">
-            <a:avLst/>
-          </a:prstGeom>
-          <a:solidFill>
-            <a:srgbClr val="D4112E"/>
-          </a:solidFill>
-          <a:ln w="12700">
-            <a:solidFill>
-              <a:srgbClr val="D4112E"/>
-            </a:solidFill>
-            <a:prstDash val="solid"/>
-          </a:ln>
-        </p:spPr>
-      </p:sp>
-      <p:sp>
-        <p:nvSpPr>
-          <p:cNvPr id="3" name="Shape 1"/>
-          <p:cNvSpPr/>
-          <p:nvPr/>
-        </p:nvSpPr>
-        <p:spPr>
-          <a:xfrm>
-            <a:off x="-1097280" y="5806440"/>
-            <a:ext cx="14386255" cy="822960"/>
-          </a:xfrm>
-          <a:prstGeom prst="ellipse">
-            <a:avLst/>
-          </a:prstGeom>
-          <a:solidFill>
-            <a:srgbClr val="D4112E"/>
-          </a:solidFill>
-          <a:ln w="12700">
-            <a:solidFill>
-              <a:srgbClr val="D4112E"/>
-            </a:solidFill>
-            <a:prstDash val="solid"/>
-          </a:ln>
-        </p:spPr>
-      </p:sp>
-      <p:sp>
-        <p:nvSpPr>
-          <p:cNvPr id="4" name="Shape 2"/>
-          <p:cNvSpPr/>
-          <p:nvPr/>
-        </p:nvSpPr>
-        <p:spPr>
-          <a:xfrm>
-            <a:off x="274320" y="201168"/>
-            <a:ext cx="713232" cy="713232"/>
-          </a:xfrm>
-          <a:prstGeom prst="roundRect">
-            <a:avLst>
-              <a:gd name="adj" fmla="val 15385"/>
-            </a:avLst>
-          </a:prstGeom>
-          <a:solidFill>
-            <a:srgbClr val="FFFFFF"/>
-          </a:solidFill>
-          <a:ln w="12700">
-            <a:solidFill>
-              <a:srgbClr val="FFFFFF"/>
-            </a:solidFill>
-            <a:prstDash val="solid"/>
-          </a:ln>
-        </p:spPr>
-      </p:sp>
       <p:pic>
         <p:nvPicPr>
-          <p:cNvPr id="5" name="Image 0" descr="preencoded.png">    </p:cNvPr>
+          <p:cNvPr id="2" name="Image 0" descr="preencoded.png">    </p:cNvPr>
           <p:cNvPicPr>
             <a:picLocks noChangeAspect="1"/>
           </p:cNvPicPr>
@@ -1057,8 +980,8 @@
         </p:blipFill>
         <p:spPr>
           <a:xfrm>
-            <a:off x="310896" y="237744"/>
-            <a:ext cx="640080" cy="640080"/>
+            <a:off x="0" y="0"/>
+            <a:ext cx="12191695" cy="7048287"/>
           </a:xfrm>
           <a:prstGeom prst="rect">
             <a:avLst/>
@@ -1067,46 +990,7 @@
       </p:pic>
       <p:sp>
         <p:nvSpPr>
-          <p:cNvPr id="6" name="Text 3"/>
-          <p:cNvSpPr/>
-          <p:nvPr/>
-        </p:nvSpPr>
-        <p:spPr>
-          <a:xfrm>
-            <a:off x="10820095" y="201168"/>
-            <a:ext cx="1051560" cy="502920"/>
-          </a:xfrm>
-          <a:prstGeom prst="rect">
-            <a:avLst/>
-          </a:prstGeom>
-          <a:noFill/>
-          <a:ln/>
-        </p:spPr>
-        <p:txBody>
-          <a:bodyPr wrap="square" rtlCol="0" anchor="ctr"/>
-          <a:lstStyle/>
-          <a:p>
-            <a:pPr algn="r" indent="0" marL="0">
-              <a:buNone/>
-            </a:pPr>
-            <a:r>
-              <a:rPr lang="en-US" sz="3400" b="1" dirty="0">
-                <a:solidFill>
-                  <a:srgbClr val="FFFFFF"/>
-                </a:solidFill>
-                <a:latin typeface="Arial" pitchFamily="34" charset="0"/>
-                <a:ea typeface="Arial" pitchFamily="34" charset="-122"/>
-                <a:cs typeface="Arial" pitchFamily="34" charset="-120"/>
-              </a:rPr>
-              <a:t>btn</a:t>
-            </a:r>
-            <a:endParaRPr lang="en-US" sz="3400" dirty="0"/>
-          </a:p>
-        </p:txBody>
-      </p:sp>
-      <p:sp>
-        <p:nvSpPr>
-          <p:cNvPr id="7" name="Text 4"/>
+          <p:cNvPr id="3" name="Text 0"/>
           <p:cNvSpPr/>
           <p:nvPr/>
         </p:nvSpPr>
@@ -1145,7 +1029,7 @@
       </p:sp>
       <p:sp>
         <p:nvSpPr>
-          <p:cNvPr id="8" name="Text 5"/>
+          <p:cNvPr id="4" name="Text 1"/>
           <p:cNvSpPr/>
           <p:nvPr/>
         </p:nvSpPr>
@@ -1184,7 +1068,7 @@
       </p:sp>
       <p:sp>
         <p:nvSpPr>
-          <p:cNvPr id="9" name="Text 6"/>
+          <p:cNvPr id="5" name="Text 2"/>
           <p:cNvSpPr/>
           <p:nvPr/>
         </p:nvSpPr>
@@ -1223,7 +1107,7 @@
       </p:sp>
       <p:sp>
         <p:nvSpPr>
-          <p:cNvPr id="10" name="Text 7"/>
+          <p:cNvPr id="6" name="Text 3"/>
           <p:cNvSpPr/>
           <p:nvPr/>
         </p:nvSpPr>
@@ -1262,7 +1146,7 @@
       </p:sp>
       <p:sp>
         <p:nvSpPr>
-          <p:cNvPr id="11" name="Text 8"/>
+          <p:cNvPr id="7" name="Text 4"/>
           <p:cNvSpPr/>
           <p:nvPr/>
         </p:nvSpPr>
@@ -1301,7 +1185,7 @@
       </p:sp>
       <p:sp>
         <p:nvSpPr>
-          <p:cNvPr id="12" name="Text 9"/>
+          <p:cNvPr id="8" name="Text 5"/>
           <p:cNvSpPr/>
           <p:nvPr/>
         </p:nvSpPr>
@@ -1340,7 +1224,7 @@
       </p:sp>
       <p:sp>
         <p:nvSpPr>
-          <p:cNvPr id="13" name="Text 10"/>
+          <p:cNvPr id="9" name="Text 6"/>
           <p:cNvSpPr/>
           <p:nvPr/>
         </p:nvSpPr>
@@ -1379,7 +1263,7 @@
       </p:sp>
       <p:sp>
         <p:nvSpPr>
-          <p:cNvPr id="14" name="Text 11"/>
+          <p:cNvPr id="10" name="Text 7"/>
           <p:cNvSpPr/>
           <p:nvPr/>
         </p:nvSpPr>
@@ -1418,7 +1302,7 @@
       </p:sp>
       <p:sp>
         <p:nvSpPr>
-          <p:cNvPr id="15" name="Text 12"/>
+          <p:cNvPr id="11" name="Text 8"/>
           <p:cNvSpPr/>
           <p:nvPr/>
         </p:nvSpPr>
@@ -1457,7 +1341,7 @@
       </p:sp>
       <p:sp>
         <p:nvSpPr>
-          <p:cNvPr id="16" name="Text 13"/>
+          <p:cNvPr id="12" name="Text 9"/>
           <p:cNvSpPr/>
           <p:nvPr/>
         </p:nvSpPr>
@@ -1496,7 +1380,7 @@
       </p:sp>
       <p:sp>
         <p:nvSpPr>
-          <p:cNvPr id="17" name="Text 14"/>
+          <p:cNvPr id="13" name="Text 10"/>
           <p:cNvSpPr/>
           <p:nvPr/>
         </p:nvSpPr>
@@ -1535,7 +1419,7 @@
       </p:sp>
       <p:sp>
         <p:nvSpPr>
-          <p:cNvPr id="18" name="Text 15"/>
+          <p:cNvPr id="14" name="Text 11"/>
           <p:cNvSpPr/>
           <p:nvPr/>
         </p:nvSpPr>
@@ -1604,86 +1488,9 @@
           <a:chExt cx="0" cy="0"/>
         </a:xfrm>
       </p:grpSpPr>
-      <p:sp>
-        <p:nvSpPr>
-          <p:cNvPr id="2" name="Shape 0"/>
-          <p:cNvSpPr/>
-          <p:nvPr/>
-        </p:nvSpPr>
-        <p:spPr>
-          <a:xfrm>
-            <a:off x="0" y="6172200"/>
-            <a:ext cx="12191695" cy="685800"/>
-          </a:xfrm>
-          <a:prstGeom prst="rect">
-            <a:avLst/>
-          </a:prstGeom>
-          <a:solidFill>
-            <a:srgbClr val="D4112E"/>
-          </a:solidFill>
-          <a:ln w="12700">
-            <a:solidFill>
-              <a:srgbClr val="D4112E"/>
-            </a:solidFill>
-            <a:prstDash val="solid"/>
-          </a:ln>
-        </p:spPr>
-      </p:sp>
-      <p:sp>
-        <p:nvSpPr>
-          <p:cNvPr id="3" name="Shape 1"/>
-          <p:cNvSpPr/>
-          <p:nvPr/>
-        </p:nvSpPr>
-        <p:spPr>
-          <a:xfrm>
-            <a:off x="-1097280" y="5806440"/>
-            <a:ext cx="14386255" cy="822960"/>
-          </a:xfrm>
-          <a:prstGeom prst="ellipse">
-            <a:avLst/>
-          </a:prstGeom>
-          <a:solidFill>
-            <a:srgbClr val="D4112E"/>
-          </a:solidFill>
-          <a:ln w="12700">
-            <a:solidFill>
-              <a:srgbClr val="D4112E"/>
-            </a:solidFill>
-            <a:prstDash val="solid"/>
-          </a:ln>
-        </p:spPr>
-      </p:sp>
-      <p:sp>
-        <p:nvSpPr>
-          <p:cNvPr id="4" name="Shape 2"/>
-          <p:cNvSpPr/>
-          <p:nvPr/>
-        </p:nvSpPr>
-        <p:spPr>
-          <a:xfrm>
-            <a:off x="274320" y="201168"/>
-            <a:ext cx="713232" cy="713232"/>
-          </a:xfrm>
-          <a:prstGeom prst="roundRect">
-            <a:avLst>
-              <a:gd name="adj" fmla="val 15385"/>
-            </a:avLst>
-          </a:prstGeom>
-          <a:solidFill>
-            <a:srgbClr val="FFFFFF"/>
-          </a:solidFill>
-          <a:ln w="12700">
-            <a:solidFill>
-              <a:srgbClr val="FFFFFF"/>
-            </a:solidFill>
-            <a:prstDash val="solid"/>
-          </a:ln>
-        </p:spPr>
-      </p:sp>
       <p:pic>
         <p:nvPicPr>
-          <p:cNvPr id="5" name="Image 0" descr="preencoded.png">    </p:cNvPr>
+          <p:cNvPr id="2" name="Image 0" descr="preencoded.png">    </p:cNvPr>
           <p:cNvPicPr>
             <a:picLocks noChangeAspect="1"/>
           </p:cNvPicPr>
@@ -1697,8 +1504,8 @@
         </p:blipFill>
         <p:spPr>
           <a:xfrm>
-            <a:off x="310896" y="237744"/>
-            <a:ext cx="640080" cy="640080"/>
+            <a:off x="0" y="0"/>
+            <a:ext cx="12191695" cy="7048287"/>
           </a:xfrm>
           <a:prstGeom prst="rect">
             <a:avLst/>
@@ -1707,46 +1514,7 @@
       </p:pic>
       <p:sp>
         <p:nvSpPr>
-          <p:cNvPr id="6" name="Text 3"/>
-          <p:cNvSpPr/>
-          <p:nvPr/>
-        </p:nvSpPr>
-        <p:spPr>
-          <a:xfrm>
-            <a:off x="10820095" y="201168"/>
-            <a:ext cx="1051560" cy="502920"/>
-          </a:xfrm>
-          <a:prstGeom prst="rect">
-            <a:avLst/>
-          </a:prstGeom>
-          <a:noFill/>
-          <a:ln/>
-        </p:spPr>
-        <p:txBody>
-          <a:bodyPr wrap="square" rtlCol="0" anchor="ctr"/>
-          <a:lstStyle/>
-          <a:p>
-            <a:pPr algn="r" indent="0" marL="0">
-              <a:buNone/>
-            </a:pPr>
-            <a:r>
-              <a:rPr lang="en-US" sz="3400" b="1" dirty="0">
-                <a:solidFill>
-                  <a:srgbClr val="FFFFFF"/>
-                </a:solidFill>
-                <a:latin typeface="Arial" pitchFamily="34" charset="0"/>
-                <a:ea typeface="Arial" pitchFamily="34" charset="-122"/>
-                <a:cs typeface="Arial" pitchFamily="34" charset="-120"/>
-              </a:rPr>
-              <a:t>btn</a:t>
-            </a:r>
-            <a:endParaRPr lang="en-US" sz="3400" dirty="0"/>
-          </a:p>
-        </p:txBody>
-      </p:sp>
-      <p:sp>
-        <p:nvSpPr>
-          <p:cNvPr id="7" name="Text 4"/>
+          <p:cNvPr id="3" name="Text 0"/>
           <p:cNvSpPr/>
           <p:nvPr/>
         </p:nvSpPr>
@@ -1785,7 +1553,7 @@
       </p:sp>
       <p:sp>
         <p:nvSpPr>
-          <p:cNvPr id="8" name="Shape 5"/>
+          <p:cNvPr id="4" name="Shape 1"/>
           <p:cNvSpPr/>
           <p:nvPr/>
         </p:nvSpPr>
@@ -1812,7 +1580,7 @@
       </p:sp>
       <p:sp>
         <p:nvSpPr>
-          <p:cNvPr id="9" name="Text 6"/>
+          <p:cNvPr id="5" name="Text 2"/>
           <p:cNvSpPr/>
           <p:nvPr/>
         </p:nvSpPr>
@@ -1851,7 +1619,7 @@
       </p:sp>
       <p:sp>
         <p:nvSpPr>
-          <p:cNvPr id="10" name="Text 7"/>
+          <p:cNvPr id="6" name="Text 3"/>
           <p:cNvSpPr/>
           <p:nvPr/>
         </p:nvSpPr>
@@ -1890,7 +1658,7 @@
       </p:sp>
       <p:sp>
         <p:nvSpPr>
-          <p:cNvPr id="11" name="Shape 8"/>
+          <p:cNvPr id="7" name="Shape 4"/>
           <p:cNvSpPr/>
           <p:nvPr/>
         </p:nvSpPr>
@@ -1915,7 +1683,7 @@
       </p:sp>
       <p:sp>
         <p:nvSpPr>
-          <p:cNvPr id="12" name="Shape 9"/>
+          <p:cNvPr id="8" name="Shape 5"/>
           <p:cNvSpPr/>
           <p:nvPr/>
         </p:nvSpPr>
@@ -1942,7 +1710,7 @@
       </p:sp>
       <p:pic>
         <p:nvPicPr>
-          <p:cNvPr id="13" name="Image 1" descr="preencoded.png">    </p:cNvPr>
+          <p:cNvPr id="9" name="Image 1" descr="preencoded.png">    </p:cNvPr>
           <p:cNvPicPr>
             <a:picLocks noChangeAspect="1"/>
           </p:cNvPicPr>
@@ -1966,7 +1734,7 @@
       </p:pic>
       <p:sp>
         <p:nvSpPr>
-          <p:cNvPr id="14" name="Text 10"/>
+          <p:cNvPr id="10" name="Text 6"/>
           <p:cNvSpPr/>
           <p:nvPr/>
         </p:nvSpPr>
@@ -2007,7 +1775,7 @@
       </p:sp>
       <p:sp>
         <p:nvSpPr>
-          <p:cNvPr id="15" name="Shape 11"/>
+          <p:cNvPr id="11" name="Shape 7"/>
           <p:cNvSpPr/>
           <p:nvPr/>
         </p:nvSpPr>
@@ -2032,7 +1800,7 @@
       </p:sp>
       <p:sp>
         <p:nvSpPr>
-          <p:cNvPr id="16" name="Text 12"/>
+          <p:cNvPr id="12" name="Text 8"/>
           <p:cNvSpPr/>
           <p:nvPr/>
         </p:nvSpPr>
@@ -2071,7 +1839,7 @@
       </p:sp>
       <p:sp>
         <p:nvSpPr>
-          <p:cNvPr id="17" name="Shape 13"/>
+          <p:cNvPr id="13" name="Shape 9"/>
           <p:cNvSpPr/>
           <p:nvPr/>
         </p:nvSpPr>
@@ -2098,7 +1866,7 @@
       </p:sp>
       <p:sp>
         <p:nvSpPr>
-          <p:cNvPr id="18" name="Text 14"/>
+          <p:cNvPr id="14" name="Text 10"/>
           <p:cNvSpPr/>
           <p:nvPr/>
         </p:nvSpPr>
@@ -2137,13 +1905,13 @@
       </p:sp>
       <p:sp>
         <p:nvSpPr>
-          <p:cNvPr id="19" name="Shape 15"/>
-          <p:cNvSpPr/>
-          <p:nvPr/>
-        </p:nvSpPr>
-        <p:spPr>
-          <a:xfrm>
-            <a:off x="5254600" y="5925312"/>
+          <p:cNvPr id="15" name="Shape 11"/>
+          <p:cNvSpPr/>
+          <p:nvPr/>
+        </p:nvSpPr>
+        <p:spPr>
+          <a:xfrm>
+            <a:off x="5254600" y="6115599"/>
             <a:ext cx="1691640" cy="256032"/>
           </a:xfrm>
           <a:prstGeom prst="roundRect">
@@ -2164,13 +1932,13 @@
       </p:sp>
       <p:sp>
         <p:nvSpPr>
-          <p:cNvPr id="20" name="Text 16"/>
-          <p:cNvSpPr/>
-          <p:nvPr/>
-        </p:nvSpPr>
-        <p:spPr>
-          <a:xfrm>
-            <a:off x="5254600" y="5925312"/>
+          <p:cNvPr id="16" name="Text 12"/>
+          <p:cNvSpPr/>
+          <p:nvPr/>
+        </p:nvSpPr>
+        <p:spPr>
+          <a:xfrm>
+            <a:off x="5254600" y="6115599"/>
             <a:ext cx="1691640" cy="256032"/>
           </a:xfrm>
           <a:prstGeom prst="rect">
@@ -2203,13 +1971,13 @@
       </p:sp>
       <p:sp>
         <p:nvSpPr>
-          <p:cNvPr id="21" name="Shape 17"/>
-          <p:cNvSpPr/>
-          <p:nvPr/>
-        </p:nvSpPr>
-        <p:spPr>
-          <a:xfrm>
-            <a:off x="3883000" y="6199632"/>
+          <p:cNvPr id="17" name="Shape 13"/>
+          <p:cNvSpPr/>
+          <p:nvPr/>
+        </p:nvSpPr>
+        <p:spPr>
+          <a:xfrm>
+            <a:off x="3883000" y="6389919"/>
             <a:ext cx="4434840" cy="457200"/>
           </a:xfrm>
           <a:prstGeom prst="roundRect">
@@ -2230,13 +1998,13 @@
       </p:sp>
       <p:sp>
         <p:nvSpPr>
-          <p:cNvPr id="22" name="Shape 18"/>
-          <p:cNvSpPr/>
-          <p:nvPr/>
-        </p:nvSpPr>
-        <p:spPr>
-          <a:xfrm>
-            <a:off x="4084168" y="6309360"/>
+          <p:cNvPr id="18" name="Shape 14"/>
+          <p:cNvSpPr/>
+          <p:nvPr/>
+        </p:nvSpPr>
+        <p:spPr>
+          <a:xfrm>
+            <a:off x="4084168" y="6499647"/>
             <a:ext cx="91440" cy="91440"/>
           </a:xfrm>
           <a:prstGeom prst="ellipse">
@@ -2255,13 +2023,13 @@
       </p:sp>
       <p:sp>
         <p:nvSpPr>
-          <p:cNvPr id="23" name="Text 19"/>
-          <p:cNvSpPr/>
-          <p:nvPr/>
-        </p:nvSpPr>
-        <p:spPr>
-          <a:xfrm>
-            <a:off x="4212184" y="6263640"/>
+          <p:cNvPr id="19" name="Text 15"/>
+          <p:cNvSpPr/>
+          <p:nvPr/>
+        </p:nvSpPr>
+        <p:spPr>
+          <a:xfrm>
+            <a:off x="4212184" y="6453927"/>
             <a:ext cx="713232" cy="155448"/>
           </a:xfrm>
           <a:prstGeom prst="rect">
@@ -2294,13 +2062,13 @@
       </p:sp>
       <p:sp>
         <p:nvSpPr>
-          <p:cNvPr id="24" name="Text 20"/>
-          <p:cNvSpPr/>
-          <p:nvPr/>
-        </p:nvSpPr>
-        <p:spPr>
-          <a:xfrm>
-            <a:off x="4212184" y="6409944"/>
+          <p:cNvPr id="20" name="Text 16"/>
+          <p:cNvSpPr/>
+          <p:nvPr/>
+        </p:nvSpPr>
+        <p:spPr>
+          <a:xfrm>
+            <a:off x="4212184" y="6600231"/>
             <a:ext cx="713232" cy="155448"/>
           </a:xfrm>
           <a:prstGeom prst="rect">
@@ -2333,13 +2101,13 @@
       </p:sp>
       <p:sp>
         <p:nvSpPr>
-          <p:cNvPr id="25" name="Shape 21"/>
-          <p:cNvSpPr/>
-          <p:nvPr/>
-        </p:nvSpPr>
-        <p:spPr>
-          <a:xfrm>
-            <a:off x="4952848" y="6309360"/>
+          <p:cNvPr id="21" name="Shape 17"/>
+          <p:cNvSpPr/>
+          <p:nvPr/>
+        </p:nvSpPr>
+        <p:spPr>
+          <a:xfrm>
+            <a:off x="4952848" y="6499647"/>
             <a:ext cx="91440" cy="91440"/>
           </a:xfrm>
           <a:prstGeom prst="ellipse">
@@ -2358,13 +2126,13 @@
       </p:sp>
       <p:sp>
         <p:nvSpPr>
-          <p:cNvPr id="26" name="Text 22"/>
-          <p:cNvSpPr/>
-          <p:nvPr/>
-        </p:nvSpPr>
-        <p:spPr>
-          <a:xfrm>
-            <a:off x="5080864" y="6263640"/>
+          <p:cNvPr id="22" name="Text 18"/>
+          <p:cNvSpPr/>
+          <p:nvPr/>
+        </p:nvSpPr>
+        <p:spPr>
+          <a:xfrm>
+            <a:off x="5080864" y="6453927"/>
             <a:ext cx="713232" cy="155448"/>
           </a:xfrm>
           <a:prstGeom prst="rect">
@@ -2397,13 +2165,13 @@
       </p:sp>
       <p:sp>
         <p:nvSpPr>
-          <p:cNvPr id="27" name="Text 23"/>
-          <p:cNvSpPr/>
-          <p:nvPr/>
-        </p:nvSpPr>
-        <p:spPr>
-          <a:xfrm>
-            <a:off x="5080864" y="6409944"/>
+          <p:cNvPr id="23" name="Text 19"/>
+          <p:cNvSpPr/>
+          <p:nvPr/>
+        </p:nvSpPr>
+        <p:spPr>
+          <a:xfrm>
+            <a:off x="5080864" y="6600231"/>
             <a:ext cx="713232" cy="155448"/>
           </a:xfrm>
           <a:prstGeom prst="rect">
@@ -2436,13 +2204,13 @@
       </p:sp>
       <p:sp>
         <p:nvSpPr>
-          <p:cNvPr id="28" name="Shape 24"/>
-          <p:cNvSpPr/>
-          <p:nvPr/>
-        </p:nvSpPr>
-        <p:spPr>
-          <a:xfrm>
-            <a:off x="5821528" y="6309360"/>
+          <p:cNvPr id="24" name="Shape 20"/>
+          <p:cNvSpPr/>
+          <p:nvPr/>
+        </p:nvSpPr>
+        <p:spPr>
+          <a:xfrm>
+            <a:off x="5821528" y="6499647"/>
             <a:ext cx="91440" cy="91440"/>
           </a:xfrm>
           <a:prstGeom prst="ellipse">
@@ -2461,13 +2229,13 @@
       </p:sp>
       <p:sp>
         <p:nvSpPr>
-          <p:cNvPr id="29" name="Text 25"/>
-          <p:cNvSpPr/>
-          <p:nvPr/>
-        </p:nvSpPr>
-        <p:spPr>
-          <a:xfrm>
-            <a:off x="5949544" y="6263640"/>
+          <p:cNvPr id="25" name="Text 21"/>
+          <p:cNvSpPr/>
+          <p:nvPr/>
+        </p:nvSpPr>
+        <p:spPr>
+          <a:xfrm>
+            <a:off x="5949544" y="6453927"/>
             <a:ext cx="713232" cy="155448"/>
           </a:xfrm>
           <a:prstGeom prst="rect">
@@ -2500,13 +2268,13 @@
       </p:sp>
       <p:sp>
         <p:nvSpPr>
-          <p:cNvPr id="30" name="Text 26"/>
-          <p:cNvSpPr/>
-          <p:nvPr/>
-        </p:nvSpPr>
-        <p:spPr>
-          <a:xfrm>
-            <a:off x="5949544" y="6409944"/>
+          <p:cNvPr id="26" name="Text 22"/>
+          <p:cNvSpPr/>
+          <p:nvPr/>
+        </p:nvSpPr>
+        <p:spPr>
+          <a:xfrm>
+            <a:off x="5949544" y="6600231"/>
             <a:ext cx="713232" cy="155448"/>
           </a:xfrm>
           <a:prstGeom prst="rect">
@@ -2539,13 +2307,13 @@
       </p:sp>
       <p:sp>
         <p:nvSpPr>
-          <p:cNvPr id="31" name="Shape 27"/>
-          <p:cNvSpPr/>
-          <p:nvPr/>
-        </p:nvSpPr>
-        <p:spPr>
-          <a:xfrm>
-            <a:off x="6690208" y="6309360"/>
+          <p:cNvPr id="27" name="Shape 23"/>
+          <p:cNvSpPr/>
+          <p:nvPr/>
+        </p:nvSpPr>
+        <p:spPr>
+          <a:xfrm>
+            <a:off x="6690208" y="6499647"/>
             <a:ext cx="91440" cy="91440"/>
           </a:xfrm>
           <a:prstGeom prst="ellipse">
@@ -2564,13 +2332,13 @@
       </p:sp>
       <p:sp>
         <p:nvSpPr>
-          <p:cNvPr id="32" name="Text 28"/>
-          <p:cNvSpPr/>
-          <p:nvPr/>
-        </p:nvSpPr>
-        <p:spPr>
-          <a:xfrm>
-            <a:off x="6818224" y="6263640"/>
+          <p:cNvPr id="28" name="Text 24"/>
+          <p:cNvSpPr/>
+          <p:nvPr/>
+        </p:nvSpPr>
+        <p:spPr>
+          <a:xfrm>
+            <a:off x="6818224" y="6453927"/>
             <a:ext cx="713232" cy="155448"/>
           </a:xfrm>
           <a:prstGeom prst="rect">
@@ -2603,13 +2371,13 @@
       </p:sp>
       <p:sp>
         <p:nvSpPr>
-          <p:cNvPr id="33" name="Text 29"/>
-          <p:cNvSpPr/>
-          <p:nvPr/>
-        </p:nvSpPr>
-        <p:spPr>
-          <a:xfrm>
-            <a:off x="6818224" y="6409944"/>
+          <p:cNvPr id="29" name="Text 25"/>
+          <p:cNvSpPr/>
+          <p:nvPr/>
+        </p:nvSpPr>
+        <p:spPr>
+          <a:xfrm>
+            <a:off x="6818224" y="6600231"/>
             <a:ext cx="713232" cy="155448"/>
           </a:xfrm>
           <a:prstGeom prst="rect">
@@ -2642,13 +2410,13 @@
       </p:sp>
       <p:sp>
         <p:nvSpPr>
-          <p:cNvPr id="34" name="Shape 30"/>
-          <p:cNvSpPr/>
-          <p:nvPr/>
-        </p:nvSpPr>
-        <p:spPr>
-          <a:xfrm>
-            <a:off x="7558888" y="6309360"/>
+          <p:cNvPr id="30" name="Shape 26"/>
+          <p:cNvSpPr/>
+          <p:nvPr/>
+        </p:nvSpPr>
+        <p:spPr>
+          <a:xfrm>
+            <a:off x="7558888" y="6499647"/>
             <a:ext cx="91440" cy="91440"/>
           </a:xfrm>
           <a:prstGeom prst="ellipse">
@@ -2667,13 +2435,13 @@
       </p:sp>
       <p:sp>
         <p:nvSpPr>
-          <p:cNvPr id="35" name="Text 31"/>
-          <p:cNvSpPr/>
-          <p:nvPr/>
-        </p:nvSpPr>
-        <p:spPr>
-          <a:xfrm>
-            <a:off x="7686904" y="6263640"/>
+          <p:cNvPr id="31" name="Text 27"/>
+          <p:cNvSpPr/>
+          <p:nvPr/>
+        </p:nvSpPr>
+        <p:spPr>
+          <a:xfrm>
+            <a:off x="7686904" y="6453927"/>
             <a:ext cx="713232" cy="155448"/>
           </a:xfrm>
           <a:prstGeom prst="rect">
@@ -2706,13 +2474,13 @@
       </p:sp>
       <p:sp>
         <p:nvSpPr>
-          <p:cNvPr id="36" name="Text 32"/>
-          <p:cNvSpPr/>
-          <p:nvPr/>
-        </p:nvSpPr>
-        <p:spPr>
-          <a:xfrm>
-            <a:off x="7686904" y="6409944"/>
+          <p:cNvPr id="32" name="Text 28"/>
+          <p:cNvSpPr/>
+          <p:nvPr/>
+        </p:nvSpPr>
+        <p:spPr>
+          <a:xfrm>
+            <a:off x="7686904" y="6600231"/>
             <a:ext cx="713232" cy="155448"/>
           </a:xfrm>
           <a:prstGeom prst="rect">

--- a/ranking-nyata.pptx
+++ b/ranking-nyata.pptx
@@ -1067,9 +1067,9 @@
                 <a:solidFill>
                   <a:srgbClr val="FFFFFF"/>
                 </a:solidFill>
-                <a:latin typeface="Arial" pitchFamily="34" charset="0"/>
-                <a:ea typeface="Arial" pitchFamily="34" charset="-122"/>
-                <a:cs typeface="Arial" pitchFamily="34" charset="-120"/>
+                <a:latin typeface="Aptos" pitchFamily="34" charset="0"/>
+                <a:ea typeface="Aptos" pitchFamily="34" charset="-122"/>
+                <a:cs typeface="Aptos" pitchFamily="34" charset="-120"/>
               </a:rPr>
               <a:t>Service Drill Ranking</a:t>
             </a:r>
@@ -1135,9 +1135,9 @@
                 <a:solidFill>
                   <a:srgbClr val="FFFFFF"/>
                 </a:solidFill>
-                <a:latin typeface="Arial" pitchFamily="34" charset="0"/>
-                <a:ea typeface="Arial" pitchFamily="34" charset="-122"/>
-                <a:cs typeface="Arial" pitchFamily="34" charset="-120"/>
+                <a:latin typeface="Aptos" pitchFamily="34" charset="0"/>
+                <a:ea typeface="Aptos" pitchFamily="34" charset="-122"/>
+                <a:cs typeface="Aptos" pitchFamily="34" charset="-120"/>
               </a:rPr>
               <a:t>Semua unit</a:t>
             </a:r>
@@ -1176,9 +1176,9 @@
                 <a:solidFill>
                   <a:srgbClr val="FFFFFF"/>
                 </a:solidFill>
-                <a:latin typeface="Arial" pitchFamily="34" charset="0"/>
-                <a:ea typeface="Arial" pitchFamily="34" charset="-122"/>
-                <a:cs typeface="Arial" pitchFamily="34" charset="-120"/>
+                <a:latin typeface="Aptos" pitchFamily="34" charset="0"/>
+                <a:ea typeface="Aptos" pitchFamily="34" charset="-122"/>
+                <a:cs typeface="Aptos" pitchFamily="34" charset="-120"/>
               </a:rPr>
               <a:t>Semua posisi</a:t>
             </a:r>
@@ -1215,9 +1215,9 @@
                 <a:solidFill>
                   <a:srgbClr val="FFFFFF"/>
                 </a:solidFill>
-                <a:latin typeface="Arial" pitchFamily="34" charset="0"/>
-                <a:ea typeface="Arial" pitchFamily="34" charset="-122"/>
-                <a:cs typeface="Arial" pitchFamily="34" charset="-120"/>
+                <a:latin typeface="Aptos" pitchFamily="34" charset="0"/>
+                <a:ea typeface="Aptos" pitchFamily="34" charset="-122"/>
+                <a:cs typeface="Aptos" pitchFamily="34" charset="-120"/>
               </a:rPr>
               <a:t>Minggu ke-4 September 2026</a:t>
             </a:r>
@@ -1254,9 +1254,9 @@
                 <a:solidFill>
                   <a:srgbClr val="FFFFFF"/>
                 </a:solidFill>
-                <a:latin typeface="Arial" pitchFamily="34" charset="0"/>
-                <a:ea typeface="Arial" pitchFamily="34" charset="-122"/>
-                <a:cs typeface="Arial" pitchFamily="34" charset="-120"/>
+                <a:latin typeface="Aptos" pitchFamily="34" charset="0"/>
+                <a:ea typeface="Aptos" pitchFamily="34" charset="-122"/>
+                <a:cs typeface="Aptos" pitchFamily="34" charset="-120"/>
               </a:rPr>
               <a:t>Jenis kantor</a:t>
             </a:r>
@@ -1293,9 +1293,9 @@
                 <a:solidFill>
                   <a:srgbClr val="FFFFFF"/>
                 </a:solidFill>
-                <a:latin typeface="Arial" pitchFamily="34" charset="0"/>
-                <a:ea typeface="Arial" pitchFamily="34" charset="-122"/>
-                <a:cs typeface="Arial" pitchFamily="34" charset="-120"/>
+                <a:latin typeface="Aptos" pitchFamily="34" charset="0"/>
+                <a:ea typeface="Aptos" pitchFamily="34" charset="-122"/>
+                <a:cs typeface="Aptos" pitchFamily="34" charset="-120"/>
               </a:rPr>
               <a:t>: Semua jenis</a:t>
             </a:r>
@@ -1332,9 +1332,9 @@
                 <a:solidFill>
                   <a:srgbClr val="FFFFFF"/>
                 </a:solidFill>
-                <a:latin typeface="Arial" pitchFamily="34" charset="0"/>
-                <a:ea typeface="Arial" pitchFamily="34" charset="-122"/>
-                <a:cs typeface="Arial" pitchFamily="34" charset="-120"/>
+                <a:latin typeface="Aptos" pitchFamily="34" charset="0"/>
+                <a:ea typeface="Aptos" pitchFamily="34" charset="-122"/>
+                <a:cs typeface="Aptos" pitchFamily="34" charset="-120"/>
               </a:rPr>
               <a:t>Unit / cabang</a:t>
             </a:r>
@@ -1371,9 +1371,9 @@
                 <a:solidFill>
                   <a:srgbClr val="FFFFFF"/>
                 </a:solidFill>
-                <a:latin typeface="Arial" pitchFamily="34" charset="0"/>
-                <a:ea typeface="Arial" pitchFamily="34" charset="-122"/>
-                <a:cs typeface="Arial" pitchFamily="34" charset="-120"/>
+                <a:latin typeface="Aptos" pitchFamily="34" charset="0"/>
+                <a:ea typeface="Aptos" pitchFamily="34" charset="-122"/>
+                <a:cs typeface="Aptos" pitchFamily="34" charset="-120"/>
               </a:rPr>
               <a:t>: Semua unit</a:t>
             </a:r>
@@ -1410,9 +1410,9 @@
                 <a:solidFill>
                   <a:srgbClr val="FFFFFF"/>
                 </a:solidFill>
-                <a:latin typeface="Arial" pitchFamily="34" charset="0"/>
-                <a:ea typeface="Arial" pitchFamily="34" charset="-122"/>
-                <a:cs typeface="Arial" pitchFamily="34" charset="-120"/>
+                <a:latin typeface="Aptos" pitchFamily="34" charset="0"/>
+                <a:ea typeface="Aptos" pitchFamily="34" charset="-122"/>
+                <a:cs typeface="Aptos" pitchFamily="34" charset="-120"/>
               </a:rPr>
               <a:t>Posisi dinilai</a:t>
             </a:r>
@@ -1449,9 +1449,9 @@
                 <a:solidFill>
                   <a:srgbClr val="FFFFFF"/>
                 </a:solidFill>
-                <a:latin typeface="Arial" pitchFamily="34" charset="0"/>
-                <a:ea typeface="Arial" pitchFamily="34" charset="-122"/>
-                <a:cs typeface="Arial" pitchFamily="34" charset="-120"/>
+                <a:latin typeface="Aptos" pitchFamily="34" charset="0"/>
+                <a:ea typeface="Aptos" pitchFamily="34" charset="-122"/>
+                <a:cs typeface="Aptos" pitchFamily="34" charset="-120"/>
               </a:rPr>
               <a:t>: Semua posisi</a:t>
             </a:r>
@@ -1488,9 +1488,9 @@
                 <a:solidFill>
                   <a:srgbClr val="FFFFFF"/>
                 </a:solidFill>
-                <a:latin typeface="Arial" pitchFamily="34" charset="0"/>
-                <a:ea typeface="Arial" pitchFamily="34" charset="-122"/>
-                <a:cs typeface="Arial" pitchFamily="34" charset="-120"/>
+                <a:latin typeface="Aptos" pitchFamily="34" charset="0"/>
+                <a:ea typeface="Aptos" pitchFamily="34" charset="-122"/>
+                <a:cs typeface="Aptos" pitchFamily="34" charset="-120"/>
               </a:rPr>
               <a:t>Periode</a:t>
             </a:r>
@@ -1527,9 +1527,9 @@
                 <a:solidFill>
                   <a:srgbClr val="FFFFFF"/>
                 </a:solidFill>
-                <a:latin typeface="Arial" pitchFamily="34" charset="0"/>
-                <a:ea typeface="Arial" pitchFamily="34" charset="-122"/>
-                <a:cs typeface="Arial" pitchFamily="34" charset="-120"/>
+                <a:latin typeface="Aptos" pitchFamily="34" charset="0"/>
+                <a:ea typeface="Aptos" pitchFamily="34" charset="-122"/>
+                <a:cs typeface="Aptos" pitchFamily="34" charset="-120"/>
               </a:rPr>
               <a:t>: Minggu ke-4 September 2026</a:t>
             </a:r>
@@ -1566,9 +1566,9 @@
                 <a:solidFill>
                   <a:srgbClr val="FFFFFF"/>
                 </a:solidFill>
-                <a:latin typeface="Arial" pitchFamily="34" charset="0"/>
-                <a:ea typeface="Arial" pitchFamily="34" charset="-122"/>
-                <a:cs typeface="Arial" pitchFamily="34" charset="-120"/>
+                <a:latin typeface="Aptos" pitchFamily="34" charset="0"/>
+                <a:ea typeface="Aptos" pitchFamily="34" charset="-122"/>
+                <a:cs typeface="Aptos" pitchFamily="34" charset="-120"/>
               </a:rPr>
               <a:t>Jumlah peserta</a:t>
             </a:r>
@@ -1605,9 +1605,9 @@
                 <a:solidFill>
                   <a:srgbClr val="FFFFFF"/>
                 </a:solidFill>
-                <a:latin typeface="Arial" pitchFamily="34" charset="0"/>
-                <a:ea typeface="Arial" pitchFamily="34" charset="-122"/>
-                <a:cs typeface="Arial" pitchFamily="34" charset="-120"/>
+                <a:latin typeface="Aptos" pitchFamily="34" charset="0"/>
+                <a:ea typeface="Aptos" pitchFamily="34" charset="-122"/>
+                <a:cs typeface="Aptos" pitchFamily="34" charset="-120"/>
               </a:rPr>
               <a:t>: 1</a:t>
             </a:r>
@@ -1698,9 +1698,9 @@
                 <a:solidFill>
                   <a:srgbClr val="FFFFFF"/>
                 </a:solidFill>
-                <a:latin typeface="Arial" pitchFamily="34" charset="0"/>
-                <a:ea typeface="Arial" pitchFamily="34" charset="-122"/>
-                <a:cs typeface="Arial" pitchFamily="34" charset="-120"/>
+                <a:latin typeface="Aptos" pitchFamily="34" charset="0"/>
+                <a:ea typeface="Aptos" pitchFamily="34" charset="-122"/>
+                <a:cs typeface="Aptos" pitchFamily="34" charset="-120"/>
               </a:rPr>
               <a:t>SKALA PENILAIAN</a:t>
             </a:r>
@@ -1764,9 +1764,9 @@
                 <a:solidFill>
                   <a:srgbClr val="222222"/>
                 </a:solidFill>
-                <a:latin typeface="Arial" pitchFamily="34" charset="0"/>
-                <a:ea typeface="Arial" pitchFamily="34" charset="-122"/>
-                <a:cs typeface="Arial" pitchFamily="34" charset="-120"/>
+                <a:latin typeface="Aptos" pitchFamily="34" charset="0"/>
+                <a:ea typeface="Aptos" pitchFamily="34" charset="-122"/>
+                <a:cs typeface="Aptos" pitchFamily="34" charset="-120"/>
               </a:rPr>
               <a:t>4,80-5,00</a:t>
             </a:r>
@@ -1805,9 +1805,9 @@
                 <a:solidFill>
                   <a:srgbClr val="333333"/>
                 </a:solidFill>
-                <a:latin typeface="Arial" pitchFamily="34" charset="0"/>
-                <a:ea typeface="Arial" pitchFamily="34" charset="-122"/>
-                <a:cs typeface="Arial" pitchFamily="34" charset="-120"/>
+                <a:latin typeface="Aptos" pitchFamily="34" charset="0"/>
+                <a:ea typeface="Aptos" pitchFamily="34" charset="-122"/>
+                <a:cs typeface="Aptos" pitchFamily="34" charset="-120"/>
               </a:rPr>
               <a:t>Istimewa</a:t>
             </a:r>
@@ -1871,9 +1871,9 @@
                 <a:solidFill>
                   <a:srgbClr val="222222"/>
                 </a:solidFill>
-                <a:latin typeface="Arial" pitchFamily="34" charset="0"/>
-                <a:ea typeface="Arial" pitchFamily="34" charset="-122"/>
-                <a:cs typeface="Arial" pitchFamily="34" charset="-120"/>
+                <a:latin typeface="Aptos" pitchFamily="34" charset="0"/>
+                <a:ea typeface="Aptos" pitchFamily="34" charset="-122"/>
+                <a:cs typeface="Aptos" pitchFamily="34" charset="-120"/>
               </a:rPr>
               <a:t>4,60-4,79</a:t>
             </a:r>
@@ -1912,9 +1912,9 @@
                 <a:solidFill>
                   <a:srgbClr val="333333"/>
                 </a:solidFill>
-                <a:latin typeface="Arial" pitchFamily="34" charset="0"/>
-                <a:ea typeface="Arial" pitchFamily="34" charset="-122"/>
-                <a:cs typeface="Arial" pitchFamily="34" charset="-120"/>
+                <a:latin typeface="Aptos" pitchFamily="34" charset="0"/>
+                <a:ea typeface="Aptos" pitchFamily="34" charset="-122"/>
+                <a:cs typeface="Aptos" pitchFamily="34" charset="-120"/>
               </a:rPr>
               <a:t>Sangat Baik</a:t>
             </a:r>
@@ -1978,9 +1978,9 @@
                 <a:solidFill>
                   <a:srgbClr val="222222"/>
                 </a:solidFill>
-                <a:latin typeface="Arial" pitchFamily="34" charset="0"/>
-                <a:ea typeface="Arial" pitchFamily="34" charset="-122"/>
-                <a:cs typeface="Arial" pitchFamily="34" charset="-120"/>
+                <a:latin typeface="Aptos" pitchFamily="34" charset="0"/>
+                <a:ea typeface="Aptos" pitchFamily="34" charset="-122"/>
+                <a:cs typeface="Aptos" pitchFamily="34" charset="-120"/>
               </a:rPr>
               <a:t>4,00-4,59</a:t>
             </a:r>
@@ -2019,9 +2019,9 @@
                 <a:solidFill>
                   <a:srgbClr val="333333"/>
                 </a:solidFill>
-                <a:latin typeface="Arial" pitchFamily="34" charset="0"/>
-                <a:ea typeface="Arial" pitchFamily="34" charset="-122"/>
-                <a:cs typeface="Arial" pitchFamily="34" charset="-120"/>
+                <a:latin typeface="Aptos" pitchFamily="34" charset="0"/>
+                <a:ea typeface="Aptos" pitchFamily="34" charset="-122"/>
+                <a:cs typeface="Aptos" pitchFamily="34" charset="-120"/>
               </a:rPr>
               <a:t>Baik</a:t>
             </a:r>
@@ -2085,9 +2085,9 @@
                 <a:solidFill>
                   <a:srgbClr val="222222"/>
                 </a:solidFill>
-                <a:latin typeface="Arial" pitchFamily="34" charset="0"/>
-                <a:ea typeface="Arial" pitchFamily="34" charset="-122"/>
-                <a:cs typeface="Arial" pitchFamily="34" charset="-120"/>
+                <a:latin typeface="Aptos" pitchFamily="34" charset="0"/>
+                <a:ea typeface="Aptos" pitchFamily="34" charset="-122"/>
+                <a:cs typeface="Aptos" pitchFamily="34" charset="-120"/>
               </a:rPr>
               <a:t>3,60-3,99</a:t>
             </a:r>
@@ -2126,9 +2126,9 @@
                 <a:solidFill>
                   <a:srgbClr val="333333"/>
                 </a:solidFill>
-                <a:latin typeface="Arial" pitchFamily="34" charset="0"/>
-                <a:ea typeface="Arial" pitchFamily="34" charset="-122"/>
-                <a:cs typeface="Arial" pitchFamily="34" charset="-120"/>
+                <a:latin typeface="Aptos" pitchFamily="34" charset="0"/>
+                <a:ea typeface="Aptos" pitchFamily="34" charset="-122"/>
+                <a:cs typeface="Aptos" pitchFamily="34" charset="-120"/>
               </a:rPr>
               <a:t>Cukup</a:t>
             </a:r>
@@ -2192,9 +2192,9 @@
                 <a:solidFill>
                   <a:srgbClr val="222222"/>
                 </a:solidFill>
-                <a:latin typeface="Arial" pitchFamily="34" charset="0"/>
-                <a:ea typeface="Arial" pitchFamily="34" charset="-122"/>
-                <a:cs typeface="Arial" pitchFamily="34" charset="-120"/>
+                <a:latin typeface="Aptos" pitchFamily="34" charset="0"/>
+                <a:ea typeface="Aptos" pitchFamily="34" charset="-122"/>
+                <a:cs typeface="Aptos" pitchFamily="34" charset="-120"/>
               </a:rPr>
               <a:t>&lt;3,59</a:t>
             </a:r>
@@ -2233,9 +2233,9 @@
                 <a:solidFill>
                   <a:srgbClr val="333333"/>
                 </a:solidFill>
-                <a:latin typeface="Arial" pitchFamily="34" charset="0"/>
-                <a:ea typeface="Arial" pitchFamily="34" charset="-122"/>
-                <a:cs typeface="Arial" pitchFamily="34" charset="-120"/>
+                <a:latin typeface="Aptos" pitchFamily="34" charset="0"/>
+                <a:ea typeface="Aptos" pitchFamily="34" charset="-122"/>
+                <a:cs typeface="Aptos" pitchFamily="34" charset="-120"/>
               </a:rPr>
               <a:t>Kurang</a:t>
             </a:r>
@@ -2378,9 +2378,9 @@
                 <a:solidFill>
                   <a:srgbClr val="FFFFFF"/>
                 </a:solidFill>
-                <a:latin typeface="Arial" pitchFamily="34" charset="0"/>
-                <a:ea typeface="Arial" pitchFamily="34" charset="-122"/>
-                <a:cs typeface="Arial" pitchFamily="34" charset="-120"/>
+                <a:latin typeface="Aptos" pitchFamily="34" charset="0"/>
+                <a:ea typeface="Aptos" pitchFamily="34" charset="-122"/>
+                <a:cs typeface="Aptos" pitchFamily="34" charset="-120"/>
               </a:rPr>
               <a:t>Service Drill Ranking</a:t>
             </a:r>
@@ -2446,9 +2446,9 @@
                 <a:solidFill>
                   <a:srgbClr val="FFFFFF"/>
                 </a:solidFill>
-                <a:latin typeface="Arial" pitchFamily="34" charset="0"/>
-                <a:ea typeface="Arial" pitchFamily="34" charset="-122"/>
-                <a:cs typeface="Arial" pitchFamily="34" charset="-120"/>
+                <a:latin typeface="Aptos" pitchFamily="34" charset="0"/>
+                <a:ea typeface="Aptos" pitchFamily="34" charset="-122"/>
+                <a:cs typeface="Aptos" pitchFamily="34" charset="-120"/>
               </a:rPr>
               <a:t>244 KC MAMUJU</a:t>
             </a:r>
@@ -2487,9 +2487,9 @@
                 <a:solidFill>
                   <a:srgbClr val="FFFFFF"/>
                 </a:solidFill>
-                <a:latin typeface="Arial" pitchFamily="34" charset="0"/>
-                <a:ea typeface="Arial" pitchFamily="34" charset="-122"/>
-                <a:cs typeface="Arial" pitchFamily="34" charset="-120"/>
+                <a:latin typeface="Aptos" pitchFamily="34" charset="0"/>
+                <a:ea typeface="Aptos" pitchFamily="34" charset="-122"/>
+                <a:cs typeface="Aptos" pitchFamily="34" charset="-120"/>
               </a:rPr>
               <a:t>Teller</a:t>
             </a:r>
@@ -2604,9 +2604,9 @@
                 <a:solidFill>
                   <a:srgbClr val="FFFFFF"/>
                 </a:solidFill>
-                <a:latin typeface="Arial" pitchFamily="34" charset="0"/>
-                <a:ea typeface="Arial" pitchFamily="34" charset="-122"/>
-                <a:cs typeface="Arial" pitchFamily="34" charset="-120"/>
+                <a:latin typeface="Aptos" pitchFamily="34" charset="0"/>
+                <a:ea typeface="Aptos" pitchFamily="34" charset="-122"/>
+                <a:cs typeface="Aptos" pitchFamily="34" charset="-120"/>
               </a:rPr>
               <a:t>IRWAN ALLO</a:t>
             </a:r>
@@ -2668,9 +2668,9 @@
                 <a:solidFill>
                   <a:srgbClr val="FFFFFF"/>
                 </a:solidFill>
-                <a:latin typeface="Arial" pitchFamily="34" charset="0"/>
-                <a:ea typeface="Arial" pitchFamily="34" charset="-122"/>
-                <a:cs typeface="Arial" pitchFamily="34" charset="-120"/>
+                <a:latin typeface="Aptos" pitchFamily="34" charset="0"/>
+                <a:ea typeface="Aptos" pitchFamily="34" charset="-122"/>
+                <a:cs typeface="Aptos" pitchFamily="34" charset="-120"/>
               </a:rPr>
               <a:t>3,51</a:t>
             </a:r>
@@ -2736,9 +2736,9 @@
                 <a:solidFill>
                   <a:srgbClr val="FFFFFF"/>
                 </a:solidFill>
-                <a:latin typeface="Arial" pitchFamily="34" charset="0"/>
-                <a:ea typeface="Arial" pitchFamily="34" charset="-122"/>
-                <a:cs typeface="Arial" pitchFamily="34" charset="-120"/>
+                <a:latin typeface="Aptos" pitchFamily="34" charset="0"/>
+                <a:ea typeface="Aptos" pitchFamily="34" charset="-122"/>
+                <a:cs typeface="Aptos" pitchFamily="34" charset="-120"/>
               </a:rPr>
               <a:t>Kurang</a:t>
             </a:r>
@@ -2829,9 +2829,9 @@
                 <a:solidFill>
                   <a:srgbClr val="FFFFFF"/>
                 </a:solidFill>
-                <a:latin typeface="Arial" pitchFamily="34" charset="0"/>
-                <a:ea typeface="Arial" pitchFamily="34" charset="-122"/>
-                <a:cs typeface="Arial" pitchFamily="34" charset="-120"/>
+                <a:latin typeface="Aptos" pitchFamily="34" charset="0"/>
+                <a:ea typeface="Aptos" pitchFamily="34" charset="-122"/>
+                <a:cs typeface="Aptos" pitchFamily="34" charset="-120"/>
               </a:rPr>
               <a:t>SKALA PENILAIAN</a:t>
             </a:r>
@@ -2895,9 +2895,9 @@
                 <a:solidFill>
                   <a:srgbClr val="222222"/>
                 </a:solidFill>
-                <a:latin typeface="Arial" pitchFamily="34" charset="0"/>
-                <a:ea typeface="Arial" pitchFamily="34" charset="-122"/>
-                <a:cs typeface="Arial" pitchFamily="34" charset="-120"/>
+                <a:latin typeface="Aptos" pitchFamily="34" charset="0"/>
+                <a:ea typeface="Aptos" pitchFamily="34" charset="-122"/>
+                <a:cs typeface="Aptos" pitchFamily="34" charset="-120"/>
               </a:rPr>
               <a:t>4,80-5,00</a:t>
             </a:r>
@@ -2936,9 +2936,9 @@
                 <a:solidFill>
                   <a:srgbClr val="333333"/>
                 </a:solidFill>
-                <a:latin typeface="Arial" pitchFamily="34" charset="0"/>
-                <a:ea typeface="Arial" pitchFamily="34" charset="-122"/>
-                <a:cs typeface="Arial" pitchFamily="34" charset="-120"/>
+                <a:latin typeface="Aptos" pitchFamily="34" charset="0"/>
+                <a:ea typeface="Aptos" pitchFamily="34" charset="-122"/>
+                <a:cs typeface="Aptos" pitchFamily="34" charset="-120"/>
               </a:rPr>
               <a:t>Istimewa</a:t>
             </a:r>
@@ -3002,9 +3002,9 @@
                 <a:solidFill>
                   <a:srgbClr val="222222"/>
                 </a:solidFill>
-                <a:latin typeface="Arial" pitchFamily="34" charset="0"/>
-                <a:ea typeface="Arial" pitchFamily="34" charset="-122"/>
-                <a:cs typeface="Arial" pitchFamily="34" charset="-120"/>
+                <a:latin typeface="Aptos" pitchFamily="34" charset="0"/>
+                <a:ea typeface="Aptos" pitchFamily="34" charset="-122"/>
+                <a:cs typeface="Aptos" pitchFamily="34" charset="-120"/>
               </a:rPr>
               <a:t>4,60-4,79</a:t>
             </a:r>
@@ -3043,9 +3043,9 @@
                 <a:solidFill>
                   <a:srgbClr val="333333"/>
                 </a:solidFill>
-                <a:latin typeface="Arial" pitchFamily="34" charset="0"/>
-                <a:ea typeface="Arial" pitchFamily="34" charset="-122"/>
-                <a:cs typeface="Arial" pitchFamily="34" charset="-120"/>
+                <a:latin typeface="Aptos" pitchFamily="34" charset="0"/>
+                <a:ea typeface="Aptos" pitchFamily="34" charset="-122"/>
+                <a:cs typeface="Aptos" pitchFamily="34" charset="-120"/>
               </a:rPr>
               <a:t>Sangat Baik</a:t>
             </a:r>
@@ -3109,9 +3109,9 @@
                 <a:solidFill>
                   <a:srgbClr val="222222"/>
                 </a:solidFill>
-                <a:latin typeface="Arial" pitchFamily="34" charset="0"/>
-                <a:ea typeface="Arial" pitchFamily="34" charset="-122"/>
-                <a:cs typeface="Arial" pitchFamily="34" charset="-120"/>
+                <a:latin typeface="Aptos" pitchFamily="34" charset="0"/>
+                <a:ea typeface="Aptos" pitchFamily="34" charset="-122"/>
+                <a:cs typeface="Aptos" pitchFamily="34" charset="-120"/>
               </a:rPr>
               <a:t>4,00-4,59</a:t>
             </a:r>
@@ -3150,9 +3150,9 @@
                 <a:solidFill>
                   <a:srgbClr val="333333"/>
                 </a:solidFill>
-                <a:latin typeface="Arial" pitchFamily="34" charset="0"/>
-                <a:ea typeface="Arial" pitchFamily="34" charset="-122"/>
-                <a:cs typeface="Arial" pitchFamily="34" charset="-120"/>
+                <a:latin typeface="Aptos" pitchFamily="34" charset="0"/>
+                <a:ea typeface="Aptos" pitchFamily="34" charset="-122"/>
+                <a:cs typeface="Aptos" pitchFamily="34" charset="-120"/>
               </a:rPr>
               <a:t>Baik</a:t>
             </a:r>
@@ -3216,9 +3216,9 @@
                 <a:solidFill>
                   <a:srgbClr val="222222"/>
                 </a:solidFill>
-                <a:latin typeface="Arial" pitchFamily="34" charset="0"/>
-                <a:ea typeface="Arial" pitchFamily="34" charset="-122"/>
-                <a:cs typeface="Arial" pitchFamily="34" charset="-120"/>
+                <a:latin typeface="Aptos" pitchFamily="34" charset="0"/>
+                <a:ea typeface="Aptos" pitchFamily="34" charset="-122"/>
+                <a:cs typeface="Aptos" pitchFamily="34" charset="-120"/>
               </a:rPr>
               <a:t>3,60-3,99</a:t>
             </a:r>
@@ -3257,9 +3257,9 @@
                 <a:solidFill>
                   <a:srgbClr val="333333"/>
                 </a:solidFill>
-                <a:latin typeface="Arial" pitchFamily="34" charset="0"/>
-                <a:ea typeface="Arial" pitchFamily="34" charset="-122"/>
-                <a:cs typeface="Arial" pitchFamily="34" charset="-120"/>
+                <a:latin typeface="Aptos" pitchFamily="34" charset="0"/>
+                <a:ea typeface="Aptos" pitchFamily="34" charset="-122"/>
+                <a:cs typeface="Aptos" pitchFamily="34" charset="-120"/>
               </a:rPr>
               <a:t>Cukup</a:t>
             </a:r>
@@ -3323,9 +3323,9 @@
                 <a:solidFill>
                   <a:srgbClr val="222222"/>
                 </a:solidFill>
-                <a:latin typeface="Arial" pitchFamily="34" charset="0"/>
-                <a:ea typeface="Arial" pitchFamily="34" charset="-122"/>
-                <a:cs typeface="Arial" pitchFamily="34" charset="-120"/>
+                <a:latin typeface="Aptos" pitchFamily="34" charset="0"/>
+                <a:ea typeface="Aptos" pitchFamily="34" charset="-122"/>
+                <a:cs typeface="Aptos" pitchFamily="34" charset="-120"/>
               </a:rPr>
               <a:t>&lt;3,59</a:t>
             </a:r>
@@ -3364,9 +3364,9 @@
                 <a:solidFill>
                   <a:srgbClr val="333333"/>
                 </a:solidFill>
-                <a:latin typeface="Arial" pitchFamily="34" charset="0"/>
-                <a:ea typeface="Arial" pitchFamily="34" charset="-122"/>
-                <a:cs typeface="Arial" pitchFamily="34" charset="-120"/>
+                <a:latin typeface="Aptos" pitchFamily="34" charset="0"/>
+                <a:ea typeface="Aptos" pitchFamily="34" charset="-122"/>
+                <a:cs typeface="Aptos" pitchFamily="34" charset="-120"/>
               </a:rPr>
               <a:t>Kurang</a:t>
             </a:r>

--- a/ranking-nyata.pptx
+++ b/ranking-nyata.pptx
@@ -1063,7 +1063,7 @@
               <a:buNone/>
             </a:pPr>
             <a:r>
-              <a:rPr lang="en-US" sz="4000" b="1" dirty="0">
+              <a:rPr lang="en-US" sz="4400" b="1" dirty="0">
                 <a:solidFill>
                   <a:srgbClr val="FFFFFF"/>
                 </a:solidFill>
@@ -1073,7 +1073,7 @@
               </a:rPr>
               <a:t>Service Drill Ranking</a:t>
             </a:r>
-            <a:endParaRPr lang="en-US" sz="4000" dirty="0"/>
+            <a:endParaRPr lang="en-US" sz="4400" dirty="0"/>
           </a:p>
         </p:txBody>
       </p:sp>
@@ -1090,11 +1090,546 @@
           </a:xfrm>
           <a:prstGeom prst="roundRect">
             <a:avLst>
-              <a:gd name="adj" fmla="val 15842"/>
+              <a:gd name="adj" fmla="val 19802"/>
             </a:avLst>
           </a:prstGeom>
-          <a:solidFill>
-            <a:srgbClr val="2E4FD6"/>
+          <a:ln w="15875">
+            <a:solidFill>
+              <a:srgbClr val="FFFFFF"/>
+            </a:solidFill>
+            <a:prstDash val="solid"/>
+          </a:ln>
+        </p:spPr>
+      </p:sp>
+      <p:sp>
+        <p:nvSpPr>
+          <p:cNvPr id="7" name="Text 2"/>
+          <p:cNvSpPr/>
+          <p:nvPr/>
+        </p:nvSpPr>
+        <p:spPr>
+          <a:xfrm>
+            <a:off x="4607662" y="1151230"/>
+            <a:ext cx="2991002" cy="461772"/>
+          </a:xfrm>
+          <a:prstGeom prst="rect">
+            <a:avLst/>
+          </a:prstGeom>
+          <a:noFill/>
+          <a:ln/>
+        </p:spPr>
+        <p:txBody>
+          <a:bodyPr wrap="square" rtlCol="0" anchor="ctr">
+            <a:normAutofit/>
+          </a:bodyPr>
+          <a:lstStyle/>
+          <a:p>
+            <a:pPr algn="ctr" indent="0" marL="0">
+              <a:buNone/>
+            </a:pPr>
+            <a:r>
+              <a:rPr lang="en-US" sz="2000" b="1" dirty="0">
+                <a:solidFill>
+                  <a:srgbClr val="FFFFFF"/>
+                </a:solidFill>
+                <a:latin typeface="Poppins" pitchFamily="34" charset="0"/>
+                <a:ea typeface="Poppins" pitchFamily="34" charset="-122"/>
+                <a:cs typeface="Poppins" pitchFamily="34" charset="-120"/>
+              </a:rPr>
+              <a:t>Semua unit</a:t>
+            </a:r>
+            <a:endParaRPr lang="en-US" sz="2000" dirty="0"/>
+          </a:p>
+        </p:txBody>
+      </p:sp>
+      <p:sp>
+        <p:nvSpPr>
+          <p:cNvPr id="8" name="Text 3"/>
+          <p:cNvSpPr/>
+          <p:nvPr/>
+        </p:nvSpPr>
+        <p:spPr>
+          <a:xfrm>
+            <a:off x="4772254" y="1681582"/>
+            <a:ext cx="2648102" cy="369418"/>
+          </a:xfrm>
+          <a:prstGeom prst="rect">
+            <a:avLst/>
+          </a:prstGeom>
+          <a:noFill/>
+          <a:ln/>
+        </p:spPr>
+        <p:txBody>
+          <a:bodyPr wrap="square" rtlCol="0" anchor="ctr">
+            <a:normAutofit/>
+          </a:bodyPr>
+          <a:lstStyle/>
+          <a:p>
+            <a:pPr algn="ctr" indent="0" marL="0">
+              <a:buNone/>
+            </a:pPr>
+            <a:r>
+              <a:rPr lang="en-US" sz="2400" dirty="0">
+                <a:solidFill>
+                  <a:srgbClr val="FFFFFF"/>
+                </a:solidFill>
+                <a:latin typeface="Aptos" pitchFamily="34" charset="0"/>
+                <a:ea typeface="Aptos" pitchFamily="34" charset="-122"/>
+                <a:cs typeface="Aptos" pitchFamily="34" charset="-120"/>
+              </a:rPr>
+              <a:t>Semua posisi</a:t>
+            </a:r>
+            <a:endParaRPr lang="en-US" sz="2400" dirty="0"/>
+          </a:p>
+        </p:txBody>
+      </p:sp>
+      <p:sp>
+        <p:nvSpPr>
+          <p:cNvPr id="9" name="Text 4"/>
+          <p:cNvSpPr/>
+          <p:nvPr/>
+        </p:nvSpPr>
+        <p:spPr>
+          <a:xfrm>
+            <a:off x="3269894" y="2176272"/>
+            <a:ext cx="5692140" cy="365760"/>
+          </a:xfrm>
+          <a:prstGeom prst="rect">
+            <a:avLst/>
+          </a:prstGeom>
+          <a:noFill/>
+          <a:ln/>
+        </p:spPr>
+        <p:txBody>
+          <a:bodyPr wrap="square" rtlCol="0" anchor="ctr"/>
+          <a:lstStyle/>
+          <a:p>
+            <a:pPr algn="ctr" indent="0" marL="0">
+              <a:buNone/>
+            </a:pPr>
+            <a:r>
+              <a:rPr lang="en-US" sz="1800" dirty="0">
+                <a:solidFill>
+                  <a:srgbClr val="FFFFFF"/>
+                </a:solidFill>
+                <a:latin typeface="Aptos" pitchFamily="34" charset="0"/>
+                <a:ea typeface="Aptos" pitchFamily="34" charset="-122"/>
+                <a:cs typeface="Aptos" pitchFamily="34" charset="-120"/>
+              </a:rPr>
+              <a:t>Minggu ke-4 September 2026</a:t>
+            </a:r>
+            <a:endParaRPr lang="en-US" sz="1800" dirty="0"/>
+          </a:p>
+        </p:txBody>
+      </p:sp>
+      <p:sp>
+        <p:nvSpPr>
+          <p:cNvPr id="10" name="Text 5"/>
+          <p:cNvSpPr/>
+          <p:nvPr/>
+        </p:nvSpPr>
+        <p:spPr>
+          <a:xfrm>
+            <a:off x="3566160" y="2697480"/>
+            <a:ext cx="2011680" cy="365760"/>
+          </a:xfrm>
+          <a:prstGeom prst="rect">
+            <a:avLst/>
+          </a:prstGeom>
+          <a:noFill/>
+          <a:ln/>
+        </p:spPr>
+        <p:txBody>
+          <a:bodyPr wrap="square" rtlCol="0" anchor="ctr"/>
+          <a:lstStyle/>
+          <a:p>
+            <a:pPr algn="r" indent="0" marL="0">
+              <a:buNone/>
+            </a:pPr>
+            <a:r>
+              <a:rPr lang="en-US" sz="1400" dirty="0">
+                <a:solidFill>
+                  <a:srgbClr val="FFFFFF"/>
+                </a:solidFill>
+                <a:latin typeface="Aptos" pitchFamily="34" charset="0"/>
+                <a:ea typeface="Aptos" pitchFamily="34" charset="-122"/>
+                <a:cs typeface="Aptos" pitchFamily="34" charset="-120"/>
+              </a:rPr>
+              <a:t>Jenis kantor</a:t>
+            </a:r>
+            <a:endParaRPr lang="en-US" sz="1400" dirty="0"/>
+          </a:p>
+        </p:txBody>
+      </p:sp>
+      <p:sp>
+        <p:nvSpPr>
+          <p:cNvPr id="11" name="Text 6"/>
+          <p:cNvSpPr/>
+          <p:nvPr/>
+        </p:nvSpPr>
+        <p:spPr>
+          <a:xfrm>
+            <a:off x="5669280" y="2697480"/>
+            <a:ext cx="3657600" cy="365760"/>
+          </a:xfrm>
+          <a:prstGeom prst="rect">
+            <a:avLst/>
+          </a:prstGeom>
+          <a:noFill/>
+          <a:ln/>
+        </p:spPr>
+        <p:txBody>
+          <a:bodyPr wrap="square" rtlCol="0" anchor="ctr"/>
+          <a:lstStyle/>
+          <a:p>
+            <a:pPr indent="0" marL="0">
+              <a:buNone/>
+            </a:pPr>
+            <a:r>
+              <a:rPr lang="en-US" sz="1400" b="1" dirty="0">
+                <a:solidFill>
+                  <a:srgbClr val="FFFFFF"/>
+                </a:solidFill>
+                <a:latin typeface="Aptos" pitchFamily="34" charset="0"/>
+                <a:ea typeface="Aptos" pitchFamily="34" charset="-122"/>
+                <a:cs typeface="Aptos" pitchFamily="34" charset="-120"/>
+              </a:rPr>
+              <a:t>: Semua jenis</a:t>
+            </a:r>
+            <a:endParaRPr lang="en-US" sz="1400" dirty="0"/>
+          </a:p>
+        </p:txBody>
+      </p:sp>
+      <p:sp>
+        <p:nvSpPr>
+          <p:cNvPr id="12" name="Text 7"/>
+          <p:cNvSpPr/>
+          <p:nvPr/>
+        </p:nvSpPr>
+        <p:spPr>
+          <a:xfrm>
+            <a:off x="3566160" y="3154680"/>
+            <a:ext cx="2011680" cy="365760"/>
+          </a:xfrm>
+          <a:prstGeom prst="rect">
+            <a:avLst/>
+          </a:prstGeom>
+          <a:noFill/>
+          <a:ln/>
+        </p:spPr>
+        <p:txBody>
+          <a:bodyPr wrap="square" rtlCol="0" anchor="ctr"/>
+          <a:lstStyle/>
+          <a:p>
+            <a:pPr algn="r" indent="0" marL="0">
+              <a:buNone/>
+            </a:pPr>
+            <a:r>
+              <a:rPr lang="en-US" sz="1400" dirty="0">
+                <a:solidFill>
+                  <a:srgbClr val="FFFFFF"/>
+                </a:solidFill>
+                <a:latin typeface="Aptos" pitchFamily="34" charset="0"/>
+                <a:ea typeface="Aptos" pitchFamily="34" charset="-122"/>
+                <a:cs typeface="Aptos" pitchFamily="34" charset="-120"/>
+              </a:rPr>
+              <a:t>Unit / cabang</a:t>
+            </a:r>
+            <a:endParaRPr lang="en-US" sz="1400" dirty="0"/>
+          </a:p>
+        </p:txBody>
+      </p:sp>
+      <p:sp>
+        <p:nvSpPr>
+          <p:cNvPr id="13" name="Text 8"/>
+          <p:cNvSpPr/>
+          <p:nvPr/>
+        </p:nvSpPr>
+        <p:spPr>
+          <a:xfrm>
+            <a:off x="5669280" y="3154680"/>
+            <a:ext cx="3657600" cy="365760"/>
+          </a:xfrm>
+          <a:prstGeom prst="rect">
+            <a:avLst/>
+          </a:prstGeom>
+          <a:noFill/>
+          <a:ln/>
+        </p:spPr>
+        <p:txBody>
+          <a:bodyPr wrap="square" rtlCol="0" anchor="ctr"/>
+          <a:lstStyle/>
+          <a:p>
+            <a:pPr indent="0" marL="0">
+              <a:buNone/>
+            </a:pPr>
+            <a:r>
+              <a:rPr lang="en-US" sz="1400" b="1" dirty="0">
+                <a:solidFill>
+                  <a:srgbClr val="FFFFFF"/>
+                </a:solidFill>
+                <a:latin typeface="Aptos" pitchFamily="34" charset="0"/>
+                <a:ea typeface="Aptos" pitchFamily="34" charset="-122"/>
+                <a:cs typeface="Aptos" pitchFamily="34" charset="-120"/>
+              </a:rPr>
+              <a:t>: Semua unit</a:t>
+            </a:r>
+            <a:endParaRPr lang="en-US" sz="1400" dirty="0"/>
+          </a:p>
+        </p:txBody>
+      </p:sp>
+      <p:sp>
+        <p:nvSpPr>
+          <p:cNvPr id="14" name="Text 9"/>
+          <p:cNvSpPr/>
+          <p:nvPr/>
+        </p:nvSpPr>
+        <p:spPr>
+          <a:xfrm>
+            <a:off x="3566160" y="3611880"/>
+            <a:ext cx="2011680" cy="365760"/>
+          </a:xfrm>
+          <a:prstGeom prst="rect">
+            <a:avLst/>
+          </a:prstGeom>
+          <a:noFill/>
+          <a:ln/>
+        </p:spPr>
+        <p:txBody>
+          <a:bodyPr wrap="square" rtlCol="0" anchor="ctr"/>
+          <a:lstStyle/>
+          <a:p>
+            <a:pPr algn="r" indent="0" marL="0">
+              <a:buNone/>
+            </a:pPr>
+            <a:r>
+              <a:rPr lang="en-US" sz="1400" dirty="0">
+                <a:solidFill>
+                  <a:srgbClr val="FFFFFF"/>
+                </a:solidFill>
+                <a:latin typeface="Aptos" pitchFamily="34" charset="0"/>
+                <a:ea typeface="Aptos" pitchFamily="34" charset="-122"/>
+                <a:cs typeface="Aptos" pitchFamily="34" charset="-120"/>
+              </a:rPr>
+              <a:t>Posisi dinilai</a:t>
+            </a:r>
+            <a:endParaRPr lang="en-US" sz="1400" dirty="0"/>
+          </a:p>
+        </p:txBody>
+      </p:sp>
+      <p:sp>
+        <p:nvSpPr>
+          <p:cNvPr id="15" name="Text 10"/>
+          <p:cNvSpPr/>
+          <p:nvPr/>
+        </p:nvSpPr>
+        <p:spPr>
+          <a:xfrm>
+            <a:off x="5669280" y="3611880"/>
+            <a:ext cx="3657600" cy="365760"/>
+          </a:xfrm>
+          <a:prstGeom prst="rect">
+            <a:avLst/>
+          </a:prstGeom>
+          <a:noFill/>
+          <a:ln/>
+        </p:spPr>
+        <p:txBody>
+          <a:bodyPr wrap="square" rtlCol="0" anchor="ctr"/>
+          <a:lstStyle/>
+          <a:p>
+            <a:pPr indent="0" marL="0">
+              <a:buNone/>
+            </a:pPr>
+            <a:r>
+              <a:rPr lang="en-US" sz="1400" b="1" dirty="0">
+                <a:solidFill>
+                  <a:srgbClr val="FFFFFF"/>
+                </a:solidFill>
+                <a:latin typeface="Aptos" pitchFamily="34" charset="0"/>
+                <a:ea typeface="Aptos" pitchFamily="34" charset="-122"/>
+                <a:cs typeface="Aptos" pitchFamily="34" charset="-120"/>
+              </a:rPr>
+              <a:t>: Semua posisi</a:t>
+            </a:r>
+            <a:endParaRPr lang="en-US" sz="1400" dirty="0"/>
+          </a:p>
+        </p:txBody>
+      </p:sp>
+      <p:sp>
+        <p:nvSpPr>
+          <p:cNvPr id="16" name="Text 11"/>
+          <p:cNvSpPr/>
+          <p:nvPr/>
+        </p:nvSpPr>
+        <p:spPr>
+          <a:xfrm>
+            <a:off x="3566160" y="4069080"/>
+            <a:ext cx="2011680" cy="365760"/>
+          </a:xfrm>
+          <a:prstGeom prst="rect">
+            <a:avLst/>
+          </a:prstGeom>
+          <a:noFill/>
+          <a:ln/>
+        </p:spPr>
+        <p:txBody>
+          <a:bodyPr wrap="square" rtlCol="0" anchor="ctr"/>
+          <a:lstStyle/>
+          <a:p>
+            <a:pPr algn="r" indent="0" marL="0">
+              <a:buNone/>
+            </a:pPr>
+            <a:r>
+              <a:rPr lang="en-US" sz="1400" dirty="0">
+                <a:solidFill>
+                  <a:srgbClr val="FFFFFF"/>
+                </a:solidFill>
+                <a:latin typeface="Aptos" pitchFamily="34" charset="0"/>
+                <a:ea typeface="Aptos" pitchFamily="34" charset="-122"/>
+                <a:cs typeface="Aptos" pitchFamily="34" charset="-120"/>
+              </a:rPr>
+              <a:t>Periode</a:t>
+            </a:r>
+            <a:endParaRPr lang="en-US" sz="1400" dirty="0"/>
+          </a:p>
+        </p:txBody>
+      </p:sp>
+      <p:sp>
+        <p:nvSpPr>
+          <p:cNvPr id="17" name="Text 12"/>
+          <p:cNvSpPr/>
+          <p:nvPr/>
+        </p:nvSpPr>
+        <p:spPr>
+          <a:xfrm>
+            <a:off x="5669280" y="4069080"/>
+            <a:ext cx="3657600" cy="365760"/>
+          </a:xfrm>
+          <a:prstGeom prst="rect">
+            <a:avLst/>
+          </a:prstGeom>
+          <a:noFill/>
+          <a:ln/>
+        </p:spPr>
+        <p:txBody>
+          <a:bodyPr wrap="square" rtlCol="0" anchor="ctr"/>
+          <a:lstStyle/>
+          <a:p>
+            <a:pPr indent="0" marL="0">
+              <a:buNone/>
+            </a:pPr>
+            <a:r>
+              <a:rPr lang="en-US" sz="1400" b="1" dirty="0">
+                <a:solidFill>
+                  <a:srgbClr val="FFFFFF"/>
+                </a:solidFill>
+                <a:latin typeface="Aptos" pitchFamily="34" charset="0"/>
+                <a:ea typeface="Aptos" pitchFamily="34" charset="-122"/>
+                <a:cs typeface="Aptos" pitchFamily="34" charset="-120"/>
+              </a:rPr>
+              <a:t>: Minggu ke-4 September 2026</a:t>
+            </a:r>
+            <a:endParaRPr lang="en-US" sz="1400" dirty="0"/>
+          </a:p>
+        </p:txBody>
+      </p:sp>
+      <p:sp>
+        <p:nvSpPr>
+          <p:cNvPr id="18" name="Text 13"/>
+          <p:cNvSpPr/>
+          <p:nvPr/>
+        </p:nvSpPr>
+        <p:spPr>
+          <a:xfrm>
+            <a:off x="3566160" y="4526280"/>
+            <a:ext cx="2011680" cy="365760"/>
+          </a:xfrm>
+          <a:prstGeom prst="rect">
+            <a:avLst/>
+          </a:prstGeom>
+          <a:noFill/>
+          <a:ln/>
+        </p:spPr>
+        <p:txBody>
+          <a:bodyPr wrap="square" rtlCol="0" anchor="ctr"/>
+          <a:lstStyle/>
+          <a:p>
+            <a:pPr algn="r" indent="0" marL="0">
+              <a:buNone/>
+            </a:pPr>
+            <a:r>
+              <a:rPr lang="en-US" sz="1400" dirty="0">
+                <a:solidFill>
+                  <a:srgbClr val="FFFFFF"/>
+                </a:solidFill>
+                <a:latin typeface="Aptos" pitchFamily="34" charset="0"/>
+                <a:ea typeface="Aptos" pitchFamily="34" charset="-122"/>
+                <a:cs typeface="Aptos" pitchFamily="34" charset="-120"/>
+              </a:rPr>
+              <a:t>Jumlah peserta</a:t>
+            </a:r>
+            <a:endParaRPr lang="en-US" sz="1400" dirty="0"/>
+          </a:p>
+        </p:txBody>
+      </p:sp>
+      <p:sp>
+        <p:nvSpPr>
+          <p:cNvPr id="19" name="Text 14"/>
+          <p:cNvSpPr/>
+          <p:nvPr/>
+        </p:nvSpPr>
+        <p:spPr>
+          <a:xfrm>
+            <a:off x="5669280" y="4526280"/>
+            <a:ext cx="3657600" cy="365760"/>
+          </a:xfrm>
+          <a:prstGeom prst="rect">
+            <a:avLst/>
+          </a:prstGeom>
+          <a:noFill/>
+          <a:ln/>
+        </p:spPr>
+        <p:txBody>
+          <a:bodyPr wrap="square" rtlCol="0" anchor="ctr"/>
+          <a:lstStyle/>
+          <a:p>
+            <a:pPr indent="0" marL="0">
+              <a:buNone/>
+            </a:pPr>
+            <a:r>
+              <a:rPr lang="en-US" sz="1400" b="1" dirty="0">
+                <a:solidFill>
+                  <a:srgbClr val="FFFFFF"/>
+                </a:solidFill>
+                <a:latin typeface="Aptos" pitchFamily="34" charset="0"/>
+                <a:ea typeface="Aptos" pitchFamily="34" charset="-122"/>
+                <a:cs typeface="Aptos" pitchFamily="34" charset="-120"/>
+              </a:rPr>
+              <a:t>: 1</a:t>
+            </a:r>
+            <a:endParaRPr lang="en-US" sz="1400" dirty="0"/>
+          </a:p>
+        </p:txBody>
+      </p:sp>
+      <p:sp>
+        <p:nvSpPr>
+          <p:cNvPr id="20" name="Shape 15"/>
+          <p:cNvSpPr/>
+          <p:nvPr/>
+        </p:nvSpPr>
+        <p:spPr>
+          <a:xfrm>
+            <a:off x="2832811" y="5922569"/>
+            <a:ext cx="6273698" cy="905256"/>
+          </a:xfrm>
+          <a:prstGeom prst="roundRect">
+            <a:avLst>
+              <a:gd name="adj" fmla="val 6061"/>
+            </a:avLst>
+          </a:prstGeom>
+          <a:solidFill>
+            <a:srgbClr val="FFFFFF"/>
           </a:solidFill>
           <a:ln w="12700">
             <a:solidFill>
@@ -1106,544 +1641,6 @@
       </p:sp>
       <p:sp>
         <p:nvSpPr>
-          <p:cNvPr id="7" name="Text 2"/>
-          <p:cNvSpPr/>
-          <p:nvPr/>
-        </p:nvSpPr>
-        <p:spPr>
-          <a:xfrm>
-            <a:off x="4607662" y="1151230"/>
-            <a:ext cx="2991002" cy="461772"/>
-          </a:xfrm>
-          <a:prstGeom prst="rect">
-            <a:avLst/>
-          </a:prstGeom>
-          <a:noFill/>
-          <a:ln/>
-        </p:spPr>
-        <p:txBody>
-          <a:bodyPr wrap="square" rtlCol="0" anchor="ctr">
-            <a:normAutofit/>
-          </a:bodyPr>
-          <a:lstStyle/>
-          <a:p>
-            <a:pPr algn="ctr" indent="0" marL="0">
-              <a:buNone/>
-            </a:pPr>
-            <a:r>
-              <a:rPr lang="en-US" sz="2000" b="1" dirty="0">
-                <a:solidFill>
-                  <a:srgbClr val="FFFFFF"/>
-                </a:solidFill>
-                <a:latin typeface="Aptos" pitchFamily="34" charset="0"/>
-                <a:ea typeface="Aptos" pitchFamily="34" charset="-122"/>
-                <a:cs typeface="Aptos" pitchFamily="34" charset="-120"/>
-              </a:rPr>
-              <a:t>Semua unit</a:t>
-            </a:r>
-            <a:endParaRPr lang="en-US" sz="2000" dirty="0"/>
-          </a:p>
-        </p:txBody>
-      </p:sp>
-      <p:sp>
-        <p:nvSpPr>
-          <p:cNvPr id="8" name="Text 3"/>
-          <p:cNvSpPr/>
-          <p:nvPr/>
-        </p:nvSpPr>
-        <p:spPr>
-          <a:xfrm>
-            <a:off x="4772254" y="1681582"/>
-            <a:ext cx="2648102" cy="369418"/>
-          </a:xfrm>
-          <a:prstGeom prst="rect">
-            <a:avLst/>
-          </a:prstGeom>
-          <a:noFill/>
-          <a:ln/>
-        </p:spPr>
-        <p:txBody>
-          <a:bodyPr wrap="square" rtlCol="0" anchor="ctr">
-            <a:normAutofit/>
-          </a:bodyPr>
-          <a:lstStyle/>
-          <a:p>
-            <a:pPr algn="ctr" indent="0" marL="0">
-              <a:buNone/>
-            </a:pPr>
-            <a:r>
-              <a:rPr lang="en-US" sz="2400" dirty="0">
-                <a:solidFill>
-                  <a:srgbClr val="FFFFFF"/>
-                </a:solidFill>
-                <a:latin typeface="Aptos" pitchFamily="34" charset="0"/>
-                <a:ea typeface="Aptos" pitchFamily="34" charset="-122"/>
-                <a:cs typeface="Aptos" pitchFamily="34" charset="-120"/>
-              </a:rPr>
-              <a:t>Semua posisi</a:t>
-            </a:r>
-            <a:endParaRPr lang="en-US" sz="2400" dirty="0"/>
-          </a:p>
-        </p:txBody>
-      </p:sp>
-      <p:sp>
-        <p:nvSpPr>
-          <p:cNvPr id="9" name="Text 4"/>
-          <p:cNvSpPr/>
-          <p:nvPr/>
-        </p:nvSpPr>
-        <p:spPr>
-          <a:xfrm>
-            <a:off x="3269894" y="2176272"/>
-            <a:ext cx="5692140" cy="365760"/>
-          </a:xfrm>
-          <a:prstGeom prst="rect">
-            <a:avLst/>
-          </a:prstGeom>
-          <a:noFill/>
-          <a:ln/>
-        </p:spPr>
-        <p:txBody>
-          <a:bodyPr wrap="square" rtlCol="0" anchor="ctr"/>
-          <a:lstStyle/>
-          <a:p>
-            <a:pPr algn="ctr" indent="0" marL="0">
-              <a:buNone/>
-            </a:pPr>
-            <a:r>
-              <a:rPr lang="en-US" sz="1800" dirty="0">
-                <a:solidFill>
-                  <a:srgbClr val="FFFFFF"/>
-                </a:solidFill>
-                <a:latin typeface="Aptos" pitchFamily="34" charset="0"/>
-                <a:ea typeface="Aptos" pitchFamily="34" charset="-122"/>
-                <a:cs typeface="Aptos" pitchFamily="34" charset="-120"/>
-              </a:rPr>
-              <a:t>Minggu ke-4 September 2026</a:t>
-            </a:r>
-            <a:endParaRPr lang="en-US" sz="1800" dirty="0"/>
-          </a:p>
-        </p:txBody>
-      </p:sp>
-      <p:sp>
-        <p:nvSpPr>
-          <p:cNvPr id="10" name="Text 5"/>
-          <p:cNvSpPr/>
-          <p:nvPr/>
-        </p:nvSpPr>
-        <p:spPr>
-          <a:xfrm>
-            <a:off x="3566160" y="2697480"/>
-            <a:ext cx="2011680" cy="365760"/>
-          </a:xfrm>
-          <a:prstGeom prst="rect">
-            <a:avLst/>
-          </a:prstGeom>
-          <a:noFill/>
-          <a:ln/>
-        </p:spPr>
-        <p:txBody>
-          <a:bodyPr wrap="square" rtlCol="0" anchor="ctr"/>
-          <a:lstStyle/>
-          <a:p>
-            <a:pPr algn="r" indent="0" marL="0">
-              <a:buNone/>
-            </a:pPr>
-            <a:r>
-              <a:rPr lang="en-US" sz="1400" dirty="0">
-                <a:solidFill>
-                  <a:srgbClr val="FFFFFF"/>
-                </a:solidFill>
-                <a:latin typeface="Aptos" pitchFamily="34" charset="0"/>
-                <a:ea typeface="Aptos" pitchFamily="34" charset="-122"/>
-                <a:cs typeface="Aptos" pitchFamily="34" charset="-120"/>
-              </a:rPr>
-              <a:t>Jenis kantor</a:t>
-            </a:r>
-            <a:endParaRPr lang="en-US" sz="1400" dirty="0"/>
-          </a:p>
-        </p:txBody>
-      </p:sp>
-      <p:sp>
-        <p:nvSpPr>
-          <p:cNvPr id="11" name="Text 6"/>
-          <p:cNvSpPr/>
-          <p:nvPr/>
-        </p:nvSpPr>
-        <p:spPr>
-          <a:xfrm>
-            <a:off x="5669280" y="2697480"/>
-            <a:ext cx="3657600" cy="365760"/>
-          </a:xfrm>
-          <a:prstGeom prst="rect">
-            <a:avLst/>
-          </a:prstGeom>
-          <a:noFill/>
-          <a:ln/>
-        </p:spPr>
-        <p:txBody>
-          <a:bodyPr wrap="square" rtlCol="0" anchor="ctr"/>
-          <a:lstStyle/>
-          <a:p>
-            <a:pPr indent="0" marL="0">
-              <a:buNone/>
-            </a:pPr>
-            <a:r>
-              <a:rPr lang="en-US" sz="1400" b="1" dirty="0">
-                <a:solidFill>
-                  <a:srgbClr val="FFFFFF"/>
-                </a:solidFill>
-                <a:latin typeface="Aptos" pitchFamily="34" charset="0"/>
-                <a:ea typeface="Aptos" pitchFamily="34" charset="-122"/>
-                <a:cs typeface="Aptos" pitchFamily="34" charset="-120"/>
-              </a:rPr>
-              <a:t>: Semua jenis</a:t>
-            </a:r>
-            <a:endParaRPr lang="en-US" sz="1400" dirty="0"/>
-          </a:p>
-        </p:txBody>
-      </p:sp>
-      <p:sp>
-        <p:nvSpPr>
-          <p:cNvPr id="12" name="Text 7"/>
-          <p:cNvSpPr/>
-          <p:nvPr/>
-        </p:nvSpPr>
-        <p:spPr>
-          <a:xfrm>
-            <a:off x="3566160" y="3154680"/>
-            <a:ext cx="2011680" cy="365760"/>
-          </a:xfrm>
-          <a:prstGeom prst="rect">
-            <a:avLst/>
-          </a:prstGeom>
-          <a:noFill/>
-          <a:ln/>
-        </p:spPr>
-        <p:txBody>
-          <a:bodyPr wrap="square" rtlCol="0" anchor="ctr"/>
-          <a:lstStyle/>
-          <a:p>
-            <a:pPr algn="r" indent="0" marL="0">
-              <a:buNone/>
-            </a:pPr>
-            <a:r>
-              <a:rPr lang="en-US" sz="1400" dirty="0">
-                <a:solidFill>
-                  <a:srgbClr val="FFFFFF"/>
-                </a:solidFill>
-                <a:latin typeface="Aptos" pitchFamily="34" charset="0"/>
-                <a:ea typeface="Aptos" pitchFamily="34" charset="-122"/>
-                <a:cs typeface="Aptos" pitchFamily="34" charset="-120"/>
-              </a:rPr>
-              <a:t>Unit / cabang</a:t>
-            </a:r>
-            <a:endParaRPr lang="en-US" sz="1400" dirty="0"/>
-          </a:p>
-        </p:txBody>
-      </p:sp>
-      <p:sp>
-        <p:nvSpPr>
-          <p:cNvPr id="13" name="Text 8"/>
-          <p:cNvSpPr/>
-          <p:nvPr/>
-        </p:nvSpPr>
-        <p:spPr>
-          <a:xfrm>
-            <a:off x="5669280" y="3154680"/>
-            <a:ext cx="3657600" cy="365760"/>
-          </a:xfrm>
-          <a:prstGeom prst="rect">
-            <a:avLst/>
-          </a:prstGeom>
-          <a:noFill/>
-          <a:ln/>
-        </p:spPr>
-        <p:txBody>
-          <a:bodyPr wrap="square" rtlCol="0" anchor="ctr"/>
-          <a:lstStyle/>
-          <a:p>
-            <a:pPr indent="0" marL="0">
-              <a:buNone/>
-            </a:pPr>
-            <a:r>
-              <a:rPr lang="en-US" sz="1400" b="1" dirty="0">
-                <a:solidFill>
-                  <a:srgbClr val="FFFFFF"/>
-                </a:solidFill>
-                <a:latin typeface="Aptos" pitchFamily="34" charset="0"/>
-                <a:ea typeface="Aptos" pitchFamily="34" charset="-122"/>
-                <a:cs typeface="Aptos" pitchFamily="34" charset="-120"/>
-              </a:rPr>
-              <a:t>: Semua unit</a:t>
-            </a:r>
-            <a:endParaRPr lang="en-US" sz="1400" dirty="0"/>
-          </a:p>
-        </p:txBody>
-      </p:sp>
-      <p:sp>
-        <p:nvSpPr>
-          <p:cNvPr id="14" name="Text 9"/>
-          <p:cNvSpPr/>
-          <p:nvPr/>
-        </p:nvSpPr>
-        <p:spPr>
-          <a:xfrm>
-            <a:off x="3566160" y="3611880"/>
-            <a:ext cx="2011680" cy="365760"/>
-          </a:xfrm>
-          <a:prstGeom prst="rect">
-            <a:avLst/>
-          </a:prstGeom>
-          <a:noFill/>
-          <a:ln/>
-        </p:spPr>
-        <p:txBody>
-          <a:bodyPr wrap="square" rtlCol="0" anchor="ctr"/>
-          <a:lstStyle/>
-          <a:p>
-            <a:pPr algn="r" indent="0" marL="0">
-              <a:buNone/>
-            </a:pPr>
-            <a:r>
-              <a:rPr lang="en-US" sz="1400" dirty="0">
-                <a:solidFill>
-                  <a:srgbClr val="FFFFFF"/>
-                </a:solidFill>
-                <a:latin typeface="Aptos" pitchFamily="34" charset="0"/>
-                <a:ea typeface="Aptos" pitchFamily="34" charset="-122"/>
-                <a:cs typeface="Aptos" pitchFamily="34" charset="-120"/>
-              </a:rPr>
-              <a:t>Posisi dinilai</a:t>
-            </a:r>
-            <a:endParaRPr lang="en-US" sz="1400" dirty="0"/>
-          </a:p>
-        </p:txBody>
-      </p:sp>
-      <p:sp>
-        <p:nvSpPr>
-          <p:cNvPr id="15" name="Text 10"/>
-          <p:cNvSpPr/>
-          <p:nvPr/>
-        </p:nvSpPr>
-        <p:spPr>
-          <a:xfrm>
-            <a:off x="5669280" y="3611880"/>
-            <a:ext cx="3657600" cy="365760"/>
-          </a:xfrm>
-          <a:prstGeom prst="rect">
-            <a:avLst/>
-          </a:prstGeom>
-          <a:noFill/>
-          <a:ln/>
-        </p:spPr>
-        <p:txBody>
-          <a:bodyPr wrap="square" rtlCol="0" anchor="ctr"/>
-          <a:lstStyle/>
-          <a:p>
-            <a:pPr indent="0" marL="0">
-              <a:buNone/>
-            </a:pPr>
-            <a:r>
-              <a:rPr lang="en-US" sz="1400" b="1" dirty="0">
-                <a:solidFill>
-                  <a:srgbClr val="FFFFFF"/>
-                </a:solidFill>
-                <a:latin typeface="Aptos" pitchFamily="34" charset="0"/>
-                <a:ea typeface="Aptos" pitchFamily="34" charset="-122"/>
-                <a:cs typeface="Aptos" pitchFamily="34" charset="-120"/>
-              </a:rPr>
-              <a:t>: Semua posisi</a:t>
-            </a:r>
-            <a:endParaRPr lang="en-US" sz="1400" dirty="0"/>
-          </a:p>
-        </p:txBody>
-      </p:sp>
-      <p:sp>
-        <p:nvSpPr>
-          <p:cNvPr id="16" name="Text 11"/>
-          <p:cNvSpPr/>
-          <p:nvPr/>
-        </p:nvSpPr>
-        <p:spPr>
-          <a:xfrm>
-            <a:off x="3566160" y="4069080"/>
-            <a:ext cx="2011680" cy="365760"/>
-          </a:xfrm>
-          <a:prstGeom prst="rect">
-            <a:avLst/>
-          </a:prstGeom>
-          <a:noFill/>
-          <a:ln/>
-        </p:spPr>
-        <p:txBody>
-          <a:bodyPr wrap="square" rtlCol="0" anchor="ctr"/>
-          <a:lstStyle/>
-          <a:p>
-            <a:pPr algn="r" indent="0" marL="0">
-              <a:buNone/>
-            </a:pPr>
-            <a:r>
-              <a:rPr lang="en-US" sz="1400" dirty="0">
-                <a:solidFill>
-                  <a:srgbClr val="FFFFFF"/>
-                </a:solidFill>
-                <a:latin typeface="Aptos" pitchFamily="34" charset="0"/>
-                <a:ea typeface="Aptos" pitchFamily="34" charset="-122"/>
-                <a:cs typeface="Aptos" pitchFamily="34" charset="-120"/>
-              </a:rPr>
-              <a:t>Periode</a:t>
-            </a:r>
-            <a:endParaRPr lang="en-US" sz="1400" dirty="0"/>
-          </a:p>
-        </p:txBody>
-      </p:sp>
-      <p:sp>
-        <p:nvSpPr>
-          <p:cNvPr id="17" name="Text 12"/>
-          <p:cNvSpPr/>
-          <p:nvPr/>
-        </p:nvSpPr>
-        <p:spPr>
-          <a:xfrm>
-            <a:off x="5669280" y="4069080"/>
-            <a:ext cx="3657600" cy="365760"/>
-          </a:xfrm>
-          <a:prstGeom prst="rect">
-            <a:avLst/>
-          </a:prstGeom>
-          <a:noFill/>
-          <a:ln/>
-        </p:spPr>
-        <p:txBody>
-          <a:bodyPr wrap="square" rtlCol="0" anchor="ctr"/>
-          <a:lstStyle/>
-          <a:p>
-            <a:pPr indent="0" marL="0">
-              <a:buNone/>
-            </a:pPr>
-            <a:r>
-              <a:rPr lang="en-US" sz="1400" b="1" dirty="0">
-                <a:solidFill>
-                  <a:srgbClr val="FFFFFF"/>
-                </a:solidFill>
-                <a:latin typeface="Aptos" pitchFamily="34" charset="0"/>
-                <a:ea typeface="Aptos" pitchFamily="34" charset="-122"/>
-                <a:cs typeface="Aptos" pitchFamily="34" charset="-120"/>
-              </a:rPr>
-              <a:t>: Minggu ke-4 September 2026</a:t>
-            </a:r>
-            <a:endParaRPr lang="en-US" sz="1400" dirty="0"/>
-          </a:p>
-        </p:txBody>
-      </p:sp>
-      <p:sp>
-        <p:nvSpPr>
-          <p:cNvPr id="18" name="Text 13"/>
-          <p:cNvSpPr/>
-          <p:nvPr/>
-        </p:nvSpPr>
-        <p:spPr>
-          <a:xfrm>
-            <a:off x="3566160" y="4526280"/>
-            <a:ext cx="2011680" cy="365760"/>
-          </a:xfrm>
-          <a:prstGeom prst="rect">
-            <a:avLst/>
-          </a:prstGeom>
-          <a:noFill/>
-          <a:ln/>
-        </p:spPr>
-        <p:txBody>
-          <a:bodyPr wrap="square" rtlCol="0" anchor="ctr"/>
-          <a:lstStyle/>
-          <a:p>
-            <a:pPr algn="r" indent="0" marL="0">
-              <a:buNone/>
-            </a:pPr>
-            <a:r>
-              <a:rPr lang="en-US" sz="1400" dirty="0">
-                <a:solidFill>
-                  <a:srgbClr val="FFFFFF"/>
-                </a:solidFill>
-                <a:latin typeface="Aptos" pitchFamily="34" charset="0"/>
-                <a:ea typeface="Aptos" pitchFamily="34" charset="-122"/>
-                <a:cs typeface="Aptos" pitchFamily="34" charset="-120"/>
-              </a:rPr>
-              <a:t>Jumlah peserta</a:t>
-            </a:r>
-            <a:endParaRPr lang="en-US" sz="1400" dirty="0"/>
-          </a:p>
-        </p:txBody>
-      </p:sp>
-      <p:sp>
-        <p:nvSpPr>
-          <p:cNvPr id="19" name="Text 14"/>
-          <p:cNvSpPr/>
-          <p:nvPr/>
-        </p:nvSpPr>
-        <p:spPr>
-          <a:xfrm>
-            <a:off x="5669280" y="4526280"/>
-            <a:ext cx="3657600" cy="365760"/>
-          </a:xfrm>
-          <a:prstGeom prst="rect">
-            <a:avLst/>
-          </a:prstGeom>
-          <a:noFill/>
-          <a:ln/>
-        </p:spPr>
-        <p:txBody>
-          <a:bodyPr wrap="square" rtlCol="0" anchor="ctr"/>
-          <a:lstStyle/>
-          <a:p>
-            <a:pPr indent="0" marL="0">
-              <a:buNone/>
-            </a:pPr>
-            <a:r>
-              <a:rPr lang="en-US" sz="1400" b="1" dirty="0">
-                <a:solidFill>
-                  <a:srgbClr val="FFFFFF"/>
-                </a:solidFill>
-                <a:latin typeface="Aptos" pitchFamily="34" charset="0"/>
-                <a:ea typeface="Aptos" pitchFamily="34" charset="-122"/>
-                <a:cs typeface="Aptos" pitchFamily="34" charset="-120"/>
-              </a:rPr>
-              <a:t>: 1</a:t>
-            </a:r>
-            <a:endParaRPr lang="en-US" sz="1400" dirty="0"/>
-          </a:p>
-        </p:txBody>
-      </p:sp>
-      <p:sp>
-        <p:nvSpPr>
-          <p:cNvPr id="20" name="Shape 15"/>
-          <p:cNvSpPr/>
-          <p:nvPr/>
-        </p:nvSpPr>
-        <p:spPr>
-          <a:xfrm>
-            <a:off x="2832811" y="5922569"/>
-            <a:ext cx="6273698" cy="905256"/>
-          </a:xfrm>
-          <a:prstGeom prst="roundRect">
-            <a:avLst>
-              <a:gd name="adj" fmla="val 6061"/>
-            </a:avLst>
-          </a:prstGeom>
-          <a:solidFill>
-            <a:srgbClr val="FFFFFF"/>
-          </a:solidFill>
-          <a:ln w="12700">
-            <a:solidFill>
-              <a:srgbClr val="FFFFFF"/>
-            </a:solidFill>
-            <a:prstDash val="solid"/>
-          </a:ln>
-        </p:spPr>
-      </p:sp>
-      <p:sp>
-        <p:nvSpPr>
           <p:cNvPr id="21" name="Shape 16"/>
           <p:cNvSpPr/>
           <p:nvPr/>
@@ -1760,9 +1757,9 @@
               <a:buNone/>
             </a:pPr>
             <a:r>
-              <a:rPr lang="en-US" sz="1100" b="1" dirty="0">
-                <a:solidFill>
-                  <a:srgbClr val="222222"/>
+              <a:rPr lang="en-US" sz="1000" b="1" dirty="0">
+                <a:solidFill>
+                  <a:srgbClr val="142D64"/>
                 </a:solidFill>
                 <a:latin typeface="Aptos" pitchFamily="34" charset="0"/>
                 <a:ea typeface="Aptos" pitchFamily="34" charset="-122"/>
@@ -1770,7 +1767,7 @@
               </a:rPr>
               <a:t>4,80-5,00</a:t>
             </a:r>
-            <a:endParaRPr lang="en-US" sz="1100" dirty="0"/>
+            <a:endParaRPr lang="en-US" sz="1000" dirty="0"/>
           </a:p>
         </p:txBody>
       </p:sp>
@@ -1801,9 +1798,9 @@
               <a:buNone/>
             </a:pPr>
             <a:r>
-              <a:rPr lang="en-US" sz="1100" dirty="0">
-                <a:solidFill>
-                  <a:srgbClr val="333333"/>
+              <a:rPr lang="en-US" sz="850" dirty="0">
+                <a:solidFill>
+                  <a:srgbClr val="142D64"/>
                 </a:solidFill>
                 <a:latin typeface="Aptos" pitchFamily="34" charset="0"/>
                 <a:ea typeface="Aptos" pitchFamily="34" charset="-122"/>
@@ -1811,7 +1808,7 @@
               </a:rPr>
               <a:t>Istimewa</a:t>
             </a:r>
-            <a:endParaRPr lang="en-US" sz="1100" dirty="0"/>
+            <a:endParaRPr lang="en-US" sz="850" dirty="0"/>
           </a:p>
         </p:txBody>
       </p:sp>
@@ -1867,9 +1864,9 @@
               <a:buNone/>
             </a:pPr>
             <a:r>
-              <a:rPr lang="en-US" sz="1100" b="1" dirty="0">
-                <a:solidFill>
-                  <a:srgbClr val="222222"/>
+              <a:rPr lang="en-US" sz="1000" b="1" dirty="0">
+                <a:solidFill>
+                  <a:srgbClr val="142D64"/>
                 </a:solidFill>
                 <a:latin typeface="Aptos" pitchFamily="34" charset="0"/>
                 <a:ea typeface="Aptos" pitchFamily="34" charset="-122"/>
@@ -1877,7 +1874,7 @@
               </a:rPr>
               <a:t>4,60-4,79</a:t>
             </a:r>
-            <a:endParaRPr lang="en-US" sz="1100" dirty="0"/>
+            <a:endParaRPr lang="en-US" sz="1000" dirty="0"/>
           </a:p>
         </p:txBody>
       </p:sp>
@@ -1908,9 +1905,9 @@
               <a:buNone/>
             </a:pPr>
             <a:r>
-              <a:rPr lang="en-US" sz="1100" dirty="0">
-                <a:solidFill>
-                  <a:srgbClr val="333333"/>
+              <a:rPr lang="en-US" sz="850" dirty="0">
+                <a:solidFill>
+                  <a:srgbClr val="142D64"/>
                 </a:solidFill>
                 <a:latin typeface="Aptos" pitchFamily="34" charset="0"/>
                 <a:ea typeface="Aptos" pitchFamily="34" charset="-122"/>
@@ -1918,7 +1915,7 @@
               </a:rPr>
               <a:t>Sangat Baik</a:t>
             </a:r>
-            <a:endParaRPr lang="en-US" sz="1100" dirty="0"/>
+            <a:endParaRPr lang="en-US" sz="850" dirty="0"/>
           </a:p>
         </p:txBody>
       </p:sp>
@@ -1974,9 +1971,9 @@
               <a:buNone/>
             </a:pPr>
             <a:r>
-              <a:rPr lang="en-US" sz="1100" b="1" dirty="0">
-                <a:solidFill>
-                  <a:srgbClr val="222222"/>
+              <a:rPr lang="en-US" sz="1000" b="1" dirty="0">
+                <a:solidFill>
+                  <a:srgbClr val="142D64"/>
                 </a:solidFill>
                 <a:latin typeface="Aptos" pitchFamily="34" charset="0"/>
                 <a:ea typeface="Aptos" pitchFamily="34" charset="-122"/>
@@ -1984,7 +1981,7 @@
               </a:rPr>
               <a:t>4,00-4,59</a:t>
             </a:r>
-            <a:endParaRPr lang="en-US" sz="1100" dirty="0"/>
+            <a:endParaRPr lang="en-US" sz="1000" dirty="0"/>
           </a:p>
         </p:txBody>
       </p:sp>
@@ -2015,9 +2012,9 @@
               <a:buNone/>
             </a:pPr>
             <a:r>
-              <a:rPr lang="en-US" sz="1100" dirty="0">
-                <a:solidFill>
-                  <a:srgbClr val="333333"/>
+              <a:rPr lang="en-US" sz="850" dirty="0">
+                <a:solidFill>
+                  <a:srgbClr val="142D64"/>
                 </a:solidFill>
                 <a:latin typeface="Aptos" pitchFamily="34" charset="0"/>
                 <a:ea typeface="Aptos" pitchFamily="34" charset="-122"/>
@@ -2025,7 +2022,7 @@
               </a:rPr>
               <a:t>Baik</a:t>
             </a:r>
-            <a:endParaRPr lang="en-US" sz="1100" dirty="0"/>
+            <a:endParaRPr lang="en-US" sz="850" dirty="0"/>
           </a:p>
         </p:txBody>
       </p:sp>
@@ -2081,9 +2078,9 @@
               <a:buNone/>
             </a:pPr>
             <a:r>
-              <a:rPr lang="en-US" sz="1100" b="1" dirty="0">
-                <a:solidFill>
-                  <a:srgbClr val="222222"/>
+              <a:rPr lang="en-US" sz="1000" b="1" dirty="0">
+                <a:solidFill>
+                  <a:srgbClr val="142D64"/>
                 </a:solidFill>
                 <a:latin typeface="Aptos" pitchFamily="34" charset="0"/>
                 <a:ea typeface="Aptos" pitchFamily="34" charset="-122"/>
@@ -2091,7 +2088,7 @@
               </a:rPr>
               <a:t>3,60-3,99</a:t>
             </a:r>
-            <a:endParaRPr lang="en-US" sz="1100" dirty="0"/>
+            <a:endParaRPr lang="en-US" sz="1000" dirty="0"/>
           </a:p>
         </p:txBody>
       </p:sp>
@@ -2122,9 +2119,9 @@
               <a:buNone/>
             </a:pPr>
             <a:r>
-              <a:rPr lang="en-US" sz="1100" dirty="0">
-                <a:solidFill>
-                  <a:srgbClr val="333333"/>
+              <a:rPr lang="en-US" sz="850" dirty="0">
+                <a:solidFill>
+                  <a:srgbClr val="142D64"/>
                 </a:solidFill>
                 <a:latin typeface="Aptos" pitchFamily="34" charset="0"/>
                 <a:ea typeface="Aptos" pitchFamily="34" charset="-122"/>
@@ -2132,7 +2129,7 @@
               </a:rPr>
               <a:t>Cukup</a:t>
             </a:r>
-            <a:endParaRPr lang="en-US" sz="1100" dirty="0"/>
+            <a:endParaRPr lang="en-US" sz="850" dirty="0"/>
           </a:p>
         </p:txBody>
       </p:sp>
@@ -2188,9 +2185,9 @@
               <a:buNone/>
             </a:pPr>
             <a:r>
-              <a:rPr lang="en-US" sz="1100" b="1" dirty="0">
-                <a:solidFill>
-                  <a:srgbClr val="222222"/>
+              <a:rPr lang="en-US" sz="1000" b="1" dirty="0">
+                <a:solidFill>
+                  <a:srgbClr val="142D64"/>
                 </a:solidFill>
                 <a:latin typeface="Aptos" pitchFamily="34" charset="0"/>
                 <a:ea typeface="Aptos" pitchFamily="34" charset="-122"/>
@@ -2198,7 +2195,7 @@
               </a:rPr>
               <a:t>&lt;3,59</a:t>
             </a:r>
-            <a:endParaRPr lang="en-US" sz="1100" dirty="0"/>
+            <a:endParaRPr lang="en-US" sz="1000" dirty="0"/>
           </a:p>
         </p:txBody>
       </p:sp>
@@ -2229,9 +2226,9 @@
               <a:buNone/>
             </a:pPr>
             <a:r>
-              <a:rPr lang="en-US" sz="1100" dirty="0">
-                <a:solidFill>
-                  <a:srgbClr val="333333"/>
+              <a:rPr lang="en-US" sz="850" dirty="0">
+                <a:solidFill>
+                  <a:srgbClr val="142D64"/>
                 </a:solidFill>
                 <a:latin typeface="Aptos" pitchFamily="34" charset="0"/>
                 <a:ea typeface="Aptos" pitchFamily="34" charset="-122"/>
@@ -2239,7 +2236,7 @@
               </a:rPr>
               <a:t>Kurang</a:t>
             </a:r>
-            <a:endParaRPr lang="en-US" sz="1100" dirty="0"/>
+            <a:endParaRPr lang="en-US" sz="850" dirty="0"/>
           </a:p>
         </p:txBody>
       </p:sp>
@@ -2374,7 +2371,7 @@
               <a:buNone/>
             </a:pPr>
             <a:r>
-              <a:rPr lang="en-US" sz="4000" b="1" dirty="0">
+              <a:rPr lang="en-US" sz="4400" b="1" dirty="0">
                 <a:solidFill>
                   <a:srgbClr val="FFFFFF"/>
                 </a:solidFill>
@@ -2384,7 +2381,7 @@
               </a:rPr>
               <a:t>Service Drill Ranking</a:t>
             </a:r>
-            <a:endParaRPr lang="en-US" sz="4000" dirty="0"/>
+            <a:endParaRPr lang="en-US" sz="4400" dirty="0"/>
           </a:p>
         </p:txBody>
       </p:sp>
@@ -2401,13 +2398,10 @@
           </a:xfrm>
           <a:prstGeom prst="roundRect">
             <a:avLst>
-              <a:gd name="adj" fmla="val 15842"/>
+              <a:gd name="adj" fmla="val 19802"/>
             </a:avLst>
           </a:prstGeom>
-          <a:solidFill>
-            <a:srgbClr val="2E4FD6"/>
-          </a:solidFill>
-          <a:ln w="12700">
+          <a:ln w="15875">
             <a:solidFill>
               <a:srgbClr val="FFFFFF"/>
             </a:solidFill>
@@ -2446,9 +2440,9 @@
                 <a:solidFill>
                   <a:srgbClr val="FFFFFF"/>
                 </a:solidFill>
-                <a:latin typeface="Aptos" pitchFamily="34" charset="0"/>
-                <a:ea typeface="Aptos" pitchFamily="34" charset="-122"/>
-                <a:cs typeface="Aptos" pitchFamily="34" charset="-120"/>
+                <a:latin typeface="Poppins" pitchFamily="34" charset="0"/>
+                <a:ea typeface="Poppins" pitchFamily="34" charset="-122"/>
+                <a:cs typeface="Poppins" pitchFamily="34" charset="-120"/>
               </a:rPr>
               <a:t>244 KC MAMUJU</a:t>
             </a:r>
@@ -2732,7 +2726,7 @@
               <a:buNone/>
             </a:pPr>
             <a:r>
-              <a:rPr lang="en-US" sz="1400" b="1" dirty="0">
+              <a:rPr lang="en-US" sz="1200" b="1" dirty="0">
                 <a:solidFill>
                   <a:srgbClr val="FFFFFF"/>
                 </a:solidFill>
@@ -2742,7 +2736,7 @@
               </a:rPr>
               <a:t>Kurang</a:t>
             </a:r>
-            <a:endParaRPr lang="en-US" sz="1400" dirty="0"/>
+            <a:endParaRPr lang="en-US" sz="1200" dirty="0"/>
           </a:p>
         </p:txBody>
       </p:sp>
@@ -2891,9 +2885,9 @@
               <a:buNone/>
             </a:pPr>
             <a:r>
-              <a:rPr lang="en-US" sz="1100" b="1" dirty="0">
-                <a:solidFill>
-                  <a:srgbClr val="222222"/>
+              <a:rPr lang="en-US" sz="1000" b="1" dirty="0">
+                <a:solidFill>
+                  <a:srgbClr val="142D64"/>
                 </a:solidFill>
                 <a:latin typeface="Aptos" pitchFamily="34" charset="0"/>
                 <a:ea typeface="Aptos" pitchFamily="34" charset="-122"/>
@@ -2901,7 +2895,7 @@
               </a:rPr>
               <a:t>4,80-5,00</a:t>
             </a:r>
-            <a:endParaRPr lang="en-US" sz="1100" dirty="0"/>
+            <a:endParaRPr lang="en-US" sz="1000" dirty="0"/>
           </a:p>
         </p:txBody>
       </p:sp>
@@ -2932,9 +2926,9 @@
               <a:buNone/>
             </a:pPr>
             <a:r>
-              <a:rPr lang="en-US" sz="1100" dirty="0">
-                <a:solidFill>
-                  <a:srgbClr val="333333"/>
+              <a:rPr lang="en-US" sz="850" dirty="0">
+                <a:solidFill>
+                  <a:srgbClr val="142D64"/>
                 </a:solidFill>
                 <a:latin typeface="Aptos" pitchFamily="34" charset="0"/>
                 <a:ea typeface="Aptos" pitchFamily="34" charset="-122"/>
@@ -2942,7 +2936,7 @@
               </a:rPr>
               <a:t>Istimewa</a:t>
             </a:r>
-            <a:endParaRPr lang="en-US" sz="1100" dirty="0"/>
+            <a:endParaRPr lang="en-US" sz="850" dirty="0"/>
           </a:p>
         </p:txBody>
       </p:sp>
@@ -2998,9 +2992,9 @@
               <a:buNone/>
             </a:pPr>
             <a:r>
-              <a:rPr lang="en-US" sz="1100" b="1" dirty="0">
-                <a:solidFill>
-                  <a:srgbClr val="222222"/>
+              <a:rPr lang="en-US" sz="1000" b="1" dirty="0">
+                <a:solidFill>
+                  <a:srgbClr val="142D64"/>
                 </a:solidFill>
                 <a:latin typeface="Aptos" pitchFamily="34" charset="0"/>
                 <a:ea typeface="Aptos" pitchFamily="34" charset="-122"/>
@@ -3008,7 +3002,7 @@
               </a:rPr>
               <a:t>4,60-4,79</a:t>
             </a:r>
-            <a:endParaRPr lang="en-US" sz="1100" dirty="0"/>
+            <a:endParaRPr lang="en-US" sz="1000" dirty="0"/>
           </a:p>
         </p:txBody>
       </p:sp>
@@ -3039,9 +3033,9 @@
               <a:buNone/>
             </a:pPr>
             <a:r>
-              <a:rPr lang="en-US" sz="1100" dirty="0">
-                <a:solidFill>
-                  <a:srgbClr val="333333"/>
+              <a:rPr lang="en-US" sz="850" dirty="0">
+                <a:solidFill>
+                  <a:srgbClr val="142D64"/>
                 </a:solidFill>
                 <a:latin typeface="Aptos" pitchFamily="34" charset="0"/>
                 <a:ea typeface="Aptos" pitchFamily="34" charset="-122"/>
@@ -3049,7 +3043,7 @@
               </a:rPr>
               <a:t>Sangat Baik</a:t>
             </a:r>
-            <a:endParaRPr lang="en-US" sz="1100" dirty="0"/>
+            <a:endParaRPr lang="en-US" sz="850" dirty="0"/>
           </a:p>
         </p:txBody>
       </p:sp>
@@ -3105,9 +3099,9 @@
               <a:buNone/>
             </a:pPr>
             <a:r>
-              <a:rPr lang="en-US" sz="1100" b="1" dirty="0">
-                <a:solidFill>
-                  <a:srgbClr val="222222"/>
+              <a:rPr lang="en-US" sz="1000" b="1" dirty="0">
+                <a:solidFill>
+                  <a:srgbClr val="142D64"/>
                 </a:solidFill>
                 <a:latin typeface="Aptos" pitchFamily="34" charset="0"/>
                 <a:ea typeface="Aptos" pitchFamily="34" charset="-122"/>
@@ -3115,7 +3109,7 @@
               </a:rPr>
               <a:t>4,00-4,59</a:t>
             </a:r>
-            <a:endParaRPr lang="en-US" sz="1100" dirty="0"/>
+            <a:endParaRPr lang="en-US" sz="1000" dirty="0"/>
           </a:p>
         </p:txBody>
       </p:sp>
@@ -3146,9 +3140,9 @@
               <a:buNone/>
             </a:pPr>
             <a:r>
-              <a:rPr lang="en-US" sz="1100" dirty="0">
-                <a:solidFill>
-                  <a:srgbClr val="333333"/>
+              <a:rPr lang="en-US" sz="850" dirty="0">
+                <a:solidFill>
+                  <a:srgbClr val="142D64"/>
                 </a:solidFill>
                 <a:latin typeface="Aptos" pitchFamily="34" charset="0"/>
                 <a:ea typeface="Aptos" pitchFamily="34" charset="-122"/>
@@ -3156,7 +3150,7 @@
               </a:rPr>
               <a:t>Baik</a:t>
             </a:r>
-            <a:endParaRPr lang="en-US" sz="1100" dirty="0"/>
+            <a:endParaRPr lang="en-US" sz="850" dirty="0"/>
           </a:p>
         </p:txBody>
       </p:sp>
@@ -3212,9 +3206,9 @@
               <a:buNone/>
             </a:pPr>
             <a:r>
-              <a:rPr lang="en-US" sz="1100" b="1" dirty="0">
-                <a:solidFill>
-                  <a:srgbClr val="222222"/>
+              <a:rPr lang="en-US" sz="1000" b="1" dirty="0">
+                <a:solidFill>
+                  <a:srgbClr val="142D64"/>
                 </a:solidFill>
                 <a:latin typeface="Aptos" pitchFamily="34" charset="0"/>
                 <a:ea typeface="Aptos" pitchFamily="34" charset="-122"/>
@@ -3222,7 +3216,7 @@
               </a:rPr>
               <a:t>3,60-3,99</a:t>
             </a:r>
-            <a:endParaRPr lang="en-US" sz="1100" dirty="0"/>
+            <a:endParaRPr lang="en-US" sz="1000" dirty="0"/>
           </a:p>
         </p:txBody>
       </p:sp>
@@ -3253,9 +3247,9 @@
               <a:buNone/>
             </a:pPr>
             <a:r>
-              <a:rPr lang="en-US" sz="1100" dirty="0">
-                <a:solidFill>
-                  <a:srgbClr val="333333"/>
+              <a:rPr lang="en-US" sz="850" dirty="0">
+                <a:solidFill>
+                  <a:srgbClr val="142D64"/>
                 </a:solidFill>
                 <a:latin typeface="Aptos" pitchFamily="34" charset="0"/>
                 <a:ea typeface="Aptos" pitchFamily="34" charset="-122"/>
@@ -3263,7 +3257,7 @@
               </a:rPr>
               <a:t>Cukup</a:t>
             </a:r>
-            <a:endParaRPr lang="en-US" sz="1100" dirty="0"/>
+            <a:endParaRPr lang="en-US" sz="850" dirty="0"/>
           </a:p>
         </p:txBody>
       </p:sp>
@@ -3319,9 +3313,9 @@
               <a:buNone/>
             </a:pPr>
             <a:r>
-              <a:rPr lang="en-US" sz="1100" b="1" dirty="0">
-                <a:solidFill>
-                  <a:srgbClr val="222222"/>
+              <a:rPr lang="en-US" sz="1000" b="1" dirty="0">
+                <a:solidFill>
+                  <a:srgbClr val="142D64"/>
                 </a:solidFill>
                 <a:latin typeface="Aptos" pitchFamily="34" charset="0"/>
                 <a:ea typeface="Aptos" pitchFamily="34" charset="-122"/>
@@ -3329,7 +3323,7 @@
               </a:rPr>
               <a:t>&lt;3,59</a:t>
             </a:r>
-            <a:endParaRPr lang="en-US" sz="1100" dirty="0"/>
+            <a:endParaRPr lang="en-US" sz="1000" dirty="0"/>
           </a:p>
         </p:txBody>
       </p:sp>
@@ -3360,9 +3354,9 @@
               <a:buNone/>
             </a:pPr>
             <a:r>
-              <a:rPr lang="en-US" sz="1100" dirty="0">
-                <a:solidFill>
-                  <a:srgbClr val="333333"/>
+              <a:rPr lang="en-US" sz="850" dirty="0">
+                <a:solidFill>
+                  <a:srgbClr val="142D64"/>
                 </a:solidFill>
                 <a:latin typeface="Aptos" pitchFamily="34" charset="0"/>
                 <a:ea typeface="Aptos" pitchFamily="34" charset="-122"/>
@@ -3370,7 +3364,7 @@
               </a:rPr>
               <a:t>Kurang</a:t>
             </a:r>
-            <a:endParaRPr lang="en-US" sz="1100" dirty="0"/>
+            <a:endParaRPr lang="en-US" sz="850" dirty="0"/>
           </a:p>
         </p:txBody>
       </p:sp>

--- a/ranking-nyata.pptx
+++ b/ranking-nyata.pptx
@@ -1169,7 +1169,7 @@
               <a:buNone/>
             </a:pPr>
             <a:r>
-              <a:rPr lang="en-US" sz="2400" dirty="0">
+              <a:rPr lang="en-US" sz="1800" dirty="0">
                 <a:solidFill>
                   <a:srgbClr val="FFFFFF"/>
                 </a:solidFill>
@@ -1179,7 +1179,7 @@
               </a:rPr>
               <a:t>Semua posisi</a:t>
             </a:r>
-            <a:endParaRPr lang="en-US" sz="2400" dirty="0"/>
+            <a:endParaRPr lang="en-US" sz="1800" dirty="0"/>
           </a:p>
         </p:txBody>
       </p:sp>
@@ -2477,7 +2477,7 @@
               <a:buNone/>
             </a:pPr>
             <a:r>
-              <a:rPr lang="en-US" sz="2400" dirty="0">
+              <a:rPr lang="en-US" sz="1800" dirty="0">
                 <a:solidFill>
                   <a:srgbClr val="FFFFFF"/>
                 </a:solidFill>
@@ -2487,7 +2487,7 @@
               </a:rPr>
               <a:t>Teller</a:t>
             </a:r>
-            <a:endParaRPr lang="en-US" sz="2400" dirty="0"/>
+            <a:endParaRPr lang="en-US" sz="1800" dirty="0"/>
           </a:p>
         </p:txBody>
       </p:sp>
@@ -2594,7 +2594,7 @@
               <a:buNone/>
             </a:pPr>
             <a:r>
-              <a:rPr lang="en-US" sz="2000" b="1" dirty="0">
+              <a:rPr lang="en-US" sz="1600" b="1" dirty="0">
                 <a:solidFill>
                   <a:srgbClr val="FFFFFF"/>
                 </a:solidFill>
@@ -2604,7 +2604,7 @@
               </a:rPr>
               <a:t>IRWAN ALLO</a:t>
             </a:r>
-            <a:endParaRPr lang="en-US" sz="2000" dirty="0"/>
+            <a:endParaRPr lang="en-US" sz="1600" dirty="0"/>
           </a:p>
         </p:txBody>
       </p:sp>

--- a/ranking-nyata.pptx
+++ b/ranking-nyata.pptx
@@ -2485,7 +2485,7 @@
                 <a:ea typeface="Aptos" pitchFamily="34" charset="-122"/>
                 <a:cs typeface="Aptos" pitchFamily="34" charset="-120"/>
               </a:rPr>
-              <a:t>Teller</a:t>
+              <a:t>Teller Service</a:t>
             </a:r>
             <a:endParaRPr lang="en-US" sz="1800" dirty="0"/>
           </a:p>

--- a/ranking-nyata.pptx
+++ b/ranking-nyata.pptx
@@ -1620,12 +1620,12 @@
         </p:nvSpPr>
         <p:spPr>
           <a:xfrm>
-            <a:off x="2832811" y="5922569"/>
-            <a:ext cx="6273698" cy="905256"/>
+            <a:off x="2606040" y="5605272"/>
+            <a:ext cx="6273698" cy="658368"/>
           </a:xfrm>
           <a:prstGeom prst="roundRect">
             <a:avLst>
-              <a:gd name="adj" fmla="val 6061"/>
+              <a:gd name="adj" fmla="val 8333"/>
             </a:avLst>
           </a:prstGeom>
           <a:solidFill>
@@ -1647,20 +1647,17 @@
         </p:nvSpPr>
         <p:spPr>
           <a:xfrm>
-            <a:off x="5100980" y="5748833"/>
-            <a:ext cx="1737360" cy="274320"/>
+            <a:off x="4754880" y="5358384"/>
+            <a:ext cx="1828800" cy="310896"/>
           </a:xfrm>
           <a:prstGeom prst="roundRect">
             <a:avLst>
-              <a:gd name="adj" fmla="val 33333"/>
+              <a:gd name="adj" fmla="val 52941"/>
             </a:avLst>
           </a:prstGeom>
-          <a:solidFill>
-            <a:srgbClr val="2E4FD6"/>
-          </a:solidFill>
           <a:ln w="12700">
             <a:solidFill>
-              <a:srgbClr val="2E4FD6"/>
+              <a:srgbClr val="FFFFFF"/>
             </a:solidFill>
             <a:prstDash val="solid"/>
           </a:ln>
@@ -1674,8 +1671,8 @@
         </p:nvSpPr>
         <p:spPr>
           <a:xfrm>
-            <a:off x="5100980" y="5748833"/>
-            <a:ext cx="1737360" cy="274320"/>
+            <a:off x="4754880" y="5385816"/>
+            <a:ext cx="1828800" cy="228600"/>
           </a:xfrm>
           <a:prstGeom prst="rect">
             <a:avLst/>
@@ -1713,8 +1710,8 @@
         </p:nvSpPr>
         <p:spPr>
           <a:xfrm>
-            <a:off x="2924251" y="6196889"/>
-            <a:ext cx="118872" cy="118872"/>
+            <a:off x="2770632" y="5806440"/>
+            <a:ext cx="109728" cy="109728"/>
           </a:xfrm>
           <a:prstGeom prst="ellipse">
             <a:avLst/>
@@ -1738,8 +1735,8 @@
         </p:nvSpPr>
         <p:spPr>
           <a:xfrm>
-            <a:off x="3070555" y="6105449"/>
-            <a:ext cx="1053572" cy="219456"/>
+            <a:off x="2919679" y="5749747"/>
+            <a:ext cx="777240" cy="245974"/>
           </a:xfrm>
           <a:prstGeom prst="rect">
             <a:avLst/>
@@ -1779,8 +1776,8 @@
         </p:nvSpPr>
         <p:spPr>
           <a:xfrm>
-            <a:off x="3070555" y="6324905"/>
-            <a:ext cx="1053572" cy="237744"/>
+            <a:off x="2926080" y="5934456"/>
+            <a:ext cx="960120" cy="164592"/>
           </a:xfrm>
           <a:prstGeom prst="rect">
             <a:avLst/>
@@ -1820,8 +1817,8 @@
         </p:nvSpPr>
         <p:spPr>
           <a:xfrm>
-            <a:off x="4178991" y="6196889"/>
-            <a:ext cx="118872" cy="118872"/>
+            <a:off x="4078224" y="5806440"/>
+            <a:ext cx="109728" cy="109728"/>
           </a:xfrm>
           <a:prstGeom prst="ellipse">
             <a:avLst/>
@@ -1845,8 +1842,8 @@
         </p:nvSpPr>
         <p:spPr>
           <a:xfrm>
-            <a:off x="4325295" y="6105449"/>
-            <a:ext cx="1053572" cy="219456"/>
+            <a:off x="4227271" y="5749747"/>
+            <a:ext cx="777240" cy="245974"/>
           </a:xfrm>
           <a:prstGeom prst="rect">
             <a:avLst/>
@@ -1886,8 +1883,8 @@
         </p:nvSpPr>
         <p:spPr>
           <a:xfrm>
-            <a:off x="4325295" y="6324905"/>
-            <a:ext cx="1053572" cy="237744"/>
+            <a:off x="4233672" y="5934456"/>
+            <a:ext cx="960120" cy="164592"/>
           </a:xfrm>
           <a:prstGeom prst="rect">
             <a:avLst/>
@@ -1927,8 +1924,8 @@
         </p:nvSpPr>
         <p:spPr>
           <a:xfrm>
-            <a:off x="5433731" y="6196889"/>
-            <a:ext cx="118872" cy="118872"/>
+            <a:off x="5437022" y="5806440"/>
+            <a:ext cx="109728" cy="109728"/>
           </a:xfrm>
           <a:prstGeom prst="ellipse">
             <a:avLst/>
@@ -1952,8 +1949,8 @@
         </p:nvSpPr>
         <p:spPr>
           <a:xfrm>
-            <a:off x="5580035" y="6105449"/>
-            <a:ext cx="1053572" cy="219456"/>
+            <a:off x="5586070" y="5749747"/>
+            <a:ext cx="777240" cy="245974"/>
           </a:xfrm>
           <a:prstGeom prst="rect">
             <a:avLst/>
@@ -1993,8 +1990,8 @@
         </p:nvSpPr>
         <p:spPr>
           <a:xfrm>
-            <a:off x="5580035" y="6324905"/>
-            <a:ext cx="1053572" cy="237744"/>
+            <a:off x="5592470" y="5934456"/>
+            <a:ext cx="960120" cy="164592"/>
           </a:xfrm>
           <a:prstGeom prst="rect">
             <a:avLst/>
@@ -2034,8 +2031,8 @@
         </p:nvSpPr>
         <p:spPr>
           <a:xfrm>
-            <a:off x="6688470" y="6196889"/>
-            <a:ext cx="118872" cy="118872"/>
+            <a:off x="6765646" y="5806440"/>
+            <a:ext cx="109728" cy="109728"/>
           </a:xfrm>
           <a:prstGeom prst="ellipse">
             <a:avLst/>
@@ -2059,8 +2056,8 @@
         </p:nvSpPr>
         <p:spPr>
           <a:xfrm>
-            <a:off x="6834774" y="6105449"/>
-            <a:ext cx="1053572" cy="219456"/>
+            <a:off x="6914693" y="5749747"/>
+            <a:ext cx="777240" cy="245974"/>
           </a:xfrm>
           <a:prstGeom prst="rect">
             <a:avLst/>
@@ -2100,8 +2097,8 @@
         </p:nvSpPr>
         <p:spPr>
           <a:xfrm>
-            <a:off x="6834774" y="6324905"/>
-            <a:ext cx="1053572" cy="237744"/>
+            <a:off x="6921094" y="5934456"/>
+            <a:ext cx="960120" cy="164592"/>
           </a:xfrm>
           <a:prstGeom prst="rect">
             <a:avLst/>
@@ -2141,8 +2138,8 @@
         </p:nvSpPr>
         <p:spPr>
           <a:xfrm>
-            <a:off x="7943210" y="6196889"/>
-            <a:ext cx="118872" cy="118872"/>
+            <a:off x="8108899" y="5806440"/>
+            <a:ext cx="109728" cy="109728"/>
           </a:xfrm>
           <a:prstGeom prst="ellipse">
             <a:avLst/>
@@ -2166,8 +2163,8 @@
         </p:nvSpPr>
         <p:spPr>
           <a:xfrm>
-            <a:off x="8089514" y="6105449"/>
-            <a:ext cx="1053572" cy="219456"/>
+            <a:off x="8257946" y="5749747"/>
+            <a:ext cx="777240" cy="245974"/>
           </a:xfrm>
           <a:prstGeom prst="rect">
             <a:avLst/>
@@ -2207,8 +2204,8 @@
         </p:nvSpPr>
         <p:spPr>
           <a:xfrm>
-            <a:off x="8089514" y="6324905"/>
-            <a:ext cx="1053572" cy="237744"/>
+            <a:off x="8264347" y="5934456"/>
+            <a:ext cx="960120" cy="164592"/>
           </a:xfrm>
           <a:prstGeom prst="rect">
             <a:avLst/>
@@ -2499,7 +2496,7 @@
         </p:nvSpPr>
         <p:spPr>
           <a:xfrm>
-            <a:off x="3739896" y="2020824"/>
+            <a:off x="4644238" y="2020824"/>
             <a:ext cx="9144" cy="548640"/>
           </a:xfrm>
           <a:prstGeom prst="rect">
@@ -2532,9 +2529,6 @@
               <a:gd name="adj" fmla="val 18711"/>
             </a:avLst>
           </a:prstGeom>
-          <a:solidFill>
-            <a:srgbClr val="2E4FD6"/>
-          </a:solidFill>
           <a:ln w="15875">
             <a:solidFill>
               <a:srgbClr val="FFFFFF"/>
@@ -2575,8 +2569,8 @@
         </p:nvSpPr>
         <p:spPr>
           <a:xfrm>
-            <a:off x="3749040" y="1929384"/>
-            <a:ext cx="2103120" cy="879653"/>
+            <a:off x="2723998" y="1929384"/>
+            <a:ext cx="1874520" cy="879653"/>
           </a:xfrm>
           <a:prstGeom prst="rect">
             <a:avLst/>
@@ -2590,7 +2584,7 @@
           </a:bodyPr>
           <a:lstStyle/>
           <a:p>
-            <a:pPr indent="0" marL="0">
+            <a:pPr algn="l" indent="0" marL="0">
               <a:buNone/>
             </a:pPr>
             <a:r>
@@ -2616,15 +2610,137 @@
         </p:nvSpPr>
         <p:spPr>
           <a:xfrm>
-            <a:off x="3739896" y="2186330"/>
-            <a:ext cx="4626864" cy="365760"/>
-          </a:xfrm>
-          <a:prstGeom prst="rect">
-            <a:avLst/>
-          </a:prstGeom>
-          <a:solidFill>
-            <a:srgbClr val="1226AA"/>
-          </a:solidFill>
+            <a:off x="4708246" y="2186330"/>
+            <a:ext cx="3977640" cy="82296"/>
+          </a:xfrm>
+          <a:prstGeom prst="rect">
+            <a:avLst/>
+          </a:prstGeom>
+          <a:solidFill>
+            <a:srgbClr val="4E7BE8"/>
+          </a:solidFill>
+          <a:ln w="12700">
+            <a:solidFill>
+              <a:srgbClr val="4E7BE8"/>
+            </a:solidFill>
+            <a:prstDash val="solid"/>
+          </a:ln>
+        </p:spPr>
+      </p:sp>
+      <p:sp>
+        <p:nvSpPr>
+          <p:cNvPr id="14" name="Shape 8"/>
+          <p:cNvSpPr/>
+          <p:nvPr/>
+        </p:nvSpPr>
+        <p:spPr>
+          <a:xfrm>
+            <a:off x="4708246" y="2259482"/>
+            <a:ext cx="3977640" cy="82296"/>
+          </a:xfrm>
+          <a:prstGeom prst="rect">
+            <a:avLst/>
+          </a:prstGeom>
+          <a:solidFill>
+            <a:srgbClr val="3D68DF"/>
+          </a:solidFill>
+          <a:ln w="12700">
+            <a:solidFill>
+              <a:srgbClr val="3D68DF"/>
+            </a:solidFill>
+            <a:prstDash val="solid"/>
+          </a:ln>
+        </p:spPr>
+      </p:sp>
+      <p:sp>
+        <p:nvSpPr>
+          <p:cNvPr id="15" name="Shape 9"/>
+          <p:cNvSpPr/>
+          <p:nvPr/>
+        </p:nvSpPr>
+        <p:spPr>
+          <a:xfrm>
+            <a:off x="4708246" y="2332634"/>
+            <a:ext cx="3977640" cy="82296"/>
+          </a:xfrm>
+          <a:prstGeom prst="rect">
+            <a:avLst/>
+          </a:prstGeom>
+          <a:solidFill>
+            <a:srgbClr val="2E56D4"/>
+          </a:solidFill>
+          <a:ln w="12700">
+            <a:solidFill>
+              <a:srgbClr val="2E56D4"/>
+            </a:solidFill>
+            <a:prstDash val="solid"/>
+          </a:ln>
+        </p:spPr>
+      </p:sp>
+      <p:sp>
+        <p:nvSpPr>
+          <p:cNvPr id="16" name="Shape 10"/>
+          <p:cNvSpPr/>
+          <p:nvPr/>
+        </p:nvSpPr>
+        <p:spPr>
+          <a:xfrm>
+            <a:off x="4708246" y="2405786"/>
+            <a:ext cx="3977640" cy="82296"/>
+          </a:xfrm>
+          <a:prstGeom prst="rect">
+            <a:avLst/>
+          </a:prstGeom>
+          <a:solidFill>
+            <a:srgbClr val="2348C4"/>
+          </a:solidFill>
+          <a:ln w="12700">
+            <a:solidFill>
+              <a:srgbClr val="2348C4"/>
+            </a:solidFill>
+            <a:prstDash val="solid"/>
+          </a:ln>
+        </p:spPr>
+      </p:sp>
+      <p:sp>
+        <p:nvSpPr>
+          <p:cNvPr id="17" name="Shape 11"/>
+          <p:cNvSpPr/>
+          <p:nvPr/>
+        </p:nvSpPr>
+        <p:spPr>
+          <a:xfrm>
+            <a:off x="4708246" y="2478938"/>
+            <a:ext cx="3977640" cy="82296"/>
+          </a:xfrm>
+          <a:prstGeom prst="rect">
+            <a:avLst/>
+          </a:prstGeom>
+          <a:solidFill>
+            <a:srgbClr val="1B3AAE"/>
+          </a:solidFill>
+          <a:ln w="12700">
+            <a:solidFill>
+              <a:srgbClr val="1B3AAE"/>
+            </a:solidFill>
+            <a:prstDash val="solid"/>
+          </a:ln>
+        </p:spPr>
+      </p:sp>
+      <p:sp>
+        <p:nvSpPr>
+          <p:cNvPr id="18" name="Shape 12"/>
+          <p:cNvSpPr/>
+          <p:nvPr/>
+        </p:nvSpPr>
+        <p:spPr>
+          <a:xfrm>
+            <a:off x="4708246" y="2186330"/>
+            <a:ext cx="3977640" cy="365760"/>
+          </a:xfrm>
+          <a:prstGeom prst="rect">
+            <a:avLst/>
+          </a:prstGeom>
           <a:ln w="12700">
             <a:solidFill>
               <a:srgbClr val="FFFFFF"/>
@@ -2635,14 +2751,14 @@
       </p:sp>
       <p:sp>
         <p:nvSpPr>
-          <p:cNvPr id="14" name="Text 8"/>
-          <p:cNvSpPr/>
-          <p:nvPr/>
-        </p:nvSpPr>
-        <p:spPr>
-          <a:xfrm>
-            <a:off x="3739896" y="2186330"/>
-            <a:ext cx="4535424" cy="365760"/>
+          <p:cNvPr id="19" name="Text 13"/>
+          <p:cNvSpPr/>
+          <p:nvPr/>
+        </p:nvSpPr>
+        <p:spPr>
+          <a:xfrm>
+            <a:off x="4708246" y="2186330"/>
+            <a:ext cx="3886200" cy="365760"/>
           </a:xfrm>
           <a:prstGeom prst="rect">
             <a:avLst/>
@@ -2674,14 +2790,14 @@
       </p:sp>
       <p:sp>
         <p:nvSpPr>
-          <p:cNvPr id="15" name="Shape 9"/>
-          <p:cNvSpPr/>
-          <p:nvPr/>
-        </p:nvSpPr>
-        <p:spPr>
-          <a:xfrm>
-            <a:off x="8942832" y="2131466"/>
-            <a:ext cx="1207008" cy="475488"/>
+          <p:cNvPr id="20" name="Shape 14"/>
+          <p:cNvSpPr/>
+          <p:nvPr/>
+        </p:nvSpPr>
+        <p:spPr>
+          <a:xfrm>
+            <a:off x="8813902" y="2131466"/>
+            <a:ext cx="1188720" cy="475488"/>
           </a:xfrm>
           <a:prstGeom prst="roundRect">
             <a:avLst>
@@ -2701,14 +2817,14 @@
       </p:sp>
       <p:sp>
         <p:nvSpPr>
-          <p:cNvPr id="16" name="Text 10"/>
-          <p:cNvSpPr/>
-          <p:nvPr/>
-        </p:nvSpPr>
-        <p:spPr>
-          <a:xfrm>
-            <a:off x="8942832" y="2131466"/>
-            <a:ext cx="1207008" cy="475488"/>
+          <p:cNvPr id="21" name="Text 15"/>
+          <p:cNvSpPr/>
+          <p:nvPr/>
+        </p:nvSpPr>
+        <p:spPr>
+          <a:xfrm>
+            <a:off x="8813902" y="2131466"/>
+            <a:ext cx="1188720" cy="475488"/>
           </a:xfrm>
           <a:prstGeom prst="rect">
             <a:avLst/>
@@ -2742,18 +2858,18 @@
       </p:sp>
       <p:sp>
         <p:nvSpPr>
-          <p:cNvPr id="17" name="Shape 11"/>
-          <p:cNvSpPr/>
-          <p:nvPr/>
-        </p:nvSpPr>
-        <p:spPr>
-          <a:xfrm>
-            <a:off x="2832811" y="5922569"/>
-            <a:ext cx="6273698" cy="905256"/>
+          <p:cNvPr id="22" name="Shape 16"/>
+          <p:cNvSpPr/>
+          <p:nvPr/>
+        </p:nvSpPr>
+        <p:spPr>
+          <a:xfrm>
+            <a:off x="2606040" y="5605272"/>
+            <a:ext cx="6273698" cy="658368"/>
           </a:xfrm>
           <a:prstGeom prst="roundRect">
             <a:avLst>
-              <a:gd name="adj" fmla="val 6061"/>
+              <a:gd name="adj" fmla="val 8333"/>
             </a:avLst>
           </a:prstGeom>
           <a:solidFill>
@@ -2769,26 +2885,23 @@
       </p:sp>
       <p:sp>
         <p:nvSpPr>
-          <p:cNvPr id="18" name="Shape 12"/>
-          <p:cNvSpPr/>
-          <p:nvPr/>
-        </p:nvSpPr>
-        <p:spPr>
-          <a:xfrm>
-            <a:off x="5100980" y="5748833"/>
-            <a:ext cx="1737360" cy="274320"/>
+          <p:cNvPr id="23" name="Shape 17"/>
+          <p:cNvSpPr/>
+          <p:nvPr/>
+        </p:nvSpPr>
+        <p:spPr>
+          <a:xfrm>
+            <a:off x="4754880" y="5358384"/>
+            <a:ext cx="1828800" cy="310896"/>
           </a:xfrm>
           <a:prstGeom prst="roundRect">
             <a:avLst>
-              <a:gd name="adj" fmla="val 33333"/>
+              <a:gd name="adj" fmla="val 52941"/>
             </a:avLst>
           </a:prstGeom>
-          <a:solidFill>
-            <a:srgbClr val="2E4FD6"/>
-          </a:solidFill>
           <a:ln w="12700">
             <a:solidFill>
-              <a:srgbClr val="2E4FD6"/>
+              <a:srgbClr val="FFFFFF"/>
             </a:solidFill>
             <a:prstDash val="solid"/>
           </a:ln>
@@ -2796,14 +2909,14 @@
       </p:sp>
       <p:sp>
         <p:nvSpPr>
-          <p:cNvPr id="19" name="Text 13"/>
-          <p:cNvSpPr/>
-          <p:nvPr/>
-        </p:nvSpPr>
-        <p:spPr>
-          <a:xfrm>
-            <a:off x="5100980" y="5748833"/>
-            <a:ext cx="1737360" cy="274320"/>
+          <p:cNvPr id="24" name="Text 18"/>
+          <p:cNvSpPr/>
+          <p:nvPr/>
+        </p:nvSpPr>
+        <p:spPr>
+          <a:xfrm>
+            <a:off x="4754880" y="5385816"/>
+            <a:ext cx="1828800" cy="228600"/>
           </a:xfrm>
           <a:prstGeom prst="rect">
             <a:avLst/>
@@ -2835,14 +2948,14 @@
       </p:sp>
       <p:sp>
         <p:nvSpPr>
-          <p:cNvPr id="20" name="Shape 14"/>
-          <p:cNvSpPr/>
-          <p:nvPr/>
-        </p:nvSpPr>
-        <p:spPr>
-          <a:xfrm>
-            <a:off x="2924251" y="6196889"/>
-            <a:ext cx="118872" cy="118872"/>
+          <p:cNvPr id="25" name="Shape 19"/>
+          <p:cNvSpPr/>
+          <p:nvPr/>
+        </p:nvSpPr>
+        <p:spPr>
+          <a:xfrm>
+            <a:off x="2770632" y="5806440"/>
+            <a:ext cx="109728" cy="109728"/>
           </a:xfrm>
           <a:prstGeom prst="ellipse">
             <a:avLst/>
@@ -2860,14 +2973,14 @@
       </p:sp>
       <p:sp>
         <p:nvSpPr>
-          <p:cNvPr id="21" name="Text 15"/>
-          <p:cNvSpPr/>
-          <p:nvPr/>
-        </p:nvSpPr>
-        <p:spPr>
-          <a:xfrm>
-            <a:off x="3070555" y="6105449"/>
-            <a:ext cx="1053572" cy="219456"/>
+          <p:cNvPr id="26" name="Text 20"/>
+          <p:cNvSpPr/>
+          <p:nvPr/>
+        </p:nvSpPr>
+        <p:spPr>
+          <a:xfrm>
+            <a:off x="2919679" y="5749747"/>
+            <a:ext cx="777240" cy="245974"/>
           </a:xfrm>
           <a:prstGeom prst="rect">
             <a:avLst/>
@@ -2901,14 +3014,14 @@
       </p:sp>
       <p:sp>
         <p:nvSpPr>
-          <p:cNvPr id="22" name="Text 16"/>
-          <p:cNvSpPr/>
-          <p:nvPr/>
-        </p:nvSpPr>
-        <p:spPr>
-          <a:xfrm>
-            <a:off x="3070555" y="6324905"/>
-            <a:ext cx="1053572" cy="237744"/>
+          <p:cNvPr id="27" name="Text 21"/>
+          <p:cNvSpPr/>
+          <p:nvPr/>
+        </p:nvSpPr>
+        <p:spPr>
+          <a:xfrm>
+            <a:off x="2926080" y="5934456"/>
+            <a:ext cx="960120" cy="164592"/>
           </a:xfrm>
           <a:prstGeom prst="rect">
             <a:avLst/>
@@ -2942,14 +3055,14 @@
       </p:sp>
       <p:sp>
         <p:nvSpPr>
-          <p:cNvPr id="23" name="Shape 17"/>
-          <p:cNvSpPr/>
-          <p:nvPr/>
-        </p:nvSpPr>
-        <p:spPr>
-          <a:xfrm>
-            <a:off x="4178991" y="6196889"/>
-            <a:ext cx="118872" cy="118872"/>
+          <p:cNvPr id="28" name="Shape 22"/>
+          <p:cNvSpPr/>
+          <p:nvPr/>
+        </p:nvSpPr>
+        <p:spPr>
+          <a:xfrm>
+            <a:off x="4078224" y="5806440"/>
+            <a:ext cx="109728" cy="109728"/>
           </a:xfrm>
           <a:prstGeom prst="ellipse">
             <a:avLst/>
@@ -2967,14 +3080,14 @@
       </p:sp>
       <p:sp>
         <p:nvSpPr>
-          <p:cNvPr id="24" name="Text 18"/>
-          <p:cNvSpPr/>
-          <p:nvPr/>
-        </p:nvSpPr>
-        <p:spPr>
-          <a:xfrm>
-            <a:off x="4325295" y="6105449"/>
-            <a:ext cx="1053572" cy="219456"/>
+          <p:cNvPr id="29" name="Text 23"/>
+          <p:cNvSpPr/>
+          <p:nvPr/>
+        </p:nvSpPr>
+        <p:spPr>
+          <a:xfrm>
+            <a:off x="4227271" y="5749747"/>
+            <a:ext cx="777240" cy="245974"/>
           </a:xfrm>
           <a:prstGeom prst="rect">
             <a:avLst/>
@@ -3008,14 +3121,14 @@
       </p:sp>
       <p:sp>
         <p:nvSpPr>
-          <p:cNvPr id="25" name="Text 19"/>
-          <p:cNvSpPr/>
-          <p:nvPr/>
-        </p:nvSpPr>
-        <p:spPr>
-          <a:xfrm>
-            <a:off x="4325295" y="6324905"/>
-            <a:ext cx="1053572" cy="237744"/>
+          <p:cNvPr id="30" name="Text 24"/>
+          <p:cNvSpPr/>
+          <p:nvPr/>
+        </p:nvSpPr>
+        <p:spPr>
+          <a:xfrm>
+            <a:off x="4233672" y="5934456"/>
+            <a:ext cx="960120" cy="164592"/>
           </a:xfrm>
           <a:prstGeom prst="rect">
             <a:avLst/>
@@ -3049,14 +3162,14 @@
       </p:sp>
       <p:sp>
         <p:nvSpPr>
-          <p:cNvPr id="26" name="Shape 20"/>
-          <p:cNvSpPr/>
-          <p:nvPr/>
-        </p:nvSpPr>
-        <p:spPr>
-          <a:xfrm>
-            <a:off x="5433731" y="6196889"/>
-            <a:ext cx="118872" cy="118872"/>
+          <p:cNvPr id="31" name="Shape 25"/>
+          <p:cNvSpPr/>
+          <p:nvPr/>
+        </p:nvSpPr>
+        <p:spPr>
+          <a:xfrm>
+            <a:off x="5437022" y="5806440"/>
+            <a:ext cx="109728" cy="109728"/>
           </a:xfrm>
           <a:prstGeom prst="ellipse">
             <a:avLst/>
@@ -3074,14 +3187,14 @@
       </p:sp>
       <p:sp>
         <p:nvSpPr>
-          <p:cNvPr id="27" name="Text 21"/>
-          <p:cNvSpPr/>
-          <p:nvPr/>
-        </p:nvSpPr>
-        <p:spPr>
-          <a:xfrm>
-            <a:off x="5580035" y="6105449"/>
-            <a:ext cx="1053572" cy="219456"/>
+          <p:cNvPr id="32" name="Text 26"/>
+          <p:cNvSpPr/>
+          <p:nvPr/>
+        </p:nvSpPr>
+        <p:spPr>
+          <a:xfrm>
+            <a:off x="5586070" y="5749747"/>
+            <a:ext cx="777240" cy="245974"/>
           </a:xfrm>
           <a:prstGeom prst="rect">
             <a:avLst/>
@@ -3115,14 +3228,14 @@
       </p:sp>
       <p:sp>
         <p:nvSpPr>
-          <p:cNvPr id="28" name="Text 22"/>
-          <p:cNvSpPr/>
-          <p:nvPr/>
-        </p:nvSpPr>
-        <p:spPr>
-          <a:xfrm>
-            <a:off x="5580035" y="6324905"/>
-            <a:ext cx="1053572" cy="237744"/>
+          <p:cNvPr id="33" name="Text 27"/>
+          <p:cNvSpPr/>
+          <p:nvPr/>
+        </p:nvSpPr>
+        <p:spPr>
+          <a:xfrm>
+            <a:off x="5592470" y="5934456"/>
+            <a:ext cx="960120" cy="164592"/>
           </a:xfrm>
           <a:prstGeom prst="rect">
             <a:avLst/>
@@ -3156,14 +3269,14 @@
       </p:sp>
       <p:sp>
         <p:nvSpPr>
-          <p:cNvPr id="29" name="Shape 23"/>
-          <p:cNvSpPr/>
-          <p:nvPr/>
-        </p:nvSpPr>
-        <p:spPr>
-          <a:xfrm>
-            <a:off x="6688470" y="6196889"/>
-            <a:ext cx="118872" cy="118872"/>
+          <p:cNvPr id="34" name="Shape 28"/>
+          <p:cNvSpPr/>
+          <p:nvPr/>
+        </p:nvSpPr>
+        <p:spPr>
+          <a:xfrm>
+            <a:off x="6765646" y="5806440"/>
+            <a:ext cx="109728" cy="109728"/>
           </a:xfrm>
           <a:prstGeom prst="ellipse">
             <a:avLst/>
@@ -3181,14 +3294,14 @@
       </p:sp>
       <p:sp>
         <p:nvSpPr>
-          <p:cNvPr id="30" name="Text 24"/>
-          <p:cNvSpPr/>
-          <p:nvPr/>
-        </p:nvSpPr>
-        <p:spPr>
-          <a:xfrm>
-            <a:off x="6834774" y="6105449"/>
-            <a:ext cx="1053572" cy="219456"/>
+          <p:cNvPr id="35" name="Text 29"/>
+          <p:cNvSpPr/>
+          <p:nvPr/>
+        </p:nvSpPr>
+        <p:spPr>
+          <a:xfrm>
+            <a:off x="6914693" y="5749747"/>
+            <a:ext cx="777240" cy="245974"/>
           </a:xfrm>
           <a:prstGeom prst="rect">
             <a:avLst/>
@@ -3222,14 +3335,14 @@
       </p:sp>
       <p:sp>
         <p:nvSpPr>
-          <p:cNvPr id="31" name="Text 25"/>
-          <p:cNvSpPr/>
-          <p:nvPr/>
-        </p:nvSpPr>
-        <p:spPr>
-          <a:xfrm>
-            <a:off x="6834774" y="6324905"/>
-            <a:ext cx="1053572" cy="237744"/>
+          <p:cNvPr id="36" name="Text 30"/>
+          <p:cNvSpPr/>
+          <p:nvPr/>
+        </p:nvSpPr>
+        <p:spPr>
+          <a:xfrm>
+            <a:off x="6921094" y="5934456"/>
+            <a:ext cx="960120" cy="164592"/>
           </a:xfrm>
           <a:prstGeom prst="rect">
             <a:avLst/>
@@ -3263,14 +3376,14 @@
       </p:sp>
       <p:sp>
         <p:nvSpPr>
-          <p:cNvPr id="32" name="Shape 26"/>
-          <p:cNvSpPr/>
-          <p:nvPr/>
-        </p:nvSpPr>
-        <p:spPr>
-          <a:xfrm>
-            <a:off x="7943210" y="6196889"/>
-            <a:ext cx="118872" cy="118872"/>
+          <p:cNvPr id="37" name="Shape 31"/>
+          <p:cNvSpPr/>
+          <p:nvPr/>
+        </p:nvSpPr>
+        <p:spPr>
+          <a:xfrm>
+            <a:off x="8108899" y="5806440"/>
+            <a:ext cx="109728" cy="109728"/>
           </a:xfrm>
           <a:prstGeom prst="ellipse">
             <a:avLst/>
@@ -3288,14 +3401,14 @@
       </p:sp>
       <p:sp>
         <p:nvSpPr>
-          <p:cNvPr id="33" name="Text 27"/>
-          <p:cNvSpPr/>
-          <p:nvPr/>
-        </p:nvSpPr>
-        <p:spPr>
-          <a:xfrm>
-            <a:off x="8089514" y="6105449"/>
-            <a:ext cx="1053572" cy="219456"/>
+          <p:cNvPr id="38" name="Text 32"/>
+          <p:cNvSpPr/>
+          <p:nvPr/>
+        </p:nvSpPr>
+        <p:spPr>
+          <a:xfrm>
+            <a:off x="8257946" y="5749747"/>
+            <a:ext cx="777240" cy="245974"/>
           </a:xfrm>
           <a:prstGeom prst="rect">
             <a:avLst/>
@@ -3329,14 +3442,14 @@
       </p:sp>
       <p:sp>
         <p:nvSpPr>
-          <p:cNvPr id="34" name="Text 28"/>
-          <p:cNvSpPr/>
-          <p:nvPr/>
-        </p:nvSpPr>
-        <p:spPr>
-          <a:xfrm>
-            <a:off x="8089514" y="6324905"/>
-            <a:ext cx="1053572" cy="237744"/>
+          <p:cNvPr id="39" name="Text 33"/>
+          <p:cNvSpPr/>
+          <p:nvPr/>
+        </p:nvSpPr>
+        <p:spPr>
+          <a:xfrm>
+            <a:off x="8264347" y="5934456"/>
+            <a:ext cx="960120" cy="164592"/>
           </a:xfrm>
           <a:prstGeom prst="rect">
             <a:avLst/>

--- a/ranking-nyata.pptx
+++ b/ranking-nyata.pptx
@@ -1128,7 +1128,7 @@
               <a:buNone/>
             </a:pPr>
             <a:r>
-              <a:rPr lang="en-US" sz="2000" b="1" dirty="0">
+              <a:rPr lang="en-US" sz="2000" dirty="0">
                 <a:solidFill>
                   <a:srgbClr val="FFFFFF"/>
                 </a:solidFill>
@@ -1620,7 +1620,7 @@
         </p:nvSpPr>
         <p:spPr>
           <a:xfrm>
-            <a:off x="2606040" y="5605272"/>
+            <a:off x="2606040" y="6172200"/>
             <a:ext cx="6273698" cy="658368"/>
           </a:xfrm>
           <a:prstGeom prst="roundRect">
@@ -1647,7 +1647,7 @@
         </p:nvSpPr>
         <p:spPr>
           <a:xfrm>
-            <a:off x="4754880" y="5358384"/>
+            <a:off x="4754880" y="5925312"/>
             <a:ext cx="1828800" cy="310896"/>
           </a:xfrm>
           <a:prstGeom prst="roundRect">
@@ -1671,7 +1671,7 @@
         </p:nvSpPr>
         <p:spPr>
           <a:xfrm>
-            <a:off x="4754880" y="5385816"/>
+            <a:off x="4754880" y="5952744"/>
             <a:ext cx="1828800" cy="228600"/>
           </a:xfrm>
           <a:prstGeom prst="rect">
@@ -1710,7 +1710,7 @@
         </p:nvSpPr>
         <p:spPr>
           <a:xfrm>
-            <a:off x="2770632" y="5806440"/>
+            <a:off x="2770632" y="6373368"/>
             <a:ext cx="109728" cy="109728"/>
           </a:xfrm>
           <a:prstGeom prst="ellipse">
@@ -1735,7 +1735,7 @@
         </p:nvSpPr>
         <p:spPr>
           <a:xfrm>
-            <a:off x="2919679" y="5749747"/>
+            <a:off x="2919679" y="6316675"/>
             <a:ext cx="777240" cy="245974"/>
           </a:xfrm>
           <a:prstGeom prst="rect">
@@ -1776,7 +1776,7 @@
         </p:nvSpPr>
         <p:spPr>
           <a:xfrm>
-            <a:off x="2926080" y="5934456"/>
+            <a:off x="2926080" y="6501384"/>
             <a:ext cx="960120" cy="164592"/>
           </a:xfrm>
           <a:prstGeom prst="rect">
@@ -1817,7 +1817,7 @@
         </p:nvSpPr>
         <p:spPr>
           <a:xfrm>
-            <a:off x="4078224" y="5806440"/>
+            <a:off x="4078224" y="6373368"/>
             <a:ext cx="109728" cy="109728"/>
           </a:xfrm>
           <a:prstGeom prst="ellipse">
@@ -1842,7 +1842,7 @@
         </p:nvSpPr>
         <p:spPr>
           <a:xfrm>
-            <a:off x="4227271" y="5749747"/>
+            <a:off x="4227271" y="6316675"/>
             <a:ext cx="777240" cy="245974"/>
           </a:xfrm>
           <a:prstGeom prst="rect">
@@ -1883,7 +1883,7 @@
         </p:nvSpPr>
         <p:spPr>
           <a:xfrm>
-            <a:off x="4233672" y="5934456"/>
+            <a:off x="4233672" y="6501384"/>
             <a:ext cx="960120" cy="164592"/>
           </a:xfrm>
           <a:prstGeom prst="rect">
@@ -1924,7 +1924,7 @@
         </p:nvSpPr>
         <p:spPr>
           <a:xfrm>
-            <a:off x="5437022" y="5806440"/>
+            <a:off x="5437022" y="6373368"/>
             <a:ext cx="109728" cy="109728"/>
           </a:xfrm>
           <a:prstGeom prst="ellipse">
@@ -1949,7 +1949,7 @@
         </p:nvSpPr>
         <p:spPr>
           <a:xfrm>
-            <a:off x="5586070" y="5749747"/>
+            <a:off x="5586070" y="6316675"/>
             <a:ext cx="777240" cy="245974"/>
           </a:xfrm>
           <a:prstGeom prst="rect">
@@ -1990,7 +1990,7 @@
         </p:nvSpPr>
         <p:spPr>
           <a:xfrm>
-            <a:off x="5592470" y="5934456"/>
+            <a:off x="5592470" y="6501384"/>
             <a:ext cx="960120" cy="164592"/>
           </a:xfrm>
           <a:prstGeom prst="rect">
@@ -2031,7 +2031,7 @@
         </p:nvSpPr>
         <p:spPr>
           <a:xfrm>
-            <a:off x="6765646" y="5806440"/>
+            <a:off x="6765646" y="6373368"/>
             <a:ext cx="109728" cy="109728"/>
           </a:xfrm>
           <a:prstGeom prst="ellipse">
@@ -2056,7 +2056,7 @@
         </p:nvSpPr>
         <p:spPr>
           <a:xfrm>
-            <a:off x="6914693" y="5749747"/>
+            <a:off x="6914693" y="6316675"/>
             <a:ext cx="777240" cy="245974"/>
           </a:xfrm>
           <a:prstGeom prst="rect">
@@ -2097,7 +2097,7 @@
         </p:nvSpPr>
         <p:spPr>
           <a:xfrm>
-            <a:off x="6921094" y="5934456"/>
+            <a:off x="6921094" y="6501384"/>
             <a:ext cx="960120" cy="164592"/>
           </a:xfrm>
           <a:prstGeom prst="rect">
@@ -2138,7 +2138,7 @@
         </p:nvSpPr>
         <p:spPr>
           <a:xfrm>
-            <a:off x="8108899" y="5806440"/>
+            <a:off x="8108899" y="6373368"/>
             <a:ext cx="109728" cy="109728"/>
           </a:xfrm>
           <a:prstGeom prst="ellipse">
@@ -2163,7 +2163,7 @@
         </p:nvSpPr>
         <p:spPr>
           <a:xfrm>
-            <a:off x="8257946" y="5749747"/>
+            <a:off x="8257946" y="6316675"/>
             <a:ext cx="777240" cy="245974"/>
           </a:xfrm>
           <a:prstGeom prst="rect">
@@ -2204,7 +2204,7 @@
         </p:nvSpPr>
         <p:spPr>
           <a:xfrm>
-            <a:off x="8264347" y="5934456"/>
+            <a:off x="8264347" y="6501384"/>
             <a:ext cx="960120" cy="164592"/>
           </a:xfrm>
           <a:prstGeom prst="rect">
@@ -2433,7 +2433,7 @@
               <a:buNone/>
             </a:pPr>
             <a:r>
-              <a:rPr lang="en-US" sz="2000" b="1" dirty="0">
+              <a:rPr lang="en-US" sz="2000" dirty="0">
                 <a:solidFill>
                   <a:srgbClr val="FFFFFF"/>
                 </a:solidFill>
@@ -2864,7 +2864,7 @@
         </p:nvSpPr>
         <p:spPr>
           <a:xfrm>
-            <a:off x="2606040" y="5605272"/>
+            <a:off x="2606040" y="6172200"/>
             <a:ext cx="6273698" cy="658368"/>
           </a:xfrm>
           <a:prstGeom prst="roundRect">
@@ -2891,7 +2891,7 @@
         </p:nvSpPr>
         <p:spPr>
           <a:xfrm>
-            <a:off x="4754880" y="5358384"/>
+            <a:off x="4754880" y="5925312"/>
             <a:ext cx="1828800" cy="310896"/>
           </a:xfrm>
           <a:prstGeom prst="roundRect">
@@ -2915,7 +2915,7 @@
         </p:nvSpPr>
         <p:spPr>
           <a:xfrm>
-            <a:off x="4754880" y="5385816"/>
+            <a:off x="4754880" y="5952744"/>
             <a:ext cx="1828800" cy="228600"/>
           </a:xfrm>
           <a:prstGeom prst="rect">
@@ -2954,7 +2954,7 @@
         </p:nvSpPr>
         <p:spPr>
           <a:xfrm>
-            <a:off x="2770632" y="5806440"/>
+            <a:off x="2770632" y="6373368"/>
             <a:ext cx="109728" cy="109728"/>
           </a:xfrm>
           <a:prstGeom prst="ellipse">
@@ -2979,7 +2979,7 @@
         </p:nvSpPr>
         <p:spPr>
           <a:xfrm>
-            <a:off x="2919679" y="5749747"/>
+            <a:off x="2919679" y="6316675"/>
             <a:ext cx="777240" cy="245974"/>
           </a:xfrm>
           <a:prstGeom prst="rect">
@@ -3020,7 +3020,7 @@
         </p:nvSpPr>
         <p:spPr>
           <a:xfrm>
-            <a:off x="2926080" y="5934456"/>
+            <a:off x="2926080" y="6501384"/>
             <a:ext cx="960120" cy="164592"/>
           </a:xfrm>
           <a:prstGeom prst="rect">
@@ -3061,7 +3061,7 @@
         </p:nvSpPr>
         <p:spPr>
           <a:xfrm>
-            <a:off x="4078224" y="5806440"/>
+            <a:off x="4078224" y="6373368"/>
             <a:ext cx="109728" cy="109728"/>
           </a:xfrm>
           <a:prstGeom prst="ellipse">
@@ -3086,7 +3086,7 @@
         </p:nvSpPr>
         <p:spPr>
           <a:xfrm>
-            <a:off x="4227271" y="5749747"/>
+            <a:off x="4227271" y="6316675"/>
             <a:ext cx="777240" cy="245974"/>
           </a:xfrm>
           <a:prstGeom prst="rect">
@@ -3127,7 +3127,7 @@
         </p:nvSpPr>
         <p:spPr>
           <a:xfrm>
-            <a:off x="4233672" y="5934456"/>
+            <a:off x="4233672" y="6501384"/>
             <a:ext cx="960120" cy="164592"/>
           </a:xfrm>
           <a:prstGeom prst="rect">
@@ -3168,7 +3168,7 @@
         </p:nvSpPr>
         <p:spPr>
           <a:xfrm>
-            <a:off x="5437022" y="5806440"/>
+            <a:off x="5437022" y="6373368"/>
             <a:ext cx="109728" cy="109728"/>
           </a:xfrm>
           <a:prstGeom prst="ellipse">
@@ -3193,7 +3193,7 @@
         </p:nvSpPr>
         <p:spPr>
           <a:xfrm>
-            <a:off x="5586070" y="5749747"/>
+            <a:off x="5586070" y="6316675"/>
             <a:ext cx="777240" cy="245974"/>
           </a:xfrm>
           <a:prstGeom prst="rect">
@@ -3234,7 +3234,7 @@
         </p:nvSpPr>
         <p:spPr>
           <a:xfrm>
-            <a:off x="5592470" y="5934456"/>
+            <a:off x="5592470" y="6501384"/>
             <a:ext cx="960120" cy="164592"/>
           </a:xfrm>
           <a:prstGeom prst="rect">
@@ -3275,7 +3275,7 @@
         </p:nvSpPr>
         <p:spPr>
           <a:xfrm>
-            <a:off x="6765646" y="5806440"/>
+            <a:off x="6765646" y="6373368"/>
             <a:ext cx="109728" cy="109728"/>
           </a:xfrm>
           <a:prstGeom prst="ellipse">
@@ -3300,7 +3300,7 @@
         </p:nvSpPr>
         <p:spPr>
           <a:xfrm>
-            <a:off x="6914693" y="5749747"/>
+            <a:off x="6914693" y="6316675"/>
             <a:ext cx="777240" cy="245974"/>
           </a:xfrm>
           <a:prstGeom prst="rect">
@@ -3341,7 +3341,7 @@
         </p:nvSpPr>
         <p:spPr>
           <a:xfrm>
-            <a:off x="6921094" y="5934456"/>
+            <a:off x="6921094" y="6501384"/>
             <a:ext cx="960120" cy="164592"/>
           </a:xfrm>
           <a:prstGeom prst="rect">
@@ -3382,7 +3382,7 @@
         </p:nvSpPr>
         <p:spPr>
           <a:xfrm>
-            <a:off x="8108899" y="5806440"/>
+            <a:off x="8108899" y="6373368"/>
             <a:ext cx="109728" cy="109728"/>
           </a:xfrm>
           <a:prstGeom prst="ellipse">
@@ -3407,7 +3407,7 @@
         </p:nvSpPr>
         <p:spPr>
           <a:xfrm>
-            <a:off x="8257946" y="5749747"/>
+            <a:off x="8257946" y="6316675"/>
             <a:ext cx="777240" cy="245974"/>
           </a:xfrm>
           <a:prstGeom prst="rect">
@@ -3448,7 +3448,7 @@
         </p:nvSpPr>
         <p:spPr>
           <a:xfrm>
-            <a:off x="8264347" y="5934456"/>
+            <a:off x="8264347" y="6501384"/>
             <a:ext cx="960120" cy="164592"/>
           </a:xfrm>
           <a:prstGeom prst="rect">

--- a/ranking-nyata.pptx
+++ b/ranking-nyata.pptx
@@ -2617,11 +2617,11 @@
             <a:avLst/>
           </a:prstGeom>
           <a:solidFill>
-            <a:srgbClr val="4E7BE8"/>
+            <a:srgbClr val="6E93F0"/>
           </a:solidFill>
           <a:ln w="12700">
             <a:solidFill>
-              <a:srgbClr val="4E7BE8"/>
+              <a:srgbClr val="6E93F0"/>
             </a:solidFill>
             <a:prstDash val="solid"/>
           </a:ln>
@@ -2642,11 +2642,11 @@
             <a:avLst/>
           </a:prstGeom>
           <a:solidFill>
-            <a:srgbClr val="3D68DF"/>
+            <a:srgbClr val="4E76E4"/>
           </a:solidFill>
           <a:ln w="12700">
             <a:solidFill>
-              <a:srgbClr val="3D68DF"/>
+              <a:srgbClr val="4E76E4"/>
             </a:solidFill>
             <a:prstDash val="solid"/>
           </a:ln>
@@ -2692,11 +2692,11 @@
             <a:avLst/>
           </a:prstGeom>
           <a:solidFill>
-            <a:srgbClr val="2348C4"/>
+            <a:srgbClr val="4E76E4"/>
           </a:solidFill>
           <a:ln w="12700">
             <a:solidFill>
-              <a:srgbClr val="2348C4"/>
+              <a:srgbClr val="4E76E4"/>
             </a:solidFill>
             <a:prstDash val="solid"/>
           </a:ln>
@@ -2717,11 +2717,11 @@
             <a:avLst/>
           </a:prstGeom>
           <a:solidFill>
-            <a:srgbClr val="1B3AAE"/>
+            <a:srgbClr val="6E93F0"/>
           </a:solidFill>
           <a:ln w="12700">
             <a:solidFill>
-              <a:srgbClr val="1B3AAE"/>
+              <a:srgbClr val="6E93F0"/>
             </a:solidFill>
             <a:prstDash val="solid"/>
           </a:ln>

--- a/ranking-nyata.pptx
+++ b/ranking-nyata.pptx
@@ -2611,17 +2611,17 @@
         <p:spPr>
           <a:xfrm>
             <a:off x="4708246" y="2186330"/>
-            <a:ext cx="3977640" cy="82296"/>
-          </a:xfrm>
-          <a:prstGeom prst="rect">
-            <a:avLst/>
-          </a:prstGeom>
-          <a:solidFill>
-            <a:srgbClr val="6E93F0"/>
+            <a:ext cx="3977640" cy="39624"/>
+          </a:xfrm>
+          <a:prstGeom prst="rect">
+            <a:avLst/>
+          </a:prstGeom>
+          <a:solidFill>
+            <a:srgbClr val="7FA0F3"/>
           </a:solidFill>
           <a:ln w="12700">
             <a:solidFill>
-              <a:srgbClr val="6E93F0"/>
+              <a:srgbClr val="7FA0F3"/>
             </a:solidFill>
             <a:prstDash val="solid"/>
           </a:ln>
@@ -2635,18 +2635,18 @@
         </p:nvSpPr>
         <p:spPr>
           <a:xfrm>
-            <a:off x="4708246" y="2259482"/>
-            <a:ext cx="3977640" cy="82296"/>
-          </a:xfrm>
-          <a:prstGeom prst="rect">
-            <a:avLst/>
-          </a:prstGeom>
-          <a:solidFill>
-            <a:srgbClr val="4E76E4"/>
+            <a:off x="4708246" y="2216810"/>
+            <a:ext cx="3977640" cy="39624"/>
+          </a:xfrm>
+          <a:prstGeom prst="rect">
+            <a:avLst/>
+          </a:prstGeom>
+          <a:solidFill>
+            <a:srgbClr val="5A82EA"/>
           </a:solidFill>
           <a:ln w="12700">
             <a:solidFill>
-              <a:srgbClr val="4E76E4"/>
+              <a:srgbClr val="5A82EA"/>
             </a:solidFill>
             <a:prstDash val="solid"/>
           </a:ln>
@@ -2660,8 +2660,33 @@
         </p:nvSpPr>
         <p:spPr>
           <a:xfrm>
-            <a:off x="4708246" y="2332634"/>
-            <a:ext cx="3977640" cy="82296"/>
+            <a:off x="4708246" y="2247290"/>
+            <a:ext cx="3977640" cy="39624"/>
+          </a:xfrm>
+          <a:prstGeom prst="rect">
+            <a:avLst/>
+          </a:prstGeom>
+          <a:solidFill>
+            <a:srgbClr val="3D68DF"/>
+          </a:solidFill>
+          <a:ln w="12700">
+            <a:solidFill>
+              <a:srgbClr val="3D68DF"/>
+            </a:solidFill>
+            <a:prstDash val="solid"/>
+          </a:ln>
+        </p:spPr>
+      </p:sp>
+      <p:sp>
+        <p:nvSpPr>
+          <p:cNvPr id="16" name="Shape 10"/>
+          <p:cNvSpPr/>
+          <p:nvPr/>
+        </p:nvSpPr>
+        <p:spPr>
+          <a:xfrm>
+            <a:off x="4708246" y="2277770"/>
+            <a:ext cx="3977640" cy="192024"/>
           </a:xfrm>
           <a:prstGeom prst="rect">
             <a:avLst/>
@@ -2679,24 +2704,24 @@
       </p:sp>
       <p:sp>
         <p:nvSpPr>
-          <p:cNvPr id="16" name="Shape 10"/>
-          <p:cNvSpPr/>
-          <p:nvPr/>
-        </p:nvSpPr>
-        <p:spPr>
-          <a:xfrm>
-            <a:off x="4708246" y="2405786"/>
-            <a:ext cx="3977640" cy="82296"/>
-          </a:xfrm>
-          <a:prstGeom prst="rect">
-            <a:avLst/>
-          </a:prstGeom>
-          <a:solidFill>
-            <a:srgbClr val="4E76E4"/>
+          <p:cNvPr id="17" name="Shape 11"/>
+          <p:cNvSpPr/>
+          <p:nvPr/>
+        </p:nvSpPr>
+        <p:spPr>
+          <a:xfrm>
+            <a:off x="4708246" y="2460650"/>
+            <a:ext cx="3977640" cy="39624"/>
+          </a:xfrm>
+          <a:prstGeom prst="rect">
+            <a:avLst/>
+          </a:prstGeom>
+          <a:solidFill>
+            <a:srgbClr val="3D68DF"/>
           </a:solidFill>
           <a:ln w="12700">
             <a:solidFill>
-              <a:srgbClr val="4E76E4"/>
+              <a:srgbClr val="3D68DF"/>
             </a:solidFill>
             <a:prstDash val="solid"/>
           </a:ln>
@@ -2704,24 +2729,24 @@
       </p:sp>
       <p:sp>
         <p:nvSpPr>
-          <p:cNvPr id="17" name="Shape 11"/>
-          <p:cNvSpPr/>
-          <p:nvPr/>
-        </p:nvSpPr>
-        <p:spPr>
-          <a:xfrm>
-            <a:off x="4708246" y="2478938"/>
-            <a:ext cx="3977640" cy="82296"/>
-          </a:xfrm>
-          <a:prstGeom prst="rect">
-            <a:avLst/>
-          </a:prstGeom>
-          <a:solidFill>
-            <a:srgbClr val="6E93F0"/>
+          <p:cNvPr id="18" name="Shape 12"/>
+          <p:cNvSpPr/>
+          <p:nvPr/>
+        </p:nvSpPr>
+        <p:spPr>
+          <a:xfrm>
+            <a:off x="4708246" y="2491130"/>
+            <a:ext cx="3977640" cy="39624"/>
+          </a:xfrm>
+          <a:prstGeom prst="rect">
+            <a:avLst/>
+          </a:prstGeom>
+          <a:solidFill>
+            <a:srgbClr val="5A82EA"/>
           </a:solidFill>
           <a:ln w="12700">
             <a:solidFill>
-              <a:srgbClr val="6E93F0"/>
+              <a:srgbClr val="5A82EA"/>
             </a:solidFill>
             <a:prstDash val="solid"/>
           </a:ln>
@@ -2729,7 +2754,32 @@
       </p:sp>
       <p:sp>
         <p:nvSpPr>
-          <p:cNvPr id="18" name="Shape 12"/>
+          <p:cNvPr id="19" name="Shape 13"/>
+          <p:cNvSpPr/>
+          <p:nvPr/>
+        </p:nvSpPr>
+        <p:spPr>
+          <a:xfrm>
+            <a:off x="4708246" y="2521610"/>
+            <a:ext cx="3977640" cy="39624"/>
+          </a:xfrm>
+          <a:prstGeom prst="rect">
+            <a:avLst/>
+          </a:prstGeom>
+          <a:solidFill>
+            <a:srgbClr val="7FA0F3"/>
+          </a:solidFill>
+          <a:ln w="12700">
+            <a:solidFill>
+              <a:srgbClr val="7FA0F3"/>
+            </a:solidFill>
+            <a:prstDash val="solid"/>
+          </a:ln>
+        </p:spPr>
+      </p:sp>
+      <p:sp>
+        <p:nvSpPr>
+          <p:cNvPr id="20" name="Shape 14"/>
           <p:cNvSpPr/>
           <p:nvPr/>
         </p:nvSpPr>
@@ -2751,7 +2801,7 @@
       </p:sp>
       <p:sp>
         <p:nvSpPr>
-          <p:cNvPr id="19" name="Text 13"/>
+          <p:cNvPr id="21" name="Text 15"/>
           <p:cNvSpPr/>
           <p:nvPr/>
         </p:nvSpPr>
@@ -2790,7 +2840,7 @@
       </p:sp>
       <p:sp>
         <p:nvSpPr>
-          <p:cNvPr id="20" name="Shape 14"/>
+          <p:cNvPr id="22" name="Shape 16"/>
           <p:cNvSpPr/>
           <p:nvPr/>
         </p:nvSpPr>
@@ -2817,7 +2867,7 @@
       </p:sp>
       <p:sp>
         <p:nvSpPr>
-          <p:cNvPr id="21" name="Text 15"/>
+          <p:cNvPr id="23" name="Text 17"/>
           <p:cNvSpPr/>
           <p:nvPr/>
         </p:nvSpPr>
@@ -2858,7 +2908,7 @@
       </p:sp>
       <p:sp>
         <p:nvSpPr>
-          <p:cNvPr id="22" name="Shape 16"/>
+          <p:cNvPr id="24" name="Shape 18"/>
           <p:cNvSpPr/>
           <p:nvPr/>
         </p:nvSpPr>
@@ -2885,7 +2935,7 @@
       </p:sp>
       <p:sp>
         <p:nvSpPr>
-          <p:cNvPr id="23" name="Shape 17"/>
+          <p:cNvPr id="25" name="Shape 19"/>
           <p:cNvSpPr/>
           <p:nvPr/>
         </p:nvSpPr>
@@ -2909,7 +2959,7 @@
       </p:sp>
       <p:sp>
         <p:nvSpPr>
-          <p:cNvPr id="24" name="Text 18"/>
+          <p:cNvPr id="26" name="Text 20"/>
           <p:cNvSpPr/>
           <p:nvPr/>
         </p:nvSpPr>
@@ -2948,7 +2998,7 @@
       </p:sp>
       <p:sp>
         <p:nvSpPr>
-          <p:cNvPr id="25" name="Shape 19"/>
+          <p:cNvPr id="27" name="Shape 21"/>
           <p:cNvSpPr/>
           <p:nvPr/>
         </p:nvSpPr>
@@ -2973,7 +3023,7 @@
       </p:sp>
       <p:sp>
         <p:nvSpPr>
-          <p:cNvPr id="26" name="Text 20"/>
+          <p:cNvPr id="28" name="Text 22"/>
           <p:cNvSpPr/>
           <p:nvPr/>
         </p:nvSpPr>
@@ -3014,7 +3064,7 @@
       </p:sp>
       <p:sp>
         <p:nvSpPr>
-          <p:cNvPr id="27" name="Text 21"/>
+          <p:cNvPr id="29" name="Text 23"/>
           <p:cNvSpPr/>
           <p:nvPr/>
         </p:nvSpPr>
@@ -3055,7 +3105,7 @@
       </p:sp>
       <p:sp>
         <p:nvSpPr>
-          <p:cNvPr id="28" name="Shape 22"/>
+          <p:cNvPr id="30" name="Shape 24"/>
           <p:cNvSpPr/>
           <p:nvPr/>
         </p:nvSpPr>
@@ -3080,7 +3130,7 @@
       </p:sp>
       <p:sp>
         <p:nvSpPr>
-          <p:cNvPr id="29" name="Text 23"/>
+          <p:cNvPr id="31" name="Text 25"/>
           <p:cNvSpPr/>
           <p:nvPr/>
         </p:nvSpPr>
@@ -3121,7 +3171,7 @@
       </p:sp>
       <p:sp>
         <p:nvSpPr>
-          <p:cNvPr id="30" name="Text 24"/>
+          <p:cNvPr id="32" name="Text 26"/>
           <p:cNvSpPr/>
           <p:nvPr/>
         </p:nvSpPr>
@@ -3162,7 +3212,7 @@
       </p:sp>
       <p:sp>
         <p:nvSpPr>
-          <p:cNvPr id="31" name="Shape 25"/>
+          <p:cNvPr id="33" name="Shape 27"/>
           <p:cNvSpPr/>
           <p:nvPr/>
         </p:nvSpPr>
@@ -3187,7 +3237,7 @@
       </p:sp>
       <p:sp>
         <p:nvSpPr>
-          <p:cNvPr id="32" name="Text 26"/>
+          <p:cNvPr id="34" name="Text 28"/>
           <p:cNvSpPr/>
           <p:nvPr/>
         </p:nvSpPr>
@@ -3228,7 +3278,7 @@
       </p:sp>
       <p:sp>
         <p:nvSpPr>
-          <p:cNvPr id="33" name="Text 27"/>
+          <p:cNvPr id="35" name="Text 29"/>
           <p:cNvSpPr/>
           <p:nvPr/>
         </p:nvSpPr>
@@ -3269,7 +3319,7 @@
       </p:sp>
       <p:sp>
         <p:nvSpPr>
-          <p:cNvPr id="34" name="Shape 28"/>
+          <p:cNvPr id="36" name="Shape 30"/>
           <p:cNvSpPr/>
           <p:nvPr/>
         </p:nvSpPr>
@@ -3294,7 +3344,7 @@
       </p:sp>
       <p:sp>
         <p:nvSpPr>
-          <p:cNvPr id="35" name="Text 29"/>
+          <p:cNvPr id="37" name="Text 31"/>
           <p:cNvSpPr/>
           <p:nvPr/>
         </p:nvSpPr>
@@ -3335,7 +3385,7 @@
       </p:sp>
       <p:sp>
         <p:nvSpPr>
-          <p:cNvPr id="36" name="Text 30"/>
+          <p:cNvPr id="38" name="Text 32"/>
           <p:cNvSpPr/>
           <p:nvPr/>
         </p:nvSpPr>
@@ -3376,7 +3426,7 @@
       </p:sp>
       <p:sp>
         <p:nvSpPr>
-          <p:cNvPr id="37" name="Shape 31"/>
+          <p:cNvPr id="39" name="Shape 33"/>
           <p:cNvSpPr/>
           <p:nvPr/>
         </p:nvSpPr>
@@ -3401,7 +3451,7 @@
       </p:sp>
       <p:sp>
         <p:nvSpPr>
-          <p:cNvPr id="38" name="Text 32"/>
+          <p:cNvPr id="40" name="Text 34"/>
           <p:cNvSpPr/>
           <p:nvPr/>
         </p:nvSpPr>
@@ -3442,7 +3492,7 @@
       </p:sp>
       <p:sp>
         <p:nvSpPr>
-          <p:cNvPr id="39" name="Text 33"/>
+          <p:cNvPr id="41" name="Text 35"/>
           <p:cNvSpPr/>
           <p:nvPr/>
         </p:nvSpPr>

--- a/ranking-nyata.pptx
+++ b/ranking-nyata.pptx
@@ -2642,11 +2642,11 @@
             <a:avLst/>
           </a:prstGeom>
           <a:solidFill>
-            <a:srgbClr val="5A82EA"/>
+            <a:srgbClr val="5676DF"/>
           </a:solidFill>
           <a:ln w="12700">
             <a:solidFill>
-              <a:srgbClr val="5A82EA"/>
+              <a:srgbClr val="5676DF"/>
             </a:solidFill>
             <a:prstDash val="solid"/>
           </a:ln>
@@ -2667,11 +2667,11 @@
             <a:avLst/>
           </a:prstGeom>
           <a:solidFill>
-            <a:srgbClr val="3D68DF"/>
+            <a:srgbClr val="2C4CCC"/>
           </a:solidFill>
           <a:ln w="12700">
             <a:solidFill>
-              <a:srgbClr val="3D68DF"/>
+              <a:srgbClr val="2C4CCC"/>
             </a:solidFill>
             <a:prstDash val="solid"/>
           </a:ln>
@@ -2692,11 +2692,11 @@
             <a:avLst/>
           </a:prstGeom>
           <a:solidFill>
-            <a:srgbClr val="2E56D4"/>
+            <a:srgbClr val="0322B8"/>
           </a:solidFill>
           <a:ln w="12700">
             <a:solidFill>
-              <a:srgbClr val="2E56D4"/>
+              <a:srgbClr val="0322B8"/>
             </a:solidFill>
             <a:prstDash val="solid"/>
           </a:ln>
@@ -2717,11 +2717,11 @@
             <a:avLst/>
           </a:prstGeom>
           <a:solidFill>
-            <a:srgbClr val="3D68DF"/>
+            <a:srgbClr val="2C4CCC"/>
           </a:solidFill>
           <a:ln w="12700">
             <a:solidFill>
-              <a:srgbClr val="3D68DF"/>
+              <a:srgbClr val="2C4CCC"/>
             </a:solidFill>
             <a:prstDash val="solid"/>
           </a:ln>
@@ -2742,11 +2742,11 @@
             <a:avLst/>
           </a:prstGeom>
           <a:solidFill>
-            <a:srgbClr val="5A82EA"/>
+            <a:srgbClr val="5676DF"/>
           </a:solidFill>
           <a:ln w="12700">
             <a:solidFill>
-              <a:srgbClr val="5A82EA"/>
+              <a:srgbClr val="5676DF"/>
             </a:solidFill>
             <a:prstDash val="solid"/>
           </a:ln>
@@ -2791,9 +2791,9 @@
           <a:prstGeom prst="rect">
             <a:avLst/>
           </a:prstGeom>
-          <a:ln w="12700">
+          <a:ln w="6350">
             <a:solidFill>
-              <a:srgbClr val="FFFFFF"/>
+              <a:srgbClr val="D1D1D1"/>
             </a:solidFill>
             <a:prstDash val="solid"/>
           </a:ln>

--- a/ranking-nyata.pptx
+++ b/ranking-nyata.pptx
@@ -2611,57 +2611,7 @@
         <p:spPr>
           <a:xfrm>
             <a:off x="4708246" y="2186330"/>
-            <a:ext cx="3977640" cy="39624"/>
-          </a:xfrm>
-          <a:prstGeom prst="rect">
-            <a:avLst/>
-          </a:prstGeom>
-          <a:solidFill>
-            <a:srgbClr val="7FA0F3"/>
-          </a:solidFill>
-          <a:ln w="12700">
-            <a:solidFill>
-              <a:srgbClr val="7FA0F3"/>
-            </a:solidFill>
-            <a:prstDash val="solid"/>
-          </a:ln>
-        </p:spPr>
-      </p:sp>
-      <p:sp>
-        <p:nvSpPr>
-          <p:cNvPr id="14" name="Shape 8"/>
-          <p:cNvSpPr/>
-          <p:nvPr/>
-        </p:nvSpPr>
-        <p:spPr>
-          <a:xfrm>
-            <a:off x="4708246" y="2216810"/>
-            <a:ext cx="3977640" cy="39624"/>
-          </a:xfrm>
-          <a:prstGeom prst="rect">
-            <a:avLst/>
-          </a:prstGeom>
-          <a:solidFill>
-            <a:srgbClr val="5676DF"/>
-          </a:solidFill>
-          <a:ln w="12700">
-            <a:solidFill>
-              <a:srgbClr val="5676DF"/>
-            </a:solidFill>
-            <a:prstDash val="solid"/>
-          </a:ln>
-        </p:spPr>
-      </p:sp>
-      <p:sp>
-        <p:nvSpPr>
-          <p:cNvPr id="15" name="Shape 9"/>
-          <p:cNvSpPr/>
-          <p:nvPr/>
-        </p:nvSpPr>
-        <p:spPr>
-          <a:xfrm>
-            <a:off x="4708246" y="2247290"/>
-            <a:ext cx="3977640" cy="39624"/>
+            <a:ext cx="3977640" cy="100584"/>
           </a:xfrm>
           <a:prstGeom prst="rect">
             <a:avLst/>
@@ -2679,7 +2629,7 @@
       </p:sp>
       <p:sp>
         <p:nvSpPr>
-          <p:cNvPr id="16" name="Shape 10"/>
+          <p:cNvPr id="14" name="Shape 8"/>
           <p:cNvSpPr/>
           <p:nvPr/>
         </p:nvSpPr>
@@ -2704,14 +2654,14 @@
       </p:sp>
       <p:sp>
         <p:nvSpPr>
-          <p:cNvPr id="17" name="Shape 11"/>
+          <p:cNvPr id="15" name="Shape 9"/>
           <p:cNvSpPr/>
           <p:nvPr/>
         </p:nvSpPr>
         <p:spPr>
           <a:xfrm>
             <a:off x="4708246" y="2460650"/>
-            <a:ext cx="3977640" cy="39624"/>
+            <a:ext cx="3977640" cy="100584"/>
           </a:xfrm>
           <a:prstGeom prst="rect">
             <a:avLst/>
@@ -2729,57 +2679,7 @@
       </p:sp>
       <p:sp>
         <p:nvSpPr>
-          <p:cNvPr id="18" name="Shape 12"/>
-          <p:cNvSpPr/>
-          <p:nvPr/>
-        </p:nvSpPr>
-        <p:spPr>
-          <a:xfrm>
-            <a:off x="4708246" y="2491130"/>
-            <a:ext cx="3977640" cy="39624"/>
-          </a:xfrm>
-          <a:prstGeom prst="rect">
-            <a:avLst/>
-          </a:prstGeom>
-          <a:solidFill>
-            <a:srgbClr val="5676DF"/>
-          </a:solidFill>
-          <a:ln w="12700">
-            <a:solidFill>
-              <a:srgbClr val="5676DF"/>
-            </a:solidFill>
-            <a:prstDash val="solid"/>
-          </a:ln>
-        </p:spPr>
-      </p:sp>
-      <p:sp>
-        <p:nvSpPr>
-          <p:cNvPr id="19" name="Shape 13"/>
-          <p:cNvSpPr/>
-          <p:nvPr/>
-        </p:nvSpPr>
-        <p:spPr>
-          <a:xfrm>
-            <a:off x="4708246" y="2521610"/>
-            <a:ext cx="3977640" cy="39624"/>
-          </a:xfrm>
-          <a:prstGeom prst="rect">
-            <a:avLst/>
-          </a:prstGeom>
-          <a:solidFill>
-            <a:srgbClr val="7FA0F3"/>
-          </a:solidFill>
-          <a:ln w="12700">
-            <a:solidFill>
-              <a:srgbClr val="7FA0F3"/>
-            </a:solidFill>
-            <a:prstDash val="solid"/>
-          </a:ln>
-        </p:spPr>
-      </p:sp>
-      <p:sp>
-        <p:nvSpPr>
-          <p:cNvPr id="20" name="Shape 14"/>
+          <p:cNvPr id="16" name="Shape 10"/>
           <p:cNvSpPr/>
           <p:nvPr/>
         </p:nvSpPr>
@@ -2801,7 +2701,7 @@
       </p:sp>
       <p:sp>
         <p:nvSpPr>
-          <p:cNvPr id="21" name="Text 15"/>
+          <p:cNvPr id="17" name="Text 11"/>
           <p:cNvSpPr/>
           <p:nvPr/>
         </p:nvSpPr>
@@ -2840,7 +2740,7 @@
       </p:sp>
       <p:sp>
         <p:nvSpPr>
-          <p:cNvPr id="22" name="Shape 16"/>
+          <p:cNvPr id="18" name="Shape 12"/>
           <p:cNvSpPr/>
           <p:nvPr/>
         </p:nvSpPr>
@@ -2867,7 +2767,7 @@
       </p:sp>
       <p:sp>
         <p:nvSpPr>
-          <p:cNvPr id="23" name="Text 17"/>
+          <p:cNvPr id="19" name="Text 13"/>
           <p:cNvSpPr/>
           <p:nvPr/>
         </p:nvSpPr>
@@ -2908,7 +2808,7 @@
       </p:sp>
       <p:sp>
         <p:nvSpPr>
-          <p:cNvPr id="24" name="Shape 18"/>
+          <p:cNvPr id="20" name="Shape 14"/>
           <p:cNvSpPr/>
           <p:nvPr/>
         </p:nvSpPr>
@@ -2935,7 +2835,7 @@
       </p:sp>
       <p:sp>
         <p:nvSpPr>
-          <p:cNvPr id="25" name="Shape 19"/>
+          <p:cNvPr id="21" name="Shape 15"/>
           <p:cNvSpPr/>
           <p:nvPr/>
         </p:nvSpPr>
@@ -2959,7 +2859,7 @@
       </p:sp>
       <p:sp>
         <p:nvSpPr>
-          <p:cNvPr id="26" name="Text 20"/>
+          <p:cNvPr id="22" name="Text 16"/>
           <p:cNvSpPr/>
           <p:nvPr/>
         </p:nvSpPr>
@@ -2998,7 +2898,7 @@
       </p:sp>
       <p:sp>
         <p:nvSpPr>
-          <p:cNvPr id="27" name="Shape 21"/>
+          <p:cNvPr id="23" name="Shape 17"/>
           <p:cNvSpPr/>
           <p:nvPr/>
         </p:nvSpPr>
@@ -3023,7 +2923,7 @@
       </p:sp>
       <p:sp>
         <p:nvSpPr>
-          <p:cNvPr id="28" name="Text 22"/>
+          <p:cNvPr id="24" name="Text 18"/>
           <p:cNvSpPr/>
           <p:nvPr/>
         </p:nvSpPr>
@@ -3064,7 +2964,7 @@
       </p:sp>
       <p:sp>
         <p:nvSpPr>
-          <p:cNvPr id="29" name="Text 23"/>
+          <p:cNvPr id="25" name="Text 19"/>
           <p:cNvSpPr/>
           <p:nvPr/>
         </p:nvSpPr>
@@ -3105,7 +3005,7 @@
       </p:sp>
       <p:sp>
         <p:nvSpPr>
-          <p:cNvPr id="30" name="Shape 24"/>
+          <p:cNvPr id="26" name="Shape 20"/>
           <p:cNvSpPr/>
           <p:nvPr/>
         </p:nvSpPr>
@@ -3130,7 +3030,7 @@
       </p:sp>
       <p:sp>
         <p:nvSpPr>
-          <p:cNvPr id="31" name="Text 25"/>
+          <p:cNvPr id="27" name="Text 21"/>
           <p:cNvSpPr/>
           <p:nvPr/>
         </p:nvSpPr>
@@ -3171,7 +3071,7 @@
       </p:sp>
       <p:sp>
         <p:nvSpPr>
-          <p:cNvPr id="32" name="Text 26"/>
+          <p:cNvPr id="28" name="Text 22"/>
           <p:cNvSpPr/>
           <p:nvPr/>
         </p:nvSpPr>
@@ -3212,7 +3112,7 @@
       </p:sp>
       <p:sp>
         <p:nvSpPr>
-          <p:cNvPr id="33" name="Shape 27"/>
+          <p:cNvPr id="29" name="Shape 23"/>
           <p:cNvSpPr/>
           <p:nvPr/>
         </p:nvSpPr>
@@ -3237,7 +3137,7 @@
       </p:sp>
       <p:sp>
         <p:nvSpPr>
-          <p:cNvPr id="34" name="Text 28"/>
+          <p:cNvPr id="30" name="Text 24"/>
           <p:cNvSpPr/>
           <p:nvPr/>
         </p:nvSpPr>
@@ -3278,7 +3178,7 @@
       </p:sp>
       <p:sp>
         <p:nvSpPr>
-          <p:cNvPr id="35" name="Text 29"/>
+          <p:cNvPr id="31" name="Text 25"/>
           <p:cNvSpPr/>
           <p:nvPr/>
         </p:nvSpPr>
@@ -3319,7 +3219,7 @@
       </p:sp>
       <p:sp>
         <p:nvSpPr>
-          <p:cNvPr id="36" name="Shape 30"/>
+          <p:cNvPr id="32" name="Shape 26"/>
           <p:cNvSpPr/>
           <p:nvPr/>
         </p:nvSpPr>
@@ -3344,7 +3244,7 @@
       </p:sp>
       <p:sp>
         <p:nvSpPr>
-          <p:cNvPr id="37" name="Text 31"/>
+          <p:cNvPr id="33" name="Text 27"/>
           <p:cNvSpPr/>
           <p:nvPr/>
         </p:nvSpPr>
@@ -3385,7 +3285,7 @@
       </p:sp>
       <p:sp>
         <p:nvSpPr>
-          <p:cNvPr id="38" name="Text 32"/>
+          <p:cNvPr id="34" name="Text 28"/>
           <p:cNvSpPr/>
           <p:nvPr/>
         </p:nvSpPr>
@@ -3426,7 +3326,7 @@
       </p:sp>
       <p:sp>
         <p:nvSpPr>
-          <p:cNvPr id="39" name="Shape 33"/>
+          <p:cNvPr id="35" name="Shape 29"/>
           <p:cNvSpPr/>
           <p:nvPr/>
         </p:nvSpPr>
@@ -3451,7 +3351,7 @@
       </p:sp>
       <p:sp>
         <p:nvSpPr>
-          <p:cNvPr id="40" name="Text 34"/>
+          <p:cNvPr id="36" name="Text 30"/>
           <p:cNvSpPr/>
           <p:nvPr/>
         </p:nvSpPr>
@@ -3492,7 +3392,7 @@
       </p:sp>
       <p:sp>
         <p:nvSpPr>
-          <p:cNvPr id="41" name="Text 35"/>
+          <p:cNvPr id="37" name="Text 31"/>
           <p:cNvSpPr/>
           <p:nvPr/>
         </p:nvSpPr>

--- a/ranking-nyata.pptx
+++ b/ranking-nyata.pptx
@@ -1648,16 +1648,19 @@
         <p:spPr>
           <a:xfrm>
             <a:off x="4754880" y="5925312"/>
-            <a:ext cx="1828800" cy="310896"/>
+            <a:ext cx="1828800" cy="246888"/>
           </a:xfrm>
           <a:prstGeom prst="roundRect">
             <a:avLst>
-              <a:gd name="adj" fmla="val 52941"/>
+              <a:gd name="adj" fmla="val 66667"/>
             </a:avLst>
           </a:prstGeom>
+          <a:solidFill>
+            <a:srgbClr val="0B1E6B"/>
+          </a:solidFill>
           <a:ln w="12700">
             <a:solidFill>
-              <a:srgbClr val="FFFFFF"/>
+              <a:srgbClr val="0B1E6B"/>
             </a:solidFill>
             <a:prstDash val="solid"/>
           </a:ln>
@@ -1672,7 +1675,7 @@
         <p:spPr>
           <a:xfrm>
             <a:off x="4754880" y="5952744"/>
-            <a:ext cx="1828800" cy="228600"/>
+            <a:ext cx="1828800" cy="256032"/>
           </a:xfrm>
           <a:prstGeom prst="rect">
             <a:avLst/>
@@ -2842,16 +2845,19 @@
         <p:spPr>
           <a:xfrm>
             <a:off x="4754880" y="5925312"/>
-            <a:ext cx="1828800" cy="310896"/>
+            <a:ext cx="1828800" cy="246888"/>
           </a:xfrm>
           <a:prstGeom prst="roundRect">
             <a:avLst>
-              <a:gd name="adj" fmla="val 52941"/>
+              <a:gd name="adj" fmla="val 66667"/>
             </a:avLst>
           </a:prstGeom>
+          <a:solidFill>
+            <a:srgbClr val="0B1E6B"/>
+          </a:solidFill>
           <a:ln w="12700">
             <a:solidFill>
-              <a:srgbClr val="FFFFFF"/>
+              <a:srgbClr val="0B1E6B"/>
             </a:solidFill>
             <a:prstDash val="solid"/>
           </a:ln>
@@ -2866,7 +2872,7 @@
         <p:spPr>
           <a:xfrm>
             <a:off x="4754880" y="5952744"/>
-            <a:ext cx="1828800" cy="228600"/>
+            <a:ext cx="1828800" cy="256032"/>
           </a:xfrm>
           <a:prstGeom prst="rect">
             <a:avLst/>

--- a/ranking-nyata.pptx
+++ b/ranking-nyata.pptx
@@ -1647,7 +1647,7 @@
         </p:nvSpPr>
         <p:spPr>
           <a:xfrm>
-            <a:off x="4754880" y="5925312"/>
+            <a:off x="4828489" y="5925312"/>
             <a:ext cx="1828800" cy="246888"/>
           </a:xfrm>
           <a:prstGeom prst="roundRect">
@@ -1656,11 +1656,11 @@
             </a:avLst>
           </a:prstGeom>
           <a:solidFill>
-            <a:srgbClr val="0B1E6B"/>
+            <a:srgbClr val="2AABEE"/>
           </a:solidFill>
           <a:ln w="12700">
             <a:solidFill>
-              <a:srgbClr val="0B1E6B"/>
+              <a:srgbClr val="2AABEE"/>
             </a:solidFill>
             <a:prstDash val="solid"/>
           </a:ln>
@@ -1674,7 +1674,7 @@
         </p:nvSpPr>
         <p:spPr>
           <a:xfrm>
-            <a:off x="4754880" y="5952744"/>
+            <a:off x="4828489" y="5952744"/>
             <a:ext cx="1828800" cy="256032"/>
           </a:xfrm>
           <a:prstGeom prst="rect">
@@ -2844,7 +2844,7 @@
         </p:nvSpPr>
         <p:spPr>
           <a:xfrm>
-            <a:off x="4754880" y="5925312"/>
+            <a:off x="4828489" y="5925312"/>
             <a:ext cx="1828800" cy="246888"/>
           </a:xfrm>
           <a:prstGeom prst="roundRect">
@@ -2853,11 +2853,11 @@
             </a:avLst>
           </a:prstGeom>
           <a:solidFill>
-            <a:srgbClr val="0B1E6B"/>
+            <a:srgbClr val="2AABEE"/>
           </a:solidFill>
           <a:ln w="12700">
             <a:solidFill>
-              <a:srgbClr val="0B1E6B"/>
+              <a:srgbClr val="2AABEE"/>
             </a:solidFill>
             <a:prstDash val="solid"/>
           </a:ln>
@@ -2871,7 +2871,7 @@
         </p:nvSpPr>
         <p:spPr>
           <a:xfrm>
-            <a:off x="4754880" y="5952744"/>
+            <a:off x="4828489" y="5952744"/>
             <a:ext cx="1828800" cy="256032"/>
           </a:xfrm>
           <a:prstGeom prst="rect">

--- a/ranking-nyata.pptx
+++ b/ranking-nyata.pptx
@@ -1647,7 +1647,7 @@
         </p:nvSpPr>
         <p:spPr>
           <a:xfrm>
-            <a:off x="4828489" y="5925312"/>
+            <a:off x="4828489" y="6048756"/>
             <a:ext cx="1828800" cy="246888"/>
           </a:xfrm>
           <a:prstGeom prst="roundRect">
@@ -1674,7 +1674,7 @@
         </p:nvSpPr>
         <p:spPr>
           <a:xfrm>
-            <a:off x="4828489" y="5952744"/>
+            <a:off x="4828489" y="6076188"/>
             <a:ext cx="1828800" cy="256032"/>
           </a:xfrm>
           <a:prstGeom prst="rect">
@@ -2844,7 +2844,7 @@
         </p:nvSpPr>
         <p:spPr>
           <a:xfrm>
-            <a:off x="4828489" y="5925312"/>
+            <a:off x="4828489" y="6048756"/>
             <a:ext cx="1828800" cy="246888"/>
           </a:xfrm>
           <a:prstGeom prst="roundRect">
@@ -2871,7 +2871,7 @@
         </p:nvSpPr>
         <p:spPr>
           <a:xfrm>
-            <a:off x="4828489" y="5952744"/>
+            <a:off x="4828489" y="6076188"/>
             <a:ext cx="1828800" cy="256032"/>
           </a:xfrm>
           <a:prstGeom prst="rect">

--- a/ranking-nyata.pptx
+++ b/ranking-nyata.pptx
@@ -1656,11 +1656,11 @@
             </a:avLst>
           </a:prstGeom>
           <a:solidFill>
-            <a:srgbClr val="2AABEE"/>
+            <a:srgbClr val="D1D1D1"/>
           </a:solidFill>
           <a:ln w="12700">
             <a:solidFill>
-              <a:srgbClr val="2AABEE"/>
+              <a:srgbClr val="D1D1D1"/>
             </a:solidFill>
             <a:prstDash val="solid"/>
           </a:ln>
@@ -1693,7 +1693,7 @@
             <a:r>
               <a:rPr lang="en-US" sz="1000" b="1" dirty="0">
                 <a:solidFill>
-                  <a:srgbClr val="FFFFFF"/>
+                  <a:srgbClr val="142D64"/>
                 </a:solidFill>
                 <a:latin typeface="Aptos" pitchFamily="34" charset="0"/>
                 <a:ea typeface="Aptos" pitchFamily="34" charset="-122"/>
@@ -2853,11 +2853,11 @@
             </a:avLst>
           </a:prstGeom>
           <a:solidFill>
-            <a:srgbClr val="2AABEE"/>
+            <a:srgbClr val="D1D1D1"/>
           </a:solidFill>
           <a:ln w="12700">
             <a:solidFill>
-              <a:srgbClr val="2AABEE"/>
+              <a:srgbClr val="D1D1D1"/>
             </a:solidFill>
             <a:prstDash val="solid"/>
           </a:ln>
@@ -2890,7 +2890,7 @@
             <a:r>
               <a:rPr lang="en-US" sz="1000" b="1" dirty="0">
                 <a:solidFill>
-                  <a:srgbClr val="FFFFFF"/>
+                  <a:srgbClr val="142D64"/>
                 </a:solidFill>
                 <a:latin typeface="Aptos" pitchFamily="34" charset="0"/>
                 <a:ea typeface="Aptos" pitchFamily="34" charset="-122"/>

--- a/ranking-nyata.pptx
+++ b/ranking-nyata.pptx
@@ -1656,11 +1656,11 @@
             </a:avLst>
           </a:prstGeom>
           <a:solidFill>
-            <a:srgbClr val="D1D1D1"/>
+            <a:srgbClr val="0B1E6B"/>
           </a:solidFill>
           <a:ln w="12700">
             <a:solidFill>
-              <a:srgbClr val="D1D1D1"/>
+              <a:srgbClr val="0B1E6B"/>
             </a:solidFill>
             <a:prstDash val="solid"/>
           </a:ln>
@@ -1674,8 +1674,8 @@
         </p:nvSpPr>
         <p:spPr>
           <a:xfrm>
-            <a:off x="4828489" y="6076188"/>
-            <a:ext cx="1828800" cy="256032"/>
+            <a:off x="4828489" y="6048756"/>
+            <a:ext cx="1828800" cy="246888"/>
           </a:xfrm>
           <a:prstGeom prst="rect">
             <a:avLst/>
@@ -1693,7 +1693,7 @@
             <a:r>
               <a:rPr lang="en-US" sz="1000" b="1" dirty="0">
                 <a:solidFill>
-                  <a:srgbClr val="142D64"/>
+                  <a:srgbClr val="FFFFFF"/>
                 </a:solidFill>
                 <a:latin typeface="Aptos" pitchFamily="34" charset="0"/>
                 <a:ea typeface="Aptos" pitchFamily="34" charset="-122"/>
@@ -2853,11 +2853,11 @@
             </a:avLst>
           </a:prstGeom>
           <a:solidFill>
-            <a:srgbClr val="D1D1D1"/>
+            <a:srgbClr val="0B1E6B"/>
           </a:solidFill>
           <a:ln w="12700">
             <a:solidFill>
-              <a:srgbClr val="D1D1D1"/>
+              <a:srgbClr val="0B1E6B"/>
             </a:solidFill>
             <a:prstDash val="solid"/>
           </a:ln>
@@ -2871,8 +2871,8 @@
         </p:nvSpPr>
         <p:spPr>
           <a:xfrm>
-            <a:off x="4828489" y="6076188"/>
-            <a:ext cx="1828800" cy="256032"/>
+            <a:off x="4828489" y="6048756"/>
+            <a:ext cx="1828800" cy="246888"/>
           </a:xfrm>
           <a:prstGeom prst="rect">
             <a:avLst/>
@@ -2890,7 +2890,7 @@
             <a:r>
               <a:rPr lang="en-US" sz="1000" b="1" dirty="0">
                 <a:solidFill>
-                  <a:srgbClr val="142D64"/>
+                  <a:srgbClr val="FFFFFF"/>
                 </a:solidFill>
                 <a:latin typeface="Aptos" pitchFamily="34" charset="0"/>
                 <a:ea typeface="Aptos" pitchFamily="34" charset="-122"/>

--- a/ranking-nyata.pptx
+++ b/ranking-nyata.pptx
@@ -2614,7 +2614,57 @@
         <p:spPr>
           <a:xfrm>
             <a:off x="4708246" y="2186330"/>
-            <a:ext cx="3977640" cy="100584"/>
+            <a:ext cx="3977640" cy="7925"/>
+          </a:xfrm>
+          <a:prstGeom prst="rect">
+            <a:avLst/>
+          </a:prstGeom>
+          <a:solidFill>
+            <a:srgbClr val="7FA0F3"/>
+          </a:solidFill>
+          <a:ln w="12700">
+            <a:solidFill>
+              <a:srgbClr val="7FA0F3"/>
+            </a:solidFill>
+            <a:prstDash val="solid"/>
+          </a:ln>
+        </p:spPr>
+      </p:sp>
+      <p:sp>
+        <p:nvSpPr>
+          <p:cNvPr id="14" name="Shape 8"/>
+          <p:cNvSpPr/>
+          <p:nvPr/>
+        </p:nvSpPr>
+        <p:spPr>
+          <a:xfrm>
+            <a:off x="4708246" y="2194255"/>
+            <a:ext cx="3977640" cy="7925"/>
+          </a:xfrm>
+          <a:prstGeom prst="rect">
+            <a:avLst/>
+          </a:prstGeom>
+          <a:solidFill>
+            <a:srgbClr val="5676DF"/>
+          </a:solidFill>
+          <a:ln w="12700">
+            <a:solidFill>
+              <a:srgbClr val="5676DF"/>
+            </a:solidFill>
+            <a:prstDash val="solid"/>
+          </a:ln>
+        </p:spPr>
+      </p:sp>
+      <p:sp>
+        <p:nvSpPr>
+          <p:cNvPr id="15" name="Shape 9"/>
+          <p:cNvSpPr/>
+          <p:nvPr/>
+        </p:nvSpPr>
+        <p:spPr>
+          <a:xfrm>
+            <a:off x="4708246" y="2202180"/>
+            <a:ext cx="3977640" cy="7925"/>
           </a:xfrm>
           <a:prstGeom prst="rect">
             <a:avLst/>
@@ -2632,14 +2682,14 @@
       </p:sp>
       <p:sp>
         <p:nvSpPr>
-          <p:cNvPr id="14" name="Shape 8"/>
-          <p:cNvSpPr/>
-          <p:nvPr/>
-        </p:nvSpPr>
-        <p:spPr>
-          <a:xfrm>
-            <a:off x="4708246" y="2277770"/>
-            <a:ext cx="3977640" cy="192024"/>
+          <p:cNvPr id="16" name="Shape 10"/>
+          <p:cNvSpPr/>
+          <p:nvPr/>
+        </p:nvSpPr>
+        <p:spPr>
+          <a:xfrm>
+            <a:off x="4708246" y="2210105"/>
+            <a:ext cx="3977640" cy="318211"/>
           </a:xfrm>
           <a:prstGeom prst="rect">
             <a:avLst/>
@@ -2657,14 +2707,14 @@
       </p:sp>
       <p:sp>
         <p:nvSpPr>
-          <p:cNvPr id="15" name="Shape 9"/>
-          <p:cNvSpPr/>
-          <p:nvPr/>
-        </p:nvSpPr>
-        <p:spPr>
-          <a:xfrm>
-            <a:off x="4708246" y="2460650"/>
-            <a:ext cx="3977640" cy="100584"/>
+          <p:cNvPr id="17" name="Shape 11"/>
+          <p:cNvSpPr/>
+          <p:nvPr/>
+        </p:nvSpPr>
+        <p:spPr>
+          <a:xfrm>
+            <a:off x="4708246" y="2528316"/>
+            <a:ext cx="3977640" cy="7925"/>
           </a:xfrm>
           <a:prstGeom prst="rect">
             <a:avLst/>
@@ -2682,7 +2732,57 @@
       </p:sp>
       <p:sp>
         <p:nvSpPr>
-          <p:cNvPr id="16" name="Shape 10"/>
+          <p:cNvPr id="18" name="Shape 12"/>
+          <p:cNvSpPr/>
+          <p:nvPr/>
+        </p:nvSpPr>
+        <p:spPr>
+          <a:xfrm>
+            <a:off x="4708246" y="2536241"/>
+            <a:ext cx="3977640" cy="7925"/>
+          </a:xfrm>
+          <a:prstGeom prst="rect">
+            <a:avLst/>
+          </a:prstGeom>
+          <a:solidFill>
+            <a:srgbClr val="5676DF"/>
+          </a:solidFill>
+          <a:ln w="12700">
+            <a:solidFill>
+              <a:srgbClr val="5676DF"/>
+            </a:solidFill>
+            <a:prstDash val="solid"/>
+          </a:ln>
+        </p:spPr>
+      </p:sp>
+      <p:sp>
+        <p:nvSpPr>
+          <p:cNvPr id="19" name="Shape 13"/>
+          <p:cNvSpPr/>
+          <p:nvPr/>
+        </p:nvSpPr>
+        <p:spPr>
+          <a:xfrm>
+            <a:off x="4708246" y="2544166"/>
+            <a:ext cx="3977640" cy="7925"/>
+          </a:xfrm>
+          <a:prstGeom prst="rect">
+            <a:avLst/>
+          </a:prstGeom>
+          <a:solidFill>
+            <a:srgbClr val="7FA0F3"/>
+          </a:solidFill>
+          <a:ln w="12700">
+            <a:solidFill>
+              <a:srgbClr val="7FA0F3"/>
+            </a:solidFill>
+            <a:prstDash val="solid"/>
+          </a:ln>
+        </p:spPr>
+      </p:sp>
+      <p:sp>
+        <p:nvSpPr>
+          <p:cNvPr id="20" name="Shape 14"/>
           <p:cNvSpPr/>
           <p:nvPr/>
         </p:nvSpPr>
@@ -2704,7 +2804,7 @@
       </p:sp>
       <p:sp>
         <p:nvSpPr>
-          <p:cNvPr id="17" name="Text 11"/>
+          <p:cNvPr id="21" name="Text 15"/>
           <p:cNvSpPr/>
           <p:nvPr/>
         </p:nvSpPr>
@@ -2727,7 +2827,7 @@
               <a:buNone/>
             </a:pPr>
             <a:r>
-              <a:rPr lang="en-US" sz="2000" b="1" dirty="0">
+              <a:rPr lang="en-US" sz="1800" b="1" dirty="0">
                 <a:solidFill>
                   <a:srgbClr val="FFFFFF"/>
                 </a:solidFill>
@@ -2737,13 +2837,13 @@
               </a:rPr>
               <a:t>3,51</a:t>
             </a:r>
-            <a:endParaRPr lang="en-US" sz="2000" dirty="0"/>
-          </a:p>
-        </p:txBody>
-      </p:sp>
-      <p:sp>
-        <p:nvSpPr>
-          <p:cNvPr id="18" name="Shape 12"/>
+            <a:endParaRPr lang="en-US" sz="1800" dirty="0"/>
+          </a:p>
+        </p:txBody>
+      </p:sp>
+      <p:sp>
+        <p:nvSpPr>
+          <p:cNvPr id="22" name="Shape 16"/>
           <p:cNvSpPr/>
           <p:nvPr/>
         </p:nvSpPr>
@@ -2770,7 +2870,7 @@
       </p:sp>
       <p:sp>
         <p:nvSpPr>
-          <p:cNvPr id="19" name="Text 13"/>
+          <p:cNvPr id="23" name="Text 17"/>
           <p:cNvSpPr/>
           <p:nvPr/>
         </p:nvSpPr>
@@ -2811,7 +2911,7 @@
       </p:sp>
       <p:sp>
         <p:nvSpPr>
-          <p:cNvPr id="20" name="Shape 14"/>
+          <p:cNvPr id="24" name="Shape 18"/>
           <p:cNvSpPr/>
           <p:nvPr/>
         </p:nvSpPr>
@@ -2838,7 +2938,7 @@
       </p:sp>
       <p:sp>
         <p:nvSpPr>
-          <p:cNvPr id="21" name="Shape 15"/>
+          <p:cNvPr id="25" name="Shape 19"/>
           <p:cNvSpPr/>
           <p:nvPr/>
         </p:nvSpPr>
@@ -2865,7 +2965,7 @@
       </p:sp>
       <p:sp>
         <p:nvSpPr>
-          <p:cNvPr id="22" name="Text 16"/>
+          <p:cNvPr id="26" name="Text 20"/>
           <p:cNvSpPr/>
           <p:nvPr/>
         </p:nvSpPr>
@@ -2904,7 +3004,7 @@
       </p:sp>
       <p:sp>
         <p:nvSpPr>
-          <p:cNvPr id="23" name="Shape 17"/>
+          <p:cNvPr id="27" name="Shape 21"/>
           <p:cNvSpPr/>
           <p:nvPr/>
         </p:nvSpPr>
@@ -2929,7 +3029,7 @@
       </p:sp>
       <p:sp>
         <p:nvSpPr>
-          <p:cNvPr id="24" name="Text 18"/>
+          <p:cNvPr id="28" name="Text 22"/>
           <p:cNvSpPr/>
           <p:nvPr/>
         </p:nvSpPr>
@@ -2970,7 +3070,7 @@
       </p:sp>
       <p:sp>
         <p:nvSpPr>
-          <p:cNvPr id="25" name="Text 19"/>
+          <p:cNvPr id="29" name="Text 23"/>
           <p:cNvSpPr/>
           <p:nvPr/>
         </p:nvSpPr>
@@ -3011,7 +3111,7 @@
       </p:sp>
       <p:sp>
         <p:nvSpPr>
-          <p:cNvPr id="26" name="Shape 20"/>
+          <p:cNvPr id="30" name="Shape 24"/>
           <p:cNvSpPr/>
           <p:nvPr/>
         </p:nvSpPr>
@@ -3036,7 +3136,7 @@
       </p:sp>
       <p:sp>
         <p:nvSpPr>
-          <p:cNvPr id="27" name="Text 21"/>
+          <p:cNvPr id="31" name="Text 25"/>
           <p:cNvSpPr/>
           <p:nvPr/>
         </p:nvSpPr>
@@ -3077,7 +3177,7 @@
       </p:sp>
       <p:sp>
         <p:nvSpPr>
-          <p:cNvPr id="28" name="Text 22"/>
+          <p:cNvPr id="32" name="Text 26"/>
           <p:cNvSpPr/>
           <p:nvPr/>
         </p:nvSpPr>
@@ -3118,7 +3218,7 @@
       </p:sp>
       <p:sp>
         <p:nvSpPr>
-          <p:cNvPr id="29" name="Shape 23"/>
+          <p:cNvPr id="33" name="Shape 27"/>
           <p:cNvSpPr/>
           <p:nvPr/>
         </p:nvSpPr>
@@ -3143,7 +3243,7 @@
       </p:sp>
       <p:sp>
         <p:nvSpPr>
-          <p:cNvPr id="30" name="Text 24"/>
+          <p:cNvPr id="34" name="Text 28"/>
           <p:cNvSpPr/>
           <p:nvPr/>
         </p:nvSpPr>
@@ -3184,7 +3284,7 @@
       </p:sp>
       <p:sp>
         <p:nvSpPr>
-          <p:cNvPr id="31" name="Text 25"/>
+          <p:cNvPr id="35" name="Text 29"/>
           <p:cNvSpPr/>
           <p:nvPr/>
         </p:nvSpPr>
@@ -3225,7 +3325,7 @@
       </p:sp>
       <p:sp>
         <p:nvSpPr>
-          <p:cNvPr id="32" name="Shape 26"/>
+          <p:cNvPr id="36" name="Shape 30"/>
           <p:cNvSpPr/>
           <p:nvPr/>
         </p:nvSpPr>
@@ -3250,7 +3350,7 @@
       </p:sp>
       <p:sp>
         <p:nvSpPr>
-          <p:cNvPr id="33" name="Text 27"/>
+          <p:cNvPr id="37" name="Text 31"/>
           <p:cNvSpPr/>
           <p:nvPr/>
         </p:nvSpPr>
@@ -3291,7 +3391,7 @@
       </p:sp>
       <p:sp>
         <p:nvSpPr>
-          <p:cNvPr id="34" name="Text 28"/>
+          <p:cNvPr id="38" name="Text 32"/>
           <p:cNvSpPr/>
           <p:nvPr/>
         </p:nvSpPr>
@@ -3332,7 +3432,7 @@
       </p:sp>
       <p:sp>
         <p:nvSpPr>
-          <p:cNvPr id="35" name="Shape 29"/>
+          <p:cNvPr id="39" name="Shape 33"/>
           <p:cNvSpPr/>
           <p:nvPr/>
         </p:nvSpPr>
@@ -3357,7 +3457,7 @@
       </p:sp>
       <p:sp>
         <p:nvSpPr>
-          <p:cNvPr id="36" name="Text 30"/>
+          <p:cNvPr id="40" name="Text 34"/>
           <p:cNvSpPr/>
           <p:nvPr/>
         </p:nvSpPr>
@@ -3398,7 +3498,7 @@
       </p:sp>
       <p:sp>
         <p:nvSpPr>
-          <p:cNvPr id="37" name="Text 31"/>
+          <p:cNvPr id="41" name="Text 35"/>
           <p:cNvSpPr/>
           <p:nvPr/>
         </p:nvSpPr>

--- a/ranking-nyata.pptx
+++ b/ranking-nyata.pptx
@@ -2849,12 +2849,12 @@
         </p:nvSpPr>
         <p:spPr>
           <a:xfrm>
-            <a:off x="8813902" y="2131466"/>
-            <a:ext cx="1188720" cy="475488"/>
+            <a:off x="8813902" y="2186330"/>
+            <a:ext cx="1188720" cy="365760"/>
           </a:xfrm>
           <a:prstGeom prst="roundRect">
             <a:avLst>
-              <a:gd name="adj" fmla="val 53846"/>
+              <a:gd name="adj" fmla="val 50000"/>
             </a:avLst>
           </a:prstGeom>
           <a:solidFill>
@@ -2876,8 +2876,8 @@
         </p:nvSpPr>
         <p:spPr>
           <a:xfrm>
-            <a:off x="8813902" y="2131466"/>
-            <a:ext cx="1188720" cy="475488"/>
+            <a:off x="8813902" y="2186330"/>
+            <a:ext cx="1188720" cy="365760"/>
           </a:xfrm>
           <a:prstGeom prst="rect">
             <a:avLst/>

--- a/ranking-nyata.pptx
+++ b/ranking-nyata.pptx
@@ -2614,7 +2614,7 @@
         <p:spPr>
           <a:xfrm>
             <a:off x="4708246" y="2186330"/>
-            <a:ext cx="3977640" cy="7925"/>
+            <a:ext cx="3977640" cy="8778"/>
           </a:xfrm>
           <a:prstGeom prst="rect">
             <a:avLst/>
@@ -2638,18 +2638,18 @@
         </p:nvSpPr>
         <p:spPr>
           <a:xfrm>
-            <a:off x="4708246" y="2194255"/>
-            <a:ext cx="3977640" cy="7925"/>
-          </a:xfrm>
-          <a:prstGeom prst="rect">
-            <a:avLst/>
-          </a:prstGeom>
-          <a:solidFill>
-            <a:srgbClr val="5676DF"/>
+            <a:off x="4708246" y="2195109"/>
+            <a:ext cx="3977640" cy="8778"/>
+          </a:xfrm>
+          <a:prstGeom prst="rect">
+            <a:avLst/>
+          </a:prstGeom>
+          <a:solidFill>
+            <a:srgbClr val="6687E7"/>
           </a:solidFill>
           <a:ln w="12700">
             <a:solidFill>
-              <a:srgbClr val="5676DF"/>
+              <a:srgbClr val="6687E7"/>
             </a:solidFill>
             <a:prstDash val="solid"/>
           </a:ln>
@@ -2663,18 +2663,18 @@
         </p:nvSpPr>
         <p:spPr>
           <a:xfrm>
-            <a:off x="4708246" y="2202180"/>
-            <a:ext cx="3977640" cy="7925"/>
-          </a:xfrm>
-          <a:prstGeom prst="rect">
-            <a:avLst/>
-          </a:prstGeom>
-          <a:solidFill>
-            <a:srgbClr val="2C4CCC"/>
+            <a:off x="4708246" y="2203887"/>
+            <a:ext cx="3977640" cy="8778"/>
+          </a:xfrm>
+          <a:prstGeom prst="rect">
+            <a:avLst/>
+          </a:prstGeom>
+          <a:solidFill>
+            <a:srgbClr val="4D6EDB"/>
           </a:solidFill>
           <a:ln w="12700">
             <a:solidFill>
-              <a:srgbClr val="2C4CCC"/>
+              <a:srgbClr val="4D6EDB"/>
             </a:solidFill>
             <a:prstDash val="solid"/>
           </a:ln>
@@ -2688,8 +2688,58 @@
         </p:nvSpPr>
         <p:spPr>
           <a:xfrm>
-            <a:off x="4708246" y="2210105"/>
-            <a:ext cx="3977640" cy="318211"/>
+            <a:off x="4708246" y="2212665"/>
+            <a:ext cx="3977640" cy="8778"/>
+          </a:xfrm>
+          <a:prstGeom prst="rect">
+            <a:avLst/>
+          </a:prstGeom>
+          <a:solidFill>
+            <a:srgbClr val="3554D0"/>
+          </a:solidFill>
+          <a:ln w="12700">
+            <a:solidFill>
+              <a:srgbClr val="3554D0"/>
+            </a:solidFill>
+            <a:prstDash val="solid"/>
+          </a:ln>
+        </p:spPr>
+      </p:sp>
+      <p:sp>
+        <p:nvSpPr>
+          <p:cNvPr id="17" name="Shape 11"/>
+          <p:cNvSpPr/>
+          <p:nvPr/>
+        </p:nvSpPr>
+        <p:spPr>
+          <a:xfrm>
+            <a:off x="4708246" y="2221443"/>
+            <a:ext cx="3977640" cy="8778"/>
+          </a:xfrm>
+          <a:prstGeom prst="rect">
+            <a:avLst/>
+          </a:prstGeom>
+          <a:solidFill>
+            <a:srgbClr val="1C3BC4"/>
+          </a:solidFill>
+          <a:ln w="12700">
+            <a:solidFill>
+              <a:srgbClr val="1C3BC4"/>
+            </a:solidFill>
+            <a:prstDash val="solid"/>
+          </a:ln>
+        </p:spPr>
+      </p:sp>
+      <p:sp>
+        <p:nvSpPr>
+          <p:cNvPr id="18" name="Shape 12"/>
+          <p:cNvSpPr/>
+          <p:nvPr/>
+        </p:nvSpPr>
+        <p:spPr>
+          <a:xfrm>
+            <a:off x="4708246" y="2230222"/>
+            <a:ext cx="3977640" cy="277978"/>
           </a:xfrm>
           <a:prstGeom prst="rect">
             <a:avLst/>
@@ -2707,24 +2757,24 @@
       </p:sp>
       <p:sp>
         <p:nvSpPr>
-          <p:cNvPr id="17" name="Shape 11"/>
-          <p:cNvSpPr/>
-          <p:nvPr/>
-        </p:nvSpPr>
-        <p:spPr>
-          <a:xfrm>
-            <a:off x="4708246" y="2528316"/>
-            <a:ext cx="3977640" cy="7925"/>
-          </a:xfrm>
-          <a:prstGeom prst="rect">
-            <a:avLst/>
-          </a:prstGeom>
-          <a:solidFill>
-            <a:srgbClr val="2C4CCC"/>
+          <p:cNvPr id="19" name="Shape 13"/>
+          <p:cNvSpPr/>
+          <p:nvPr/>
+        </p:nvSpPr>
+        <p:spPr>
+          <a:xfrm>
+            <a:off x="4708246" y="2508199"/>
+            <a:ext cx="3977640" cy="8778"/>
+          </a:xfrm>
+          <a:prstGeom prst="rect">
+            <a:avLst/>
+          </a:prstGeom>
+          <a:solidFill>
+            <a:srgbClr val="1C3BC4"/>
           </a:solidFill>
           <a:ln w="12700">
             <a:solidFill>
-              <a:srgbClr val="2C4CCC"/>
+              <a:srgbClr val="1C3BC4"/>
             </a:solidFill>
             <a:prstDash val="solid"/>
           </a:ln>
@@ -2732,24 +2782,24 @@
       </p:sp>
       <p:sp>
         <p:nvSpPr>
-          <p:cNvPr id="18" name="Shape 12"/>
-          <p:cNvSpPr/>
-          <p:nvPr/>
-        </p:nvSpPr>
-        <p:spPr>
-          <a:xfrm>
-            <a:off x="4708246" y="2536241"/>
-            <a:ext cx="3977640" cy="7925"/>
-          </a:xfrm>
-          <a:prstGeom prst="rect">
-            <a:avLst/>
-          </a:prstGeom>
-          <a:solidFill>
-            <a:srgbClr val="5676DF"/>
+          <p:cNvPr id="20" name="Shape 14"/>
+          <p:cNvSpPr/>
+          <p:nvPr/>
+        </p:nvSpPr>
+        <p:spPr>
+          <a:xfrm>
+            <a:off x="4708246" y="2516977"/>
+            <a:ext cx="3977640" cy="8778"/>
+          </a:xfrm>
+          <a:prstGeom prst="rect">
+            <a:avLst/>
+          </a:prstGeom>
+          <a:solidFill>
+            <a:srgbClr val="3554D0"/>
           </a:solidFill>
           <a:ln w="12700">
             <a:solidFill>
-              <a:srgbClr val="5676DF"/>
+              <a:srgbClr val="3554D0"/>
             </a:solidFill>
             <a:prstDash val="solid"/>
           </a:ln>
@@ -2757,14 +2807,64 @@
       </p:sp>
       <p:sp>
         <p:nvSpPr>
-          <p:cNvPr id="19" name="Shape 13"/>
-          <p:cNvSpPr/>
-          <p:nvPr/>
-        </p:nvSpPr>
-        <p:spPr>
-          <a:xfrm>
-            <a:off x="4708246" y="2544166"/>
-            <a:ext cx="3977640" cy="7925"/>
+          <p:cNvPr id="21" name="Shape 15"/>
+          <p:cNvSpPr/>
+          <p:nvPr/>
+        </p:nvSpPr>
+        <p:spPr>
+          <a:xfrm>
+            <a:off x="4708246" y="2525756"/>
+            <a:ext cx="3977640" cy="8778"/>
+          </a:xfrm>
+          <a:prstGeom prst="rect">
+            <a:avLst/>
+          </a:prstGeom>
+          <a:solidFill>
+            <a:srgbClr val="4D6EDB"/>
+          </a:solidFill>
+          <a:ln w="12700">
+            <a:solidFill>
+              <a:srgbClr val="4D6EDB"/>
+            </a:solidFill>
+            <a:prstDash val="solid"/>
+          </a:ln>
+        </p:spPr>
+      </p:sp>
+      <p:sp>
+        <p:nvSpPr>
+          <p:cNvPr id="22" name="Shape 16"/>
+          <p:cNvSpPr/>
+          <p:nvPr/>
+        </p:nvSpPr>
+        <p:spPr>
+          <a:xfrm>
+            <a:off x="4708246" y="2534534"/>
+            <a:ext cx="3977640" cy="8778"/>
+          </a:xfrm>
+          <a:prstGeom prst="rect">
+            <a:avLst/>
+          </a:prstGeom>
+          <a:solidFill>
+            <a:srgbClr val="6687E7"/>
+          </a:solidFill>
+          <a:ln w="12700">
+            <a:solidFill>
+              <a:srgbClr val="6687E7"/>
+            </a:solidFill>
+            <a:prstDash val="solid"/>
+          </a:ln>
+        </p:spPr>
+      </p:sp>
+      <p:sp>
+        <p:nvSpPr>
+          <p:cNvPr id="23" name="Shape 17"/>
+          <p:cNvSpPr/>
+          <p:nvPr/>
+        </p:nvSpPr>
+        <p:spPr>
+          <a:xfrm>
+            <a:off x="4708246" y="2543312"/>
+            <a:ext cx="3977640" cy="8778"/>
           </a:xfrm>
           <a:prstGeom prst="rect">
             <a:avLst/>
@@ -2782,7 +2882,7 @@
       </p:sp>
       <p:sp>
         <p:nvSpPr>
-          <p:cNvPr id="20" name="Shape 14"/>
+          <p:cNvPr id="24" name="Shape 18"/>
           <p:cNvSpPr/>
           <p:nvPr/>
         </p:nvSpPr>
@@ -2804,7 +2904,7 @@
       </p:sp>
       <p:sp>
         <p:nvSpPr>
-          <p:cNvPr id="21" name="Text 15"/>
+          <p:cNvPr id="25" name="Text 19"/>
           <p:cNvSpPr/>
           <p:nvPr/>
         </p:nvSpPr>
@@ -2843,7 +2943,7 @@
       </p:sp>
       <p:sp>
         <p:nvSpPr>
-          <p:cNvPr id="22" name="Shape 16"/>
+          <p:cNvPr id="26" name="Shape 20"/>
           <p:cNvSpPr/>
           <p:nvPr/>
         </p:nvSpPr>
@@ -2870,7 +2970,7 @@
       </p:sp>
       <p:sp>
         <p:nvSpPr>
-          <p:cNvPr id="23" name="Text 17"/>
+          <p:cNvPr id="27" name="Text 21"/>
           <p:cNvSpPr/>
           <p:nvPr/>
         </p:nvSpPr>
@@ -2911,7 +3011,7 @@
       </p:sp>
       <p:sp>
         <p:nvSpPr>
-          <p:cNvPr id="24" name="Shape 18"/>
+          <p:cNvPr id="28" name="Shape 22"/>
           <p:cNvSpPr/>
           <p:nvPr/>
         </p:nvSpPr>
@@ -2938,7 +3038,7 @@
       </p:sp>
       <p:sp>
         <p:nvSpPr>
-          <p:cNvPr id="25" name="Shape 19"/>
+          <p:cNvPr id="29" name="Shape 23"/>
           <p:cNvSpPr/>
           <p:nvPr/>
         </p:nvSpPr>
@@ -2965,7 +3065,7 @@
       </p:sp>
       <p:sp>
         <p:nvSpPr>
-          <p:cNvPr id="26" name="Text 20"/>
+          <p:cNvPr id="30" name="Text 24"/>
           <p:cNvSpPr/>
           <p:nvPr/>
         </p:nvSpPr>
@@ -3004,7 +3104,7 @@
       </p:sp>
       <p:sp>
         <p:nvSpPr>
-          <p:cNvPr id="27" name="Shape 21"/>
+          <p:cNvPr id="31" name="Shape 25"/>
           <p:cNvSpPr/>
           <p:nvPr/>
         </p:nvSpPr>
@@ -3029,7 +3129,7 @@
       </p:sp>
       <p:sp>
         <p:nvSpPr>
-          <p:cNvPr id="28" name="Text 22"/>
+          <p:cNvPr id="32" name="Text 26"/>
           <p:cNvSpPr/>
           <p:nvPr/>
         </p:nvSpPr>
@@ -3070,7 +3170,7 @@
       </p:sp>
       <p:sp>
         <p:nvSpPr>
-          <p:cNvPr id="29" name="Text 23"/>
+          <p:cNvPr id="33" name="Text 27"/>
           <p:cNvSpPr/>
           <p:nvPr/>
         </p:nvSpPr>
@@ -3111,7 +3211,7 @@
       </p:sp>
       <p:sp>
         <p:nvSpPr>
-          <p:cNvPr id="30" name="Shape 24"/>
+          <p:cNvPr id="34" name="Shape 28"/>
           <p:cNvSpPr/>
           <p:nvPr/>
         </p:nvSpPr>
@@ -3136,7 +3236,7 @@
       </p:sp>
       <p:sp>
         <p:nvSpPr>
-          <p:cNvPr id="31" name="Text 25"/>
+          <p:cNvPr id="35" name="Text 29"/>
           <p:cNvSpPr/>
           <p:nvPr/>
         </p:nvSpPr>
@@ -3177,7 +3277,7 @@
       </p:sp>
       <p:sp>
         <p:nvSpPr>
-          <p:cNvPr id="32" name="Text 26"/>
+          <p:cNvPr id="36" name="Text 30"/>
           <p:cNvSpPr/>
           <p:nvPr/>
         </p:nvSpPr>
@@ -3218,7 +3318,7 @@
       </p:sp>
       <p:sp>
         <p:nvSpPr>
-          <p:cNvPr id="33" name="Shape 27"/>
+          <p:cNvPr id="37" name="Shape 31"/>
           <p:cNvSpPr/>
           <p:nvPr/>
         </p:nvSpPr>
@@ -3243,7 +3343,7 @@
       </p:sp>
       <p:sp>
         <p:nvSpPr>
-          <p:cNvPr id="34" name="Text 28"/>
+          <p:cNvPr id="38" name="Text 32"/>
           <p:cNvSpPr/>
           <p:nvPr/>
         </p:nvSpPr>
@@ -3284,7 +3384,7 @@
       </p:sp>
       <p:sp>
         <p:nvSpPr>
-          <p:cNvPr id="35" name="Text 29"/>
+          <p:cNvPr id="39" name="Text 33"/>
           <p:cNvSpPr/>
           <p:nvPr/>
         </p:nvSpPr>
@@ -3325,7 +3425,7 @@
       </p:sp>
       <p:sp>
         <p:nvSpPr>
-          <p:cNvPr id="36" name="Shape 30"/>
+          <p:cNvPr id="40" name="Shape 34"/>
           <p:cNvSpPr/>
           <p:nvPr/>
         </p:nvSpPr>
@@ -3350,7 +3450,7 @@
       </p:sp>
       <p:sp>
         <p:nvSpPr>
-          <p:cNvPr id="37" name="Text 31"/>
+          <p:cNvPr id="41" name="Text 35"/>
           <p:cNvSpPr/>
           <p:nvPr/>
         </p:nvSpPr>
@@ -3391,7 +3491,7 @@
       </p:sp>
       <p:sp>
         <p:nvSpPr>
-          <p:cNvPr id="38" name="Text 32"/>
+          <p:cNvPr id="42" name="Text 36"/>
           <p:cNvSpPr/>
           <p:nvPr/>
         </p:nvSpPr>
@@ -3432,7 +3532,7 @@
       </p:sp>
       <p:sp>
         <p:nvSpPr>
-          <p:cNvPr id="39" name="Shape 33"/>
+          <p:cNvPr id="43" name="Shape 37"/>
           <p:cNvSpPr/>
           <p:nvPr/>
         </p:nvSpPr>
@@ -3457,7 +3557,7 @@
       </p:sp>
       <p:sp>
         <p:nvSpPr>
-          <p:cNvPr id="40" name="Text 34"/>
+          <p:cNvPr id="44" name="Text 38"/>
           <p:cNvSpPr/>
           <p:nvPr/>
         </p:nvSpPr>
@@ -3498,7 +3598,7 @@
       </p:sp>
       <p:sp>
         <p:nvSpPr>
-          <p:cNvPr id="41" name="Text 35"/>
+          <p:cNvPr id="45" name="Text 39"/>
           <p:cNvSpPr/>
           <p:nvPr/>
         </p:nvSpPr>

--- a/ranking-nyata.pptx
+++ b/ranking-nyata.pptx
@@ -1652,15 +1652,15 @@
           </a:xfrm>
           <a:prstGeom prst="roundRect">
             <a:avLst>
-              <a:gd name="adj" fmla="val 66667"/>
+              <a:gd name="adj" fmla="val 22222"/>
             </a:avLst>
           </a:prstGeom>
           <a:solidFill>
-            <a:srgbClr val="0B1E6B"/>
+            <a:srgbClr val="0F44BE"/>
           </a:solidFill>
           <a:ln w="12700">
             <a:solidFill>
-              <a:srgbClr val="0B1E6B"/>
+              <a:srgbClr val="0F44BE"/>
             </a:solidFill>
             <a:prstDash val="solid"/>
           </a:ln>
@@ -3049,15 +3049,15 @@
           </a:xfrm>
           <a:prstGeom prst="roundRect">
             <a:avLst>
-              <a:gd name="adj" fmla="val 66667"/>
+              <a:gd name="adj" fmla="val 22222"/>
             </a:avLst>
           </a:prstGeom>
           <a:solidFill>
-            <a:srgbClr val="0B1E6B"/>
+            <a:srgbClr val="0F44BE"/>
           </a:solidFill>
           <a:ln w="12700">
             <a:solidFill>
-              <a:srgbClr val="0B1E6B"/>
+              <a:srgbClr val="0F44BE"/>
             </a:solidFill>
             <a:prstDash val="solid"/>
           </a:ln>

--- a/ranking-nyata.pptx
+++ b/ranking-nyata.pptx
@@ -1128,7 +1128,7 @@
               <a:buNone/>
             </a:pPr>
             <a:r>
-              <a:rPr lang="en-US" sz="2000" dirty="0">
+              <a:rPr lang="en-US" sz="1800" dirty="0">
                 <a:solidFill>
                   <a:srgbClr val="FFFFFF"/>
                 </a:solidFill>
@@ -1138,7 +1138,7 @@
               </a:rPr>
               <a:t>Semua unit</a:t>
             </a:r>
-            <a:endParaRPr lang="en-US" sz="2000" dirty="0"/>
+            <a:endParaRPr lang="en-US" sz="1800" dirty="0"/>
           </a:p>
         </p:txBody>
       </p:sp>
@@ -1625,7 +1625,7 @@
           </a:xfrm>
           <a:prstGeom prst="roundRect">
             <a:avLst>
-              <a:gd name="adj" fmla="val 8333"/>
+              <a:gd name="adj" fmla="val 24028"/>
             </a:avLst>
           </a:prstGeom>
           <a:solidFill>
@@ -2436,7 +2436,7 @@
               <a:buNone/>
             </a:pPr>
             <a:r>
-              <a:rPr lang="en-US" sz="2000" dirty="0">
+              <a:rPr lang="en-US" sz="1800" dirty="0">
                 <a:solidFill>
                   <a:srgbClr val="FFFFFF"/>
                 </a:solidFill>
@@ -2444,9 +2444,9 @@
                 <a:ea typeface="Poppins" pitchFamily="34" charset="-122"/>
                 <a:cs typeface="Poppins" pitchFamily="34" charset="-120"/>
               </a:rPr>
-              <a:t>244 KC MAMUJU</a:t>
-            </a:r>
-            <a:endParaRPr lang="en-US" sz="2000" dirty="0"/>
+              <a:t>KC MAMUJU</a:t>
+            </a:r>
+            <a:endParaRPr lang="en-US" sz="1800" dirty="0"/>
           </a:p>
         </p:txBody>
       </p:sp>
@@ -3022,7 +3022,7 @@
           </a:xfrm>
           <a:prstGeom prst="roundRect">
             <a:avLst>
-              <a:gd name="adj" fmla="val 8333"/>
+              <a:gd name="adj" fmla="val 24028"/>
             </a:avLst>
           </a:prstGeom>
           <a:solidFill>

--- a/ranking-nyata.pptx
+++ b/ranking-nyata.pptx
@@ -11,8 +11,8 @@
   <p:notesMasterIdLst>
     <p:notesMasterId r:id="rId4"/>
   </p:notesMasterIdLst>
-  <p:sldSz cx="12191970" cy="6858000"/>
-  <p:notesSz cx="6858000" cy="12191970"/>
+  <p:sldSz cx="12192000" cy="6858000"/>
+  <p:notesSz cx="6858000" cy="12192000"/>
   <p:defaultTextStyle>
     <a:lvl1pPr marL="0" algn="l" defTabSz="914400" rtl="0" eaLnBrk="1" latinLnBrk="0" hangingPunct="1">
       <a:defRPr sz="1800" kern="1200">
@@ -981,7 +981,7 @@
         <p:spPr>
           <a:xfrm>
             <a:off x="0" y="-28346"/>
-            <a:ext cx="12191970" cy="6986930"/>
+            <a:ext cx="12192000" cy="6986930"/>
           </a:xfrm>
           <a:prstGeom prst="rect">
             <a:avLst/>
@@ -2289,7 +2289,7 @@
         <p:spPr>
           <a:xfrm>
             <a:off x="0" y="-28346"/>
-            <a:ext cx="12191970" cy="6986930"/>
+            <a:ext cx="12192000" cy="6986930"/>
           </a:xfrm>
           <a:prstGeom prst="rect">
             <a:avLst/>

--- a/ranking-nyata.pptx
+++ b/ranking-nyata.pptx
@@ -1054,9 +1054,7 @@
           <a:ln/>
         </p:spPr>
         <p:txBody>
-          <a:bodyPr wrap="square" rtlCol="0" anchor="ctr">
-            <a:normAutofit/>
-          </a:bodyPr>
+          <a:bodyPr wrap="square" rtlCol="0" anchor="ctr"/>
           <a:lstStyle/>
           <a:p>
             <a:pPr algn="ctr" indent="0" marL="0">
@@ -1085,12 +1083,12 @@
         </p:nvSpPr>
         <p:spPr>
           <a:xfrm>
-            <a:off x="4607662" y="1151230"/>
-            <a:ext cx="2991002" cy="461772"/>
+            <a:off x="4404665" y="1261872"/>
+            <a:ext cx="3382366" cy="651967"/>
           </a:xfrm>
           <a:prstGeom prst="roundRect">
             <a:avLst>
-              <a:gd name="adj" fmla="val 19802"/>
+              <a:gd name="adj" fmla="val 15989"/>
             </a:avLst>
           </a:prstGeom>
           <a:ln w="15875">
@@ -1109,19 +1107,17 @@
         </p:nvSpPr>
         <p:spPr>
           <a:xfrm>
-            <a:off x="4607662" y="1151230"/>
-            <a:ext cx="2991002" cy="461772"/>
-          </a:xfrm>
-          <a:prstGeom prst="rect">
-            <a:avLst/>
-          </a:prstGeom>
-          <a:noFill/>
-          <a:ln/>
-        </p:spPr>
-        <p:txBody>
-          <a:bodyPr wrap="square" rtlCol="0" anchor="ctr">
-            <a:normAutofit/>
-          </a:bodyPr>
+            <a:off x="4404665" y="1298448"/>
+            <a:ext cx="3382366" cy="289408"/>
+          </a:xfrm>
+          <a:prstGeom prst="rect">
+            <a:avLst/>
+          </a:prstGeom>
+          <a:noFill/>
+          <a:ln/>
+        </p:spPr>
+        <p:txBody>
+          <a:bodyPr wrap="square" rtlCol="0" anchor="ctr"/>
           <a:lstStyle/>
           <a:p>
             <a:pPr algn="ctr" indent="0" marL="0">
@@ -1150,19 +1146,17 @@
         </p:nvSpPr>
         <p:spPr>
           <a:xfrm>
-            <a:off x="4772254" y="1681582"/>
-            <a:ext cx="2648102" cy="369418"/>
-          </a:xfrm>
-          <a:prstGeom prst="rect">
-            <a:avLst/>
-          </a:prstGeom>
-          <a:noFill/>
-          <a:ln/>
-        </p:spPr>
-        <p:txBody>
-          <a:bodyPr wrap="square" rtlCol="0" anchor="ctr">
-            <a:normAutofit/>
-          </a:bodyPr>
+            <a:off x="4772254" y="1587856"/>
+            <a:ext cx="2648102" cy="289408"/>
+          </a:xfrm>
+          <a:prstGeom prst="rect">
+            <a:avLst/>
+          </a:prstGeom>
+          <a:noFill/>
+          <a:ln/>
+        </p:spPr>
+        <p:txBody>
+          <a:bodyPr wrap="square" rtlCol="0" anchor="ctr"/>
           <a:lstStyle/>
           <a:p>
             <a:pPr algn="ctr" indent="0" marL="0">
@@ -1173,9 +1167,9 @@
                 <a:solidFill>
                   <a:srgbClr val="FFFFFF"/>
                 </a:solidFill>
-                <a:latin typeface="Aptos" pitchFamily="34" charset="0"/>
-                <a:ea typeface="Aptos" pitchFamily="34" charset="-122"/>
-                <a:cs typeface="Aptos" pitchFamily="34" charset="-120"/>
+                <a:latin typeface="Aptos Display" pitchFamily="34" charset="0"/>
+                <a:ea typeface="Aptos Display" pitchFamily="34" charset="-122"/>
+                <a:cs typeface="Aptos Display" pitchFamily="34" charset="-120"/>
               </a:rPr>
               <a:t>Semua posisi</a:t>
             </a:r>
@@ -1748,9 +1742,7 @@
           <a:ln/>
         </p:spPr>
         <p:txBody>
-          <a:bodyPr wrap="square" rtlCol="0" anchor="ctr">
-            <a:normAutofit/>
-          </a:bodyPr>
+          <a:bodyPr wrap="square" rtlCol="0" anchor="ctr"/>
           <a:lstStyle/>
           <a:p>
             <a:pPr indent="0" marL="0">
@@ -1789,9 +1781,7 @@
           <a:ln/>
         </p:spPr>
         <p:txBody>
-          <a:bodyPr wrap="square" rtlCol="0" anchor="ctr">
-            <a:normAutofit/>
-          </a:bodyPr>
+          <a:bodyPr wrap="square" rtlCol="0" anchor="ctr"/>
           <a:lstStyle/>
           <a:p>
             <a:pPr indent="0" marL="0">
@@ -1855,9 +1845,7 @@
           <a:ln/>
         </p:spPr>
         <p:txBody>
-          <a:bodyPr wrap="square" rtlCol="0" anchor="ctr">
-            <a:normAutofit/>
-          </a:bodyPr>
+          <a:bodyPr wrap="square" rtlCol="0" anchor="ctr"/>
           <a:lstStyle/>
           <a:p>
             <a:pPr indent="0" marL="0">
@@ -1896,9 +1884,7 @@
           <a:ln/>
         </p:spPr>
         <p:txBody>
-          <a:bodyPr wrap="square" rtlCol="0" anchor="ctr">
-            <a:normAutofit/>
-          </a:bodyPr>
+          <a:bodyPr wrap="square" rtlCol="0" anchor="ctr"/>
           <a:lstStyle/>
           <a:p>
             <a:pPr indent="0" marL="0">
@@ -1962,9 +1948,7 @@
           <a:ln/>
         </p:spPr>
         <p:txBody>
-          <a:bodyPr wrap="square" rtlCol="0" anchor="ctr">
-            <a:normAutofit/>
-          </a:bodyPr>
+          <a:bodyPr wrap="square" rtlCol="0" anchor="ctr"/>
           <a:lstStyle/>
           <a:p>
             <a:pPr indent="0" marL="0">
@@ -2003,9 +1987,7 @@
           <a:ln/>
         </p:spPr>
         <p:txBody>
-          <a:bodyPr wrap="square" rtlCol="0" anchor="ctr">
-            <a:normAutofit/>
-          </a:bodyPr>
+          <a:bodyPr wrap="square" rtlCol="0" anchor="ctr"/>
           <a:lstStyle/>
           <a:p>
             <a:pPr indent="0" marL="0">
@@ -2069,9 +2051,7 @@
           <a:ln/>
         </p:spPr>
         <p:txBody>
-          <a:bodyPr wrap="square" rtlCol="0" anchor="ctr">
-            <a:normAutofit/>
-          </a:bodyPr>
+          <a:bodyPr wrap="square" rtlCol="0" anchor="ctr"/>
           <a:lstStyle/>
           <a:p>
             <a:pPr indent="0" marL="0">
@@ -2110,9 +2090,7 @@
           <a:ln/>
         </p:spPr>
         <p:txBody>
-          <a:bodyPr wrap="square" rtlCol="0" anchor="ctr">
-            <a:normAutofit/>
-          </a:bodyPr>
+          <a:bodyPr wrap="square" rtlCol="0" anchor="ctr"/>
           <a:lstStyle/>
           <a:p>
             <a:pPr indent="0" marL="0">
@@ -2176,9 +2154,7 @@
           <a:ln/>
         </p:spPr>
         <p:txBody>
-          <a:bodyPr wrap="square" rtlCol="0" anchor="ctr">
-            <a:normAutofit/>
-          </a:bodyPr>
+          <a:bodyPr wrap="square" rtlCol="0" anchor="ctr"/>
           <a:lstStyle/>
           <a:p>
             <a:pPr indent="0" marL="0">
@@ -2217,9 +2193,7 @@
           <a:ln/>
         </p:spPr>
         <p:txBody>
-          <a:bodyPr wrap="square" rtlCol="0" anchor="ctr">
-            <a:normAutofit/>
-          </a:bodyPr>
+          <a:bodyPr wrap="square" rtlCol="0" anchor="ctr"/>
           <a:lstStyle/>
           <a:p>
             <a:pPr indent="0" marL="0">
@@ -2362,9 +2336,7 @@
           <a:ln/>
         </p:spPr>
         <p:txBody>
-          <a:bodyPr wrap="square" rtlCol="0" anchor="ctr">
-            <a:normAutofit/>
-          </a:bodyPr>
+          <a:bodyPr wrap="square" rtlCol="0" anchor="ctr"/>
           <a:lstStyle/>
           <a:p>
             <a:pPr algn="ctr" indent="0" marL="0">
@@ -2393,12 +2365,12 @@
         </p:nvSpPr>
         <p:spPr>
           <a:xfrm>
-            <a:off x="4607662" y="1151230"/>
-            <a:ext cx="2991002" cy="461772"/>
+            <a:off x="4404665" y="1261872"/>
+            <a:ext cx="3382366" cy="651967"/>
           </a:xfrm>
           <a:prstGeom prst="roundRect">
             <a:avLst>
-              <a:gd name="adj" fmla="val 19802"/>
+              <a:gd name="adj" fmla="val 15989"/>
             </a:avLst>
           </a:prstGeom>
           <a:ln w="15875">
@@ -2417,19 +2389,17 @@
         </p:nvSpPr>
         <p:spPr>
           <a:xfrm>
-            <a:off x="4607662" y="1151230"/>
-            <a:ext cx="2991002" cy="461772"/>
-          </a:xfrm>
-          <a:prstGeom prst="rect">
-            <a:avLst/>
-          </a:prstGeom>
-          <a:noFill/>
-          <a:ln/>
-        </p:spPr>
-        <p:txBody>
-          <a:bodyPr wrap="square" rtlCol="0" anchor="ctr">
-            <a:normAutofit/>
-          </a:bodyPr>
+            <a:off x="4404665" y="1298448"/>
+            <a:ext cx="3382366" cy="289408"/>
+          </a:xfrm>
+          <a:prstGeom prst="rect">
+            <a:avLst/>
+          </a:prstGeom>
+          <a:noFill/>
+          <a:ln/>
+        </p:spPr>
+        <p:txBody>
+          <a:bodyPr wrap="square" rtlCol="0" anchor="ctr"/>
           <a:lstStyle/>
           <a:p>
             <a:pPr algn="ctr" indent="0" marL="0">
@@ -2458,19 +2428,17 @@
         </p:nvSpPr>
         <p:spPr>
           <a:xfrm>
-            <a:off x="4772254" y="1681582"/>
-            <a:ext cx="2648102" cy="369418"/>
-          </a:xfrm>
-          <a:prstGeom prst="rect">
-            <a:avLst/>
-          </a:prstGeom>
-          <a:noFill/>
-          <a:ln/>
-        </p:spPr>
-        <p:txBody>
-          <a:bodyPr wrap="square" rtlCol="0" anchor="ctr">
-            <a:normAutofit/>
-          </a:bodyPr>
+            <a:off x="4772254" y="1587856"/>
+            <a:ext cx="2648102" cy="289408"/>
+          </a:xfrm>
+          <a:prstGeom prst="rect">
+            <a:avLst/>
+          </a:prstGeom>
+          <a:noFill/>
+          <a:ln/>
+        </p:spPr>
+        <p:txBody>
+          <a:bodyPr wrap="square" rtlCol="0" anchor="ctr"/>
           <a:lstStyle/>
           <a:p>
             <a:pPr algn="ctr" indent="0" marL="0">
@@ -2481,9 +2449,9 @@
                 <a:solidFill>
                   <a:srgbClr val="FFFFFF"/>
                 </a:solidFill>
-                <a:latin typeface="Aptos" pitchFamily="34" charset="0"/>
-                <a:ea typeface="Aptos" pitchFamily="34" charset="-122"/>
-                <a:cs typeface="Aptos" pitchFamily="34" charset="-120"/>
+                <a:latin typeface="Aptos Display" pitchFamily="34" charset="0"/>
+                <a:ea typeface="Aptos Display" pitchFamily="34" charset="-122"/>
+                <a:cs typeface="Aptos Display" pitchFamily="34" charset="-120"/>
               </a:rPr>
               <a:t>Teller Service</a:t>
             </a:r>
@@ -2582,9 +2550,7 @@
           <a:ln/>
         </p:spPr>
         <p:txBody>
-          <a:bodyPr wrap="none" rtlCol="0" anchor="ctr">
-            <a:normAutofit/>
-          </a:bodyPr>
+          <a:bodyPr wrap="none" rtlCol="0" anchor="ctr"/>
           <a:lstStyle/>
           <a:p>
             <a:pPr algn="l" indent="0" marL="0">
@@ -2986,9 +2952,7 @@
           <a:ln/>
         </p:spPr>
         <p:txBody>
-          <a:bodyPr wrap="square" rtlCol="0" anchor="ctr">
-            <a:normAutofit/>
-          </a:bodyPr>
+          <a:bodyPr wrap="square" rtlCol="0" anchor="ctr"/>
           <a:lstStyle/>
           <a:p>
             <a:pPr algn="ctr" indent="0" marL="0">
@@ -3145,9 +3109,7 @@
           <a:ln/>
         </p:spPr>
         <p:txBody>
-          <a:bodyPr wrap="square" rtlCol="0" anchor="ctr">
-            <a:normAutofit/>
-          </a:bodyPr>
+          <a:bodyPr wrap="square" rtlCol="0" anchor="ctr"/>
           <a:lstStyle/>
           <a:p>
             <a:pPr indent="0" marL="0">
@@ -3186,9 +3148,7 @@
           <a:ln/>
         </p:spPr>
         <p:txBody>
-          <a:bodyPr wrap="square" rtlCol="0" anchor="ctr">
-            <a:normAutofit/>
-          </a:bodyPr>
+          <a:bodyPr wrap="square" rtlCol="0" anchor="ctr"/>
           <a:lstStyle/>
           <a:p>
             <a:pPr indent="0" marL="0">
@@ -3252,9 +3212,7 @@
           <a:ln/>
         </p:spPr>
         <p:txBody>
-          <a:bodyPr wrap="square" rtlCol="0" anchor="ctr">
-            <a:normAutofit/>
-          </a:bodyPr>
+          <a:bodyPr wrap="square" rtlCol="0" anchor="ctr"/>
           <a:lstStyle/>
           <a:p>
             <a:pPr indent="0" marL="0">
@@ -3293,9 +3251,7 @@
           <a:ln/>
         </p:spPr>
         <p:txBody>
-          <a:bodyPr wrap="square" rtlCol="0" anchor="ctr">
-            <a:normAutofit/>
-          </a:bodyPr>
+          <a:bodyPr wrap="square" rtlCol="0" anchor="ctr"/>
           <a:lstStyle/>
           <a:p>
             <a:pPr indent="0" marL="0">
@@ -3359,9 +3315,7 @@
           <a:ln/>
         </p:spPr>
         <p:txBody>
-          <a:bodyPr wrap="square" rtlCol="0" anchor="ctr">
-            <a:normAutofit/>
-          </a:bodyPr>
+          <a:bodyPr wrap="square" rtlCol="0" anchor="ctr"/>
           <a:lstStyle/>
           <a:p>
             <a:pPr indent="0" marL="0">
@@ -3400,9 +3354,7 @@
           <a:ln/>
         </p:spPr>
         <p:txBody>
-          <a:bodyPr wrap="square" rtlCol="0" anchor="ctr">
-            <a:normAutofit/>
-          </a:bodyPr>
+          <a:bodyPr wrap="square" rtlCol="0" anchor="ctr"/>
           <a:lstStyle/>
           <a:p>
             <a:pPr indent="0" marL="0">
@@ -3466,9 +3418,7 @@
           <a:ln/>
         </p:spPr>
         <p:txBody>
-          <a:bodyPr wrap="square" rtlCol="0" anchor="ctr">
-            <a:normAutofit/>
-          </a:bodyPr>
+          <a:bodyPr wrap="square" rtlCol="0" anchor="ctr"/>
           <a:lstStyle/>
           <a:p>
             <a:pPr indent="0" marL="0">
@@ -3507,9 +3457,7 @@
           <a:ln/>
         </p:spPr>
         <p:txBody>
-          <a:bodyPr wrap="square" rtlCol="0" anchor="ctr">
-            <a:normAutofit/>
-          </a:bodyPr>
+          <a:bodyPr wrap="square" rtlCol="0" anchor="ctr"/>
           <a:lstStyle/>
           <a:p>
             <a:pPr indent="0" marL="0">
@@ -3573,9 +3521,7 @@
           <a:ln/>
         </p:spPr>
         <p:txBody>
-          <a:bodyPr wrap="square" rtlCol="0" anchor="ctr">
-            <a:normAutofit/>
-          </a:bodyPr>
+          <a:bodyPr wrap="square" rtlCol="0" anchor="ctr"/>
           <a:lstStyle/>
           <a:p>
             <a:pPr indent="0" marL="0">
@@ -3614,9 +3560,7 @@
           <a:ln/>
         </p:spPr>
         <p:txBody>
-          <a:bodyPr wrap="square" rtlCol="0" anchor="ctr">
-            <a:normAutofit/>
-          </a:bodyPr>
+          <a:bodyPr wrap="square" rtlCol="0" anchor="ctr"/>
           <a:lstStyle/>
           <a:p>
             <a:pPr indent="0" marL="0">

--- a/ranking-nyata.pptx
+++ b/ranking-nyata.pptx
@@ -1083,12 +1083,12 @@
         </p:nvSpPr>
         <p:spPr>
           <a:xfrm>
-            <a:off x="4404665" y="1261872"/>
-            <a:ext cx="3382366" cy="651967"/>
+            <a:off x="4607662" y="1151230"/>
+            <a:ext cx="2991002" cy="461772"/>
           </a:xfrm>
           <a:prstGeom prst="roundRect">
             <a:avLst>
-              <a:gd name="adj" fmla="val 15989"/>
+              <a:gd name="adj" fmla="val 15842"/>
             </a:avLst>
           </a:prstGeom>
           <a:ln w="15875">
@@ -1107,8 +1107,8 @@
         </p:nvSpPr>
         <p:spPr>
           <a:xfrm>
-            <a:off x="4404665" y="1298448"/>
-            <a:ext cx="3382366" cy="289408"/>
+            <a:off x="4607662" y="1151230"/>
+            <a:ext cx="2991002" cy="461772"/>
           </a:xfrm>
           <a:prstGeom prst="rect">
             <a:avLst/>
@@ -1146,8 +1146,8 @@
         </p:nvSpPr>
         <p:spPr>
           <a:xfrm>
-            <a:off x="4772254" y="1587856"/>
-            <a:ext cx="2648102" cy="289408"/>
+            <a:off x="4772254" y="1681582"/>
+            <a:ext cx="2648102" cy="369418"/>
           </a:xfrm>
           <a:prstGeom prst="rect">
             <a:avLst/>
@@ -2365,12 +2365,12 @@
         </p:nvSpPr>
         <p:spPr>
           <a:xfrm>
-            <a:off x="4404665" y="1261872"/>
-            <a:ext cx="3382366" cy="651967"/>
+            <a:off x="4607662" y="1151230"/>
+            <a:ext cx="2991002" cy="461772"/>
           </a:xfrm>
           <a:prstGeom prst="roundRect">
             <a:avLst>
-              <a:gd name="adj" fmla="val 15989"/>
+              <a:gd name="adj" fmla="val 15842"/>
             </a:avLst>
           </a:prstGeom>
           <a:ln w="15875">
@@ -2389,8 +2389,8 @@
         </p:nvSpPr>
         <p:spPr>
           <a:xfrm>
-            <a:off x="4404665" y="1298448"/>
-            <a:ext cx="3382366" cy="289408"/>
+            <a:off x="4607662" y="1151230"/>
+            <a:ext cx="2991002" cy="461772"/>
           </a:xfrm>
           <a:prstGeom prst="rect">
             <a:avLst/>
@@ -2428,8 +2428,8 @@
         </p:nvSpPr>
         <p:spPr>
           <a:xfrm>
-            <a:off x="4772254" y="1587856"/>
-            <a:ext cx="2648102" cy="289408"/>
+            <a:off x="4772254" y="1681582"/>
+            <a:ext cx="2648102" cy="369418"/>
           </a:xfrm>
           <a:prstGeom prst="rect">
             <a:avLst/>

--- a/ranking-nyata.pptx
+++ b/ranking-nyata.pptx
@@ -2565,7 +2565,7 @@
                 <a:ea typeface="Aptos" pitchFamily="34" charset="-122"/>
                 <a:cs typeface="Aptos" pitchFamily="34" charset="-120"/>
               </a:rPr>
-              <a:t>IRWAN ALLO</a:t>
+              <a:t>IRWAN A.</a:t>
             </a:r>
             <a:endParaRPr lang="en-US" sz="1600" dirty="0"/>
           </a:p>
@@ -2580,7 +2580,7 @@
         <p:spPr>
           <a:xfrm>
             <a:off x="4708246" y="2186330"/>
-            <a:ext cx="3977640" cy="8778"/>
+            <a:ext cx="2792303" cy="8778"/>
           </a:xfrm>
           <a:prstGeom prst="rect">
             <a:avLst/>
@@ -2605,7 +2605,7 @@
         <p:spPr>
           <a:xfrm>
             <a:off x="4708246" y="2195109"/>
-            <a:ext cx="3977640" cy="8778"/>
+            <a:ext cx="2792303" cy="8778"/>
           </a:xfrm>
           <a:prstGeom prst="rect">
             <a:avLst/>
@@ -2630,7 +2630,7 @@
         <p:spPr>
           <a:xfrm>
             <a:off x="4708246" y="2203887"/>
-            <a:ext cx="3977640" cy="8778"/>
+            <a:ext cx="2792303" cy="8778"/>
           </a:xfrm>
           <a:prstGeom prst="rect">
             <a:avLst/>
@@ -2655,7 +2655,7 @@
         <p:spPr>
           <a:xfrm>
             <a:off x="4708246" y="2212665"/>
-            <a:ext cx="3977640" cy="8778"/>
+            <a:ext cx="2792303" cy="8778"/>
           </a:xfrm>
           <a:prstGeom prst="rect">
             <a:avLst/>
@@ -2680,7 +2680,7 @@
         <p:spPr>
           <a:xfrm>
             <a:off x="4708246" y="2221443"/>
-            <a:ext cx="3977640" cy="8778"/>
+            <a:ext cx="2792303" cy="8778"/>
           </a:xfrm>
           <a:prstGeom prst="rect">
             <a:avLst/>
@@ -2705,7 +2705,7 @@
         <p:spPr>
           <a:xfrm>
             <a:off x="4708246" y="2230222"/>
-            <a:ext cx="3977640" cy="277978"/>
+            <a:ext cx="2792303" cy="277978"/>
           </a:xfrm>
           <a:prstGeom prst="rect">
             <a:avLst/>
@@ -2730,7 +2730,7 @@
         <p:spPr>
           <a:xfrm>
             <a:off x="4708246" y="2508199"/>
-            <a:ext cx="3977640" cy="8778"/>
+            <a:ext cx="2792303" cy="8778"/>
           </a:xfrm>
           <a:prstGeom prst="rect">
             <a:avLst/>
@@ -2755,7 +2755,7 @@
         <p:spPr>
           <a:xfrm>
             <a:off x="4708246" y="2516977"/>
-            <a:ext cx="3977640" cy="8778"/>
+            <a:ext cx="2792303" cy="8778"/>
           </a:xfrm>
           <a:prstGeom prst="rect">
             <a:avLst/>
@@ -2780,7 +2780,7 @@
         <p:spPr>
           <a:xfrm>
             <a:off x="4708246" y="2525756"/>
-            <a:ext cx="3977640" cy="8778"/>
+            <a:ext cx="2792303" cy="8778"/>
           </a:xfrm>
           <a:prstGeom prst="rect">
             <a:avLst/>
@@ -2805,7 +2805,7 @@
         <p:spPr>
           <a:xfrm>
             <a:off x="4708246" y="2534534"/>
-            <a:ext cx="3977640" cy="8778"/>
+            <a:ext cx="2792303" cy="8778"/>
           </a:xfrm>
           <a:prstGeom prst="rect">
             <a:avLst/>
@@ -2830,7 +2830,7 @@
         <p:spPr>
           <a:xfrm>
             <a:off x="4708246" y="2543312"/>
-            <a:ext cx="3977640" cy="8778"/>
+            <a:ext cx="2792303" cy="8778"/>
           </a:xfrm>
           <a:prstGeom prst="rect">
             <a:avLst/>
@@ -2877,7 +2877,7 @@
         <p:spPr>
           <a:xfrm>
             <a:off x="4708246" y="2186330"/>
-            <a:ext cx="3886200" cy="365760"/>
+            <a:ext cx="2719151" cy="365760"/>
           </a:xfrm>
           <a:prstGeom prst="rect">
             <a:avLst/>

--- a/ranking-nyata.pptx
+++ b/ranking-nyata.pptx
@@ -2855,7 +2855,7 @@
         <p:spPr>
           <a:xfrm>
             <a:off x="4708246" y="2186330"/>
-            <a:ext cx="3977640" cy="365760"/>
+            <a:ext cx="2792303" cy="365760"/>
           </a:xfrm>
           <a:prstGeom prst="rect">
             <a:avLst/>
@@ -2915,7 +2915,7 @@
         </p:nvSpPr>
         <p:spPr>
           <a:xfrm>
-            <a:off x="8813902" y="2186330"/>
+            <a:off x="7628565" y="2186330"/>
             <a:ext cx="1188720" cy="365760"/>
           </a:xfrm>
           <a:prstGeom prst="roundRect">
@@ -2942,7 +2942,7 @@
         </p:nvSpPr>
         <p:spPr>
           <a:xfrm>
-            <a:off x="8813902" y="2186330"/>
+            <a:off x="7628565" y="2186330"/>
             <a:ext cx="1188720" cy="365760"/>
           </a:xfrm>
           <a:prstGeom prst="rect">

--- a/ranking-nyata.pptx
+++ b/ranking-nyata.pptx
@@ -2467,7 +2467,7 @@
         </p:nvSpPr>
         <p:spPr>
           <a:xfrm>
-            <a:off x="4644238" y="2020824"/>
+            <a:off x="4251046" y="2020824"/>
             <a:ext cx="9144" cy="548640"/>
           </a:xfrm>
           <a:prstGeom prst="rect">
@@ -2541,7 +2541,7 @@
         <p:spPr>
           <a:xfrm>
             <a:off x="2723998" y="1929384"/>
-            <a:ext cx="1874520" cy="879653"/>
+            <a:ext cx="1481328" cy="879653"/>
           </a:xfrm>
           <a:prstGeom prst="rect">
             <a:avLst/>
@@ -2579,7 +2579,7 @@
         </p:nvSpPr>
         <p:spPr>
           <a:xfrm>
-            <a:off x="4708246" y="2186330"/>
+            <a:off x="4317980" y="2186330"/>
             <a:ext cx="2792303" cy="8778"/>
           </a:xfrm>
           <a:prstGeom prst="rect">
@@ -2604,7 +2604,7 @@
         </p:nvSpPr>
         <p:spPr>
           <a:xfrm>
-            <a:off x="4708246" y="2195109"/>
+            <a:off x="4317980" y="2195109"/>
             <a:ext cx="2792303" cy="8778"/>
           </a:xfrm>
           <a:prstGeom prst="rect">
@@ -2629,7 +2629,7 @@
         </p:nvSpPr>
         <p:spPr>
           <a:xfrm>
-            <a:off x="4708246" y="2203887"/>
+            <a:off x="4317980" y="2203887"/>
             <a:ext cx="2792303" cy="8778"/>
           </a:xfrm>
           <a:prstGeom prst="rect">
@@ -2654,7 +2654,7 @@
         </p:nvSpPr>
         <p:spPr>
           <a:xfrm>
-            <a:off x="4708246" y="2212665"/>
+            <a:off x="4317980" y="2212665"/>
             <a:ext cx="2792303" cy="8778"/>
           </a:xfrm>
           <a:prstGeom prst="rect">
@@ -2679,7 +2679,7 @@
         </p:nvSpPr>
         <p:spPr>
           <a:xfrm>
-            <a:off x="4708246" y="2221443"/>
+            <a:off x="4317980" y="2221443"/>
             <a:ext cx="2792303" cy="8778"/>
           </a:xfrm>
           <a:prstGeom prst="rect">
@@ -2704,7 +2704,7 @@
         </p:nvSpPr>
         <p:spPr>
           <a:xfrm>
-            <a:off x="4708246" y="2230222"/>
+            <a:off x="4317980" y="2230222"/>
             <a:ext cx="2792303" cy="277978"/>
           </a:xfrm>
           <a:prstGeom prst="rect">
@@ -2729,7 +2729,7 @@
         </p:nvSpPr>
         <p:spPr>
           <a:xfrm>
-            <a:off x="4708246" y="2508199"/>
+            <a:off x="4317980" y="2508199"/>
             <a:ext cx="2792303" cy="8778"/>
           </a:xfrm>
           <a:prstGeom prst="rect">
@@ -2754,7 +2754,7 @@
         </p:nvSpPr>
         <p:spPr>
           <a:xfrm>
-            <a:off x="4708246" y="2516977"/>
+            <a:off x="4317980" y="2516977"/>
             <a:ext cx="2792303" cy="8778"/>
           </a:xfrm>
           <a:prstGeom prst="rect">
@@ -2779,7 +2779,7 @@
         </p:nvSpPr>
         <p:spPr>
           <a:xfrm>
-            <a:off x="4708246" y="2525756"/>
+            <a:off x="4317980" y="2525756"/>
             <a:ext cx="2792303" cy="8778"/>
           </a:xfrm>
           <a:prstGeom prst="rect">
@@ -2804,7 +2804,7 @@
         </p:nvSpPr>
         <p:spPr>
           <a:xfrm>
-            <a:off x="4708246" y="2534534"/>
+            <a:off x="4317980" y="2534534"/>
             <a:ext cx="2792303" cy="8778"/>
           </a:xfrm>
           <a:prstGeom prst="rect">
@@ -2829,7 +2829,7 @@
         </p:nvSpPr>
         <p:spPr>
           <a:xfrm>
-            <a:off x="4708246" y="2543312"/>
+            <a:off x="4317980" y="2543312"/>
             <a:ext cx="2792303" cy="8778"/>
           </a:xfrm>
           <a:prstGeom prst="rect">
@@ -2854,7 +2854,7 @@
         </p:nvSpPr>
         <p:spPr>
           <a:xfrm>
-            <a:off x="4708246" y="2186330"/>
+            <a:off x="4317980" y="2186330"/>
             <a:ext cx="2792303" cy="365760"/>
           </a:xfrm>
           <a:prstGeom prst="rect">
@@ -2876,7 +2876,7 @@
         </p:nvSpPr>
         <p:spPr>
           <a:xfrm>
-            <a:off x="4708246" y="2186330"/>
+            <a:off x="4317980" y="2186330"/>
             <a:ext cx="2719151" cy="365760"/>
           </a:xfrm>
           <a:prstGeom prst="rect">
@@ -2915,7 +2915,7 @@
         </p:nvSpPr>
         <p:spPr>
           <a:xfrm>
-            <a:off x="7628565" y="2186330"/>
+            <a:off x="7238299" y="2186330"/>
             <a:ext cx="1188720" cy="365760"/>
           </a:xfrm>
           <a:prstGeom prst="roundRect">
@@ -2942,7 +2942,7 @@
         </p:nvSpPr>
         <p:spPr>
           <a:xfrm>
-            <a:off x="7628565" y="2186330"/>
+            <a:off x="7238299" y="2186330"/>
             <a:ext cx="1188720" cy="365760"/>
           </a:xfrm>
           <a:prstGeom prst="rect">

--- a/ranking-nyata.pptx
+++ b/ranking-nyata.pptx
@@ -2256,6 +2256,7 @@
         </p:nvPicPr>
         <p:blipFill>
           <a:blip r:embed="rId1"/>
+          <a:srcRect l="0" r="0" t="20371" b="20371"/>
           <a:stretch>
             <a:fillRect/>
           </a:stretch>
@@ -2414,7 +2415,7 @@
                 <a:ea typeface="Poppins" pitchFamily="34" charset="-122"/>
                 <a:cs typeface="Poppins" pitchFamily="34" charset="-120"/>
               </a:rPr>
-              <a:t>KC MAMUJU</a:t>
+              <a:t>KC Mamuju</a:t>
             </a:r>
             <a:endParaRPr lang="en-US" sz="1800" dirty="0"/>
           </a:p>
@@ -2565,7 +2566,7 @@
                 <a:ea typeface="Aptos" pitchFamily="34" charset="-122"/>
                 <a:cs typeface="Aptos" pitchFamily="34" charset="-120"/>
               </a:rPr>
-              <a:t>IRWAN A.</a:t>
+              <a:t>Irwan A.</a:t>
             </a:r>
             <a:endParaRPr lang="en-US" sz="1600" dirty="0"/>
           </a:p>

--- a/ranking-nyata.pptx
+++ b/ranking-nyata.pptx
@@ -2256,7 +2256,6 @@
         </p:nvPicPr>
         <p:blipFill>
           <a:blip r:embed="rId1"/>
-          <a:srcRect l="0" r="0" t="20371" b="20371"/>
           <a:stretch>
             <a:fillRect/>
           </a:stretch>
@@ -2487,7 +2486,7 @@
       </p:sp>
       <p:sp>
         <p:nvSpPr>
-          <p:cNvPr id="10" name="Shape 5"/>
+          <p:cNvPr id="10" name="FOTO_2_0"/>
           <p:cNvSpPr/>
           <p:nvPr/>
         </p:nvSpPr>
@@ -2508,34 +2507,17 @@
             <a:prstDash val="solid"/>
           </a:ln>
         </p:spPr>
-      </p:sp>
-      <p:pic>
-        <p:nvPicPr>
-          <p:cNvPr id="11" name="Image 3" descr="preencoded.png">    </p:cNvPr>
-          <p:cNvPicPr>
-            <a:picLocks noChangeAspect="1"/>
-          </p:cNvPicPr>
-          <p:nvPr/>
-        </p:nvPicPr>
         <p:blipFill>
-          <a:blip r:embed="rId4"/>
+          <a:blip r:embed="rId6"/>
+          <a:srcRect l="0" r="0" t="20371" b="20371"/>
           <a:stretch>
             <a:fillRect/>
           </a:stretch>
         </p:blipFill>
-        <p:spPr>
-          <a:xfrm>
-            <a:off x="1516075" y="1975104"/>
-            <a:ext cx="997610" cy="788213"/>
-          </a:xfrm>
-          <a:prstGeom prst="rect">
-            <a:avLst/>
-          </a:prstGeom>
-        </p:spPr>
-      </p:pic>
-      <p:sp>
-        <p:nvSpPr>
-          <p:cNvPr id="12" name="Text 6"/>
+      </p:sp>
+      <p:sp>
+        <p:nvSpPr>
+          <p:cNvPr id="11" name="Text 6"/>
           <p:cNvSpPr/>
           <p:nvPr/>
         </p:nvSpPr>
@@ -2574,7 +2556,7 @@
       </p:sp>
       <p:sp>
         <p:nvSpPr>
-          <p:cNvPr id="13" name="Shape 7"/>
+          <p:cNvPr id="12" name="Shape 7"/>
           <p:cNvSpPr/>
           <p:nvPr/>
         </p:nvSpPr>
@@ -2599,7 +2581,7 @@
       </p:sp>
       <p:sp>
         <p:nvSpPr>
-          <p:cNvPr id="14" name="Shape 8"/>
+          <p:cNvPr id="13" name="Shape 8"/>
           <p:cNvSpPr/>
           <p:nvPr/>
         </p:nvSpPr>
@@ -2624,7 +2606,7 @@
       </p:sp>
       <p:sp>
         <p:nvSpPr>
-          <p:cNvPr id="15" name="Shape 9"/>
+          <p:cNvPr id="14" name="Shape 9"/>
           <p:cNvSpPr/>
           <p:nvPr/>
         </p:nvSpPr>
@@ -2649,7 +2631,7 @@
       </p:sp>
       <p:sp>
         <p:nvSpPr>
-          <p:cNvPr id="16" name="Shape 10"/>
+          <p:cNvPr id="15" name="Shape 10"/>
           <p:cNvSpPr/>
           <p:nvPr/>
         </p:nvSpPr>
@@ -2674,7 +2656,7 @@
       </p:sp>
       <p:sp>
         <p:nvSpPr>
-          <p:cNvPr id="17" name="Shape 11"/>
+          <p:cNvPr id="16" name="Shape 11"/>
           <p:cNvSpPr/>
           <p:nvPr/>
         </p:nvSpPr>
@@ -2699,7 +2681,7 @@
       </p:sp>
       <p:sp>
         <p:nvSpPr>
-          <p:cNvPr id="18" name="Shape 12"/>
+          <p:cNvPr id="17" name="Shape 12"/>
           <p:cNvSpPr/>
           <p:nvPr/>
         </p:nvSpPr>
@@ -2724,7 +2706,7 @@
       </p:sp>
       <p:sp>
         <p:nvSpPr>
-          <p:cNvPr id="19" name="Shape 13"/>
+          <p:cNvPr id="18" name="Shape 13"/>
           <p:cNvSpPr/>
           <p:nvPr/>
         </p:nvSpPr>
@@ -2749,7 +2731,7 @@
       </p:sp>
       <p:sp>
         <p:nvSpPr>
-          <p:cNvPr id="20" name="Shape 14"/>
+          <p:cNvPr id="19" name="Shape 14"/>
           <p:cNvSpPr/>
           <p:nvPr/>
         </p:nvSpPr>
@@ -2774,7 +2756,7 @@
       </p:sp>
       <p:sp>
         <p:nvSpPr>
-          <p:cNvPr id="21" name="Shape 15"/>
+          <p:cNvPr id="20" name="Shape 15"/>
           <p:cNvSpPr/>
           <p:nvPr/>
         </p:nvSpPr>
@@ -2799,7 +2781,7 @@
       </p:sp>
       <p:sp>
         <p:nvSpPr>
-          <p:cNvPr id="22" name="Shape 16"/>
+          <p:cNvPr id="21" name="Shape 16"/>
           <p:cNvSpPr/>
           <p:nvPr/>
         </p:nvSpPr>
@@ -2824,7 +2806,7 @@
       </p:sp>
       <p:sp>
         <p:nvSpPr>
-          <p:cNvPr id="23" name="Shape 17"/>
+          <p:cNvPr id="22" name="Shape 17"/>
           <p:cNvSpPr/>
           <p:nvPr/>
         </p:nvSpPr>
@@ -2849,7 +2831,7 @@
       </p:sp>
       <p:sp>
         <p:nvSpPr>
-          <p:cNvPr id="24" name="Shape 18"/>
+          <p:cNvPr id="23" name="Shape 18"/>
           <p:cNvSpPr/>
           <p:nvPr/>
         </p:nvSpPr>
@@ -2871,7 +2853,7 @@
       </p:sp>
       <p:sp>
         <p:nvSpPr>
-          <p:cNvPr id="25" name="Text 19"/>
+          <p:cNvPr id="24" name="Text 19"/>
           <p:cNvSpPr/>
           <p:nvPr/>
         </p:nvSpPr>
@@ -2910,7 +2892,7 @@
       </p:sp>
       <p:sp>
         <p:nvSpPr>
-          <p:cNvPr id="26" name="Shape 20"/>
+          <p:cNvPr id="25" name="Shape 20"/>
           <p:cNvSpPr/>
           <p:nvPr/>
         </p:nvSpPr>
@@ -2937,7 +2919,7 @@
       </p:sp>
       <p:sp>
         <p:nvSpPr>
-          <p:cNvPr id="27" name="Text 21"/>
+          <p:cNvPr id="26" name="Text 21"/>
           <p:cNvSpPr/>
           <p:nvPr/>
         </p:nvSpPr>
@@ -2976,7 +2958,7 @@
       </p:sp>
       <p:sp>
         <p:nvSpPr>
-          <p:cNvPr id="28" name="Shape 22"/>
+          <p:cNvPr id="27" name="Shape 22"/>
           <p:cNvSpPr/>
           <p:nvPr/>
         </p:nvSpPr>
@@ -3003,7 +2985,7 @@
       </p:sp>
       <p:sp>
         <p:nvSpPr>
-          <p:cNvPr id="29" name="Shape 23"/>
+          <p:cNvPr id="28" name="Shape 23"/>
           <p:cNvSpPr/>
           <p:nvPr/>
         </p:nvSpPr>
@@ -3030,7 +3012,7 @@
       </p:sp>
       <p:sp>
         <p:nvSpPr>
-          <p:cNvPr id="30" name="Text 24"/>
+          <p:cNvPr id="29" name="Text 24"/>
           <p:cNvSpPr/>
           <p:nvPr/>
         </p:nvSpPr>
@@ -3069,7 +3051,7 @@
       </p:sp>
       <p:sp>
         <p:nvSpPr>
-          <p:cNvPr id="31" name="Shape 25"/>
+          <p:cNvPr id="30" name="Shape 25"/>
           <p:cNvSpPr/>
           <p:nvPr/>
         </p:nvSpPr>
@@ -3094,7 +3076,7 @@
       </p:sp>
       <p:sp>
         <p:nvSpPr>
-          <p:cNvPr id="32" name="Text 26"/>
+          <p:cNvPr id="31" name="Text 26"/>
           <p:cNvSpPr/>
           <p:nvPr/>
         </p:nvSpPr>
@@ -3133,7 +3115,7 @@
       </p:sp>
       <p:sp>
         <p:nvSpPr>
-          <p:cNvPr id="33" name="Text 27"/>
+          <p:cNvPr id="32" name="Text 27"/>
           <p:cNvSpPr/>
           <p:nvPr/>
         </p:nvSpPr>
@@ -3172,7 +3154,7 @@
       </p:sp>
       <p:sp>
         <p:nvSpPr>
-          <p:cNvPr id="34" name="Shape 28"/>
+          <p:cNvPr id="33" name="Shape 28"/>
           <p:cNvSpPr/>
           <p:nvPr/>
         </p:nvSpPr>
@@ -3197,7 +3179,7 @@
       </p:sp>
       <p:sp>
         <p:nvSpPr>
-          <p:cNvPr id="35" name="Text 29"/>
+          <p:cNvPr id="34" name="Text 29"/>
           <p:cNvSpPr/>
           <p:nvPr/>
         </p:nvSpPr>
@@ -3236,7 +3218,7 @@
       </p:sp>
       <p:sp>
         <p:nvSpPr>
-          <p:cNvPr id="36" name="Text 30"/>
+          <p:cNvPr id="35" name="Text 30"/>
           <p:cNvSpPr/>
           <p:nvPr/>
         </p:nvSpPr>
@@ -3275,7 +3257,7 @@
       </p:sp>
       <p:sp>
         <p:nvSpPr>
-          <p:cNvPr id="37" name="Shape 31"/>
+          <p:cNvPr id="36" name="Shape 31"/>
           <p:cNvSpPr/>
           <p:nvPr/>
         </p:nvSpPr>
@@ -3300,7 +3282,7 @@
       </p:sp>
       <p:sp>
         <p:nvSpPr>
-          <p:cNvPr id="38" name="Text 32"/>
+          <p:cNvPr id="37" name="Text 32"/>
           <p:cNvSpPr/>
           <p:nvPr/>
         </p:nvSpPr>
@@ -3339,7 +3321,7 @@
       </p:sp>
       <p:sp>
         <p:nvSpPr>
-          <p:cNvPr id="39" name="Text 33"/>
+          <p:cNvPr id="38" name="Text 33"/>
           <p:cNvSpPr/>
           <p:nvPr/>
         </p:nvSpPr>
@@ -3378,7 +3360,7 @@
       </p:sp>
       <p:sp>
         <p:nvSpPr>
-          <p:cNvPr id="40" name="Shape 34"/>
+          <p:cNvPr id="39" name="Shape 34"/>
           <p:cNvSpPr/>
           <p:nvPr/>
         </p:nvSpPr>
@@ -3403,7 +3385,7 @@
       </p:sp>
       <p:sp>
         <p:nvSpPr>
-          <p:cNvPr id="41" name="Text 35"/>
+          <p:cNvPr id="40" name="Text 35"/>
           <p:cNvSpPr/>
           <p:nvPr/>
         </p:nvSpPr>
@@ -3442,7 +3424,7 @@
       </p:sp>
       <p:sp>
         <p:nvSpPr>
-          <p:cNvPr id="42" name="Text 36"/>
+          <p:cNvPr id="41" name="Text 36"/>
           <p:cNvSpPr/>
           <p:nvPr/>
         </p:nvSpPr>
@@ -3481,7 +3463,7 @@
       </p:sp>
       <p:sp>
         <p:nvSpPr>
-          <p:cNvPr id="43" name="Shape 37"/>
+          <p:cNvPr id="42" name="Shape 37"/>
           <p:cNvSpPr/>
           <p:nvPr/>
         </p:nvSpPr>
@@ -3506,7 +3488,7 @@
       </p:sp>
       <p:sp>
         <p:nvSpPr>
-          <p:cNvPr id="44" name="Text 38"/>
+          <p:cNvPr id="43" name="Text 38"/>
           <p:cNvSpPr/>
           <p:nvPr/>
         </p:nvSpPr>
@@ -3545,7 +3527,7 @@
       </p:sp>
       <p:sp>
         <p:nvSpPr>
-          <p:cNvPr id="45" name="Text 39"/>
+          <p:cNvPr id="44" name="Text 39"/>
           <p:cNvSpPr/>
           <p:nvPr/>
         </p:nvSpPr>

--- a/ranking-nyata.pptx
+++ b/ranking-nyata.pptx
@@ -2486,7 +2486,7 @@
       </p:sp>
       <p:sp>
         <p:nvSpPr>
-          <p:cNvPr id="10" name="FOTO_2_0"/>
+          <p:cNvPr id="10" name="Shape 5"/>
           <p:cNvSpPr/>
           <p:nvPr/>
         </p:nvSpPr>
@@ -2507,17 +2507,34 @@
             <a:prstDash val="solid"/>
           </a:ln>
         </p:spPr>
+      </p:sp>
+      <p:pic>
+        <p:nvPicPr>
+          <p:cNvPr id="11" name="Image 3" descr="preencoded.png">    </p:cNvPr>
+          <p:cNvPicPr>
+            <a:picLocks noChangeAspect="1"/>
+          </p:cNvPicPr>
+          <p:nvPr/>
+        </p:nvPicPr>
         <p:blipFill>
-          <a:blip r:embed="rId6"/>
-          <a:srcRect l="0" r="0" t="20371" b="20371"/>
+          <a:blip r:embed="rId4"/>
           <a:stretch>
             <a:fillRect/>
           </a:stretch>
         </p:blipFill>
-      </p:sp>
-      <p:sp>
-        <p:nvSpPr>
-          <p:cNvPr id="11" name="Text 6"/>
+        <p:spPr>
+          <a:xfrm>
+            <a:off x="1470355" y="1929384"/>
+            <a:ext cx="1089050" cy="879653"/>
+          </a:xfrm>
+          <a:prstGeom prst="rect">
+            <a:avLst/>
+          </a:prstGeom>
+        </p:spPr>
+      </p:pic>
+      <p:sp>
+        <p:nvSpPr>
+          <p:cNvPr id="12" name="Text 6"/>
           <p:cNvSpPr/>
           <p:nvPr/>
         </p:nvSpPr>
@@ -2556,7 +2573,7 @@
       </p:sp>
       <p:sp>
         <p:nvSpPr>
-          <p:cNvPr id="12" name="Shape 7"/>
+          <p:cNvPr id="13" name="Shape 7"/>
           <p:cNvSpPr/>
           <p:nvPr/>
         </p:nvSpPr>
@@ -2581,7 +2598,7 @@
       </p:sp>
       <p:sp>
         <p:nvSpPr>
-          <p:cNvPr id="13" name="Shape 8"/>
+          <p:cNvPr id="14" name="Shape 8"/>
           <p:cNvSpPr/>
           <p:nvPr/>
         </p:nvSpPr>
@@ -2606,7 +2623,7 @@
       </p:sp>
       <p:sp>
         <p:nvSpPr>
-          <p:cNvPr id="14" name="Shape 9"/>
+          <p:cNvPr id="15" name="Shape 9"/>
           <p:cNvSpPr/>
           <p:nvPr/>
         </p:nvSpPr>
@@ -2631,7 +2648,7 @@
       </p:sp>
       <p:sp>
         <p:nvSpPr>
-          <p:cNvPr id="15" name="Shape 10"/>
+          <p:cNvPr id="16" name="Shape 10"/>
           <p:cNvSpPr/>
           <p:nvPr/>
         </p:nvSpPr>
@@ -2656,7 +2673,7 @@
       </p:sp>
       <p:sp>
         <p:nvSpPr>
-          <p:cNvPr id="16" name="Shape 11"/>
+          <p:cNvPr id="17" name="Shape 11"/>
           <p:cNvSpPr/>
           <p:nvPr/>
         </p:nvSpPr>
@@ -2681,7 +2698,7 @@
       </p:sp>
       <p:sp>
         <p:nvSpPr>
-          <p:cNvPr id="17" name="Shape 12"/>
+          <p:cNvPr id="18" name="Shape 12"/>
           <p:cNvSpPr/>
           <p:nvPr/>
         </p:nvSpPr>
@@ -2706,7 +2723,7 @@
       </p:sp>
       <p:sp>
         <p:nvSpPr>
-          <p:cNvPr id="18" name="Shape 13"/>
+          <p:cNvPr id="19" name="Shape 13"/>
           <p:cNvSpPr/>
           <p:nvPr/>
         </p:nvSpPr>
@@ -2731,7 +2748,7 @@
       </p:sp>
       <p:sp>
         <p:nvSpPr>
-          <p:cNvPr id="19" name="Shape 14"/>
+          <p:cNvPr id="20" name="Shape 14"/>
           <p:cNvSpPr/>
           <p:nvPr/>
         </p:nvSpPr>
@@ -2756,7 +2773,7 @@
       </p:sp>
       <p:sp>
         <p:nvSpPr>
-          <p:cNvPr id="20" name="Shape 15"/>
+          <p:cNvPr id="21" name="Shape 15"/>
           <p:cNvSpPr/>
           <p:nvPr/>
         </p:nvSpPr>
@@ -2781,7 +2798,7 @@
       </p:sp>
       <p:sp>
         <p:nvSpPr>
-          <p:cNvPr id="21" name="Shape 16"/>
+          <p:cNvPr id="22" name="Shape 16"/>
           <p:cNvSpPr/>
           <p:nvPr/>
         </p:nvSpPr>
@@ -2806,7 +2823,7 @@
       </p:sp>
       <p:sp>
         <p:nvSpPr>
-          <p:cNvPr id="22" name="Shape 17"/>
+          <p:cNvPr id="23" name="Shape 17"/>
           <p:cNvSpPr/>
           <p:nvPr/>
         </p:nvSpPr>
@@ -2831,7 +2848,7 @@
       </p:sp>
       <p:sp>
         <p:nvSpPr>
-          <p:cNvPr id="23" name="Shape 18"/>
+          <p:cNvPr id="24" name="Shape 18"/>
           <p:cNvSpPr/>
           <p:nvPr/>
         </p:nvSpPr>
@@ -2853,7 +2870,7 @@
       </p:sp>
       <p:sp>
         <p:nvSpPr>
-          <p:cNvPr id="24" name="Text 19"/>
+          <p:cNvPr id="25" name="Text 19"/>
           <p:cNvSpPr/>
           <p:nvPr/>
         </p:nvSpPr>
@@ -2892,7 +2909,7 @@
       </p:sp>
       <p:sp>
         <p:nvSpPr>
-          <p:cNvPr id="25" name="Shape 20"/>
+          <p:cNvPr id="26" name="Shape 20"/>
           <p:cNvSpPr/>
           <p:nvPr/>
         </p:nvSpPr>
@@ -2919,7 +2936,7 @@
       </p:sp>
       <p:sp>
         <p:nvSpPr>
-          <p:cNvPr id="26" name="Text 21"/>
+          <p:cNvPr id="27" name="Text 21"/>
           <p:cNvSpPr/>
           <p:nvPr/>
         </p:nvSpPr>
@@ -2958,7 +2975,7 @@
       </p:sp>
       <p:sp>
         <p:nvSpPr>
-          <p:cNvPr id="27" name="Shape 22"/>
+          <p:cNvPr id="28" name="Shape 22"/>
           <p:cNvSpPr/>
           <p:nvPr/>
         </p:nvSpPr>
@@ -2985,7 +3002,7 @@
       </p:sp>
       <p:sp>
         <p:nvSpPr>
-          <p:cNvPr id="28" name="Shape 23"/>
+          <p:cNvPr id="29" name="Shape 23"/>
           <p:cNvSpPr/>
           <p:nvPr/>
         </p:nvSpPr>
@@ -3012,7 +3029,7 @@
       </p:sp>
       <p:sp>
         <p:nvSpPr>
-          <p:cNvPr id="29" name="Text 24"/>
+          <p:cNvPr id="30" name="Text 24"/>
           <p:cNvSpPr/>
           <p:nvPr/>
         </p:nvSpPr>
@@ -3051,7 +3068,7 @@
       </p:sp>
       <p:sp>
         <p:nvSpPr>
-          <p:cNvPr id="30" name="Shape 25"/>
+          <p:cNvPr id="31" name="Shape 25"/>
           <p:cNvSpPr/>
           <p:nvPr/>
         </p:nvSpPr>
@@ -3076,7 +3093,7 @@
       </p:sp>
       <p:sp>
         <p:nvSpPr>
-          <p:cNvPr id="31" name="Text 26"/>
+          <p:cNvPr id="32" name="Text 26"/>
           <p:cNvSpPr/>
           <p:nvPr/>
         </p:nvSpPr>
@@ -3115,7 +3132,7 @@
       </p:sp>
       <p:sp>
         <p:nvSpPr>
-          <p:cNvPr id="32" name="Text 27"/>
+          <p:cNvPr id="33" name="Text 27"/>
           <p:cNvSpPr/>
           <p:nvPr/>
         </p:nvSpPr>
@@ -3154,7 +3171,7 @@
       </p:sp>
       <p:sp>
         <p:nvSpPr>
-          <p:cNvPr id="33" name="Shape 28"/>
+          <p:cNvPr id="34" name="Shape 28"/>
           <p:cNvSpPr/>
           <p:nvPr/>
         </p:nvSpPr>
@@ -3179,7 +3196,7 @@
       </p:sp>
       <p:sp>
         <p:nvSpPr>
-          <p:cNvPr id="34" name="Text 29"/>
+          <p:cNvPr id="35" name="Text 29"/>
           <p:cNvSpPr/>
           <p:nvPr/>
         </p:nvSpPr>
@@ -3218,7 +3235,7 @@
       </p:sp>
       <p:sp>
         <p:nvSpPr>
-          <p:cNvPr id="35" name="Text 30"/>
+          <p:cNvPr id="36" name="Text 30"/>
           <p:cNvSpPr/>
           <p:nvPr/>
         </p:nvSpPr>
@@ -3257,7 +3274,7 @@
       </p:sp>
       <p:sp>
         <p:nvSpPr>
-          <p:cNvPr id="36" name="Shape 31"/>
+          <p:cNvPr id="37" name="Shape 31"/>
           <p:cNvSpPr/>
           <p:nvPr/>
         </p:nvSpPr>
@@ -3282,7 +3299,7 @@
       </p:sp>
       <p:sp>
         <p:nvSpPr>
-          <p:cNvPr id="37" name="Text 32"/>
+          <p:cNvPr id="38" name="Text 32"/>
           <p:cNvSpPr/>
           <p:nvPr/>
         </p:nvSpPr>
@@ -3321,7 +3338,7 @@
       </p:sp>
       <p:sp>
         <p:nvSpPr>
-          <p:cNvPr id="38" name="Text 33"/>
+          <p:cNvPr id="39" name="Text 33"/>
           <p:cNvSpPr/>
           <p:nvPr/>
         </p:nvSpPr>
@@ -3360,7 +3377,7 @@
       </p:sp>
       <p:sp>
         <p:nvSpPr>
-          <p:cNvPr id="39" name="Shape 34"/>
+          <p:cNvPr id="40" name="Shape 34"/>
           <p:cNvSpPr/>
           <p:nvPr/>
         </p:nvSpPr>
@@ -3385,7 +3402,7 @@
       </p:sp>
       <p:sp>
         <p:nvSpPr>
-          <p:cNvPr id="40" name="Text 35"/>
+          <p:cNvPr id="41" name="Text 35"/>
           <p:cNvSpPr/>
           <p:nvPr/>
         </p:nvSpPr>
@@ -3424,7 +3441,7 @@
       </p:sp>
       <p:sp>
         <p:nvSpPr>
-          <p:cNvPr id="41" name="Text 36"/>
+          <p:cNvPr id="42" name="Text 36"/>
           <p:cNvSpPr/>
           <p:nvPr/>
         </p:nvSpPr>
@@ -3463,7 +3480,7 @@
       </p:sp>
       <p:sp>
         <p:nvSpPr>
-          <p:cNvPr id="42" name="Shape 37"/>
+          <p:cNvPr id="43" name="Shape 37"/>
           <p:cNvSpPr/>
           <p:nvPr/>
         </p:nvSpPr>
@@ -3488,7 +3505,7 @@
       </p:sp>
       <p:sp>
         <p:nvSpPr>
-          <p:cNvPr id="43" name="Text 38"/>
+          <p:cNvPr id="44" name="Text 38"/>
           <p:cNvSpPr/>
           <p:nvPr/>
         </p:nvSpPr>
@@ -3527,7 +3544,7 @@
       </p:sp>
       <p:sp>
         <p:nvSpPr>
-          <p:cNvPr id="44" name="Text 39"/>
+          <p:cNvPr id="45" name="Text 39"/>
           <p:cNvSpPr/>
           <p:nvPr/>
         </p:nvSpPr>

--- a/ranking-nyata.pptx
+++ b/ranking-nyata.pptx
@@ -2580,7 +2580,7 @@
         <p:spPr>
           <a:xfrm>
             <a:off x="4317980" y="2186330"/>
-            <a:ext cx="2792303" cy="8778"/>
+            <a:ext cx="2792303" cy="12070"/>
           </a:xfrm>
           <a:prstGeom prst="rect">
             <a:avLst/>
@@ -2604,8 +2604,8 @@
         </p:nvSpPr>
         <p:spPr>
           <a:xfrm>
-            <a:off x="4317980" y="2195109"/>
-            <a:ext cx="2792303" cy="8778"/>
+            <a:off x="4317980" y="2198400"/>
+            <a:ext cx="2792303" cy="12070"/>
           </a:xfrm>
           <a:prstGeom prst="rect">
             <a:avLst/>
@@ -2629,8 +2629,8 @@
         </p:nvSpPr>
         <p:spPr>
           <a:xfrm>
-            <a:off x="4317980" y="2203887"/>
-            <a:ext cx="2792303" cy="8778"/>
+            <a:off x="4317980" y="2210471"/>
+            <a:ext cx="2792303" cy="12070"/>
           </a:xfrm>
           <a:prstGeom prst="rect">
             <a:avLst/>
@@ -2654,8 +2654,8 @@
         </p:nvSpPr>
         <p:spPr>
           <a:xfrm>
-            <a:off x="4317980" y="2212665"/>
-            <a:ext cx="2792303" cy="8778"/>
+            <a:off x="4317980" y="2222541"/>
+            <a:ext cx="2792303" cy="12070"/>
           </a:xfrm>
           <a:prstGeom prst="rect">
             <a:avLst/>
@@ -2679,8 +2679,8 @@
         </p:nvSpPr>
         <p:spPr>
           <a:xfrm>
-            <a:off x="4317980" y="2221443"/>
-            <a:ext cx="2792303" cy="8778"/>
+            <a:off x="4317980" y="2234611"/>
+            <a:ext cx="2792303" cy="12070"/>
           </a:xfrm>
           <a:prstGeom prst="rect">
             <a:avLst/>
@@ -2704,8 +2704,8 @@
         </p:nvSpPr>
         <p:spPr>
           <a:xfrm>
-            <a:off x="4317980" y="2230222"/>
-            <a:ext cx="2792303" cy="277978"/>
+            <a:off x="4317980" y="2246681"/>
+            <a:ext cx="2792303" cy="245059"/>
           </a:xfrm>
           <a:prstGeom prst="rect">
             <a:avLst/>
@@ -2729,8 +2729,8 @@
         </p:nvSpPr>
         <p:spPr>
           <a:xfrm>
-            <a:off x="4317980" y="2508199"/>
-            <a:ext cx="2792303" cy="8778"/>
+            <a:off x="4317980" y="2491740"/>
+            <a:ext cx="2792303" cy="12070"/>
           </a:xfrm>
           <a:prstGeom prst="rect">
             <a:avLst/>
@@ -2754,8 +2754,8 @@
         </p:nvSpPr>
         <p:spPr>
           <a:xfrm>
-            <a:off x="4317980" y="2516977"/>
-            <a:ext cx="2792303" cy="8778"/>
+            <a:off x="4317980" y="2503810"/>
+            <a:ext cx="2792303" cy="12070"/>
           </a:xfrm>
           <a:prstGeom prst="rect">
             <a:avLst/>
@@ -2779,8 +2779,8 @@
         </p:nvSpPr>
         <p:spPr>
           <a:xfrm>
-            <a:off x="4317980" y="2525756"/>
-            <a:ext cx="2792303" cy="8778"/>
+            <a:off x="4317980" y="2515880"/>
+            <a:ext cx="2792303" cy="12070"/>
           </a:xfrm>
           <a:prstGeom prst="rect">
             <a:avLst/>
@@ -2804,8 +2804,8 @@
         </p:nvSpPr>
         <p:spPr>
           <a:xfrm>
-            <a:off x="4317980" y="2534534"/>
-            <a:ext cx="2792303" cy="8778"/>
+            <a:off x="4317980" y="2527950"/>
+            <a:ext cx="2792303" cy="12070"/>
           </a:xfrm>
           <a:prstGeom prst="rect">
             <a:avLst/>
@@ -2829,8 +2829,8 @@
         </p:nvSpPr>
         <p:spPr>
           <a:xfrm>
-            <a:off x="4317980" y="2543312"/>
-            <a:ext cx="2792303" cy="8778"/>
+            <a:off x="4317980" y="2540020"/>
+            <a:ext cx="2792303" cy="12070"/>
           </a:xfrm>
           <a:prstGeom prst="rect">
             <a:avLst/>
